--- a/AMSI_vs_Obfuscation.pptx
+++ b/AMSI_vs_Obfuscation.pptx
@@ -13107,7 +13107,7 @@
         <p:spPr>
           <a:xfrm>
             <a:off x="731520" y="1051560"/>
-            <a:ext cx="10972800" cy="365760"/>
+            <a:ext cx="7038722" cy="369332"/>
           </a:xfrm>
           <a:prstGeom prst="rect">
             <a:avLst/>
@@ -13122,12 +13122,148 @@
           <a:p>
             <a:pPr algn="l"/>
             <a:r>
-              <a:rPr sz="1500" b="0" i="1">
-                <a:solidFill>
-                  <a:srgbClr val="D85218"/>
-                </a:solidFill>
-              </a:rPr>
-              <a:t>Statystyka spotyka behaviour. Każda warstwa łapie co druga przepuści.</a:t>
+              <a:rPr b="0" i="1" dirty="0" err="1">
+                <a:solidFill>
+                  <a:schemeClr val="accent2"/>
+                </a:solidFill>
+                <a:latin typeface="Abadi" panose="020B0604020104020204" pitchFamily="34" charset="0"/>
+              </a:rPr>
+              <a:t>Statystyka</a:t>
+            </a:r>
+            <a:r>
+              <a:rPr b="0" i="1" dirty="0">
+                <a:solidFill>
+                  <a:schemeClr val="accent2"/>
+                </a:solidFill>
+                <a:latin typeface="Abadi" panose="020B0604020104020204" pitchFamily="34" charset="0"/>
+              </a:rPr>
+              <a:t> </a:t>
+            </a:r>
+            <a:r>
+              <a:rPr b="0" i="1" dirty="0" err="1">
+                <a:solidFill>
+                  <a:schemeClr val="accent2"/>
+                </a:solidFill>
+                <a:latin typeface="Abadi" panose="020B0604020104020204" pitchFamily="34" charset="0"/>
+              </a:rPr>
+              <a:t>spotyka</a:t>
+            </a:r>
+            <a:r>
+              <a:rPr b="0" i="1" dirty="0">
+                <a:solidFill>
+                  <a:schemeClr val="accent2"/>
+                </a:solidFill>
+                <a:latin typeface="Abadi" panose="020B0604020104020204" pitchFamily="34" charset="0"/>
+              </a:rPr>
+              <a:t> </a:t>
+            </a:r>
+            <a:r>
+              <a:rPr b="0" i="1" dirty="0" err="1">
+                <a:solidFill>
+                  <a:schemeClr val="accent2"/>
+                </a:solidFill>
+                <a:latin typeface="Abadi" panose="020B0604020104020204" pitchFamily="34" charset="0"/>
+              </a:rPr>
+              <a:t>behaviour</a:t>
+            </a:r>
+            <a:r>
+              <a:rPr b="0" i="1" dirty="0">
+                <a:solidFill>
+                  <a:schemeClr val="accent2"/>
+                </a:solidFill>
+                <a:latin typeface="Abadi" panose="020B0604020104020204" pitchFamily="34" charset="0"/>
+              </a:rPr>
+              <a:t>. </a:t>
+            </a:r>
+            <a:r>
+              <a:rPr b="0" i="1" dirty="0" err="1">
+                <a:solidFill>
+                  <a:schemeClr val="accent2"/>
+                </a:solidFill>
+                <a:latin typeface="Abadi" panose="020B0604020104020204" pitchFamily="34" charset="0"/>
+              </a:rPr>
+              <a:t>Każda</a:t>
+            </a:r>
+            <a:r>
+              <a:rPr b="0" i="1" dirty="0">
+                <a:solidFill>
+                  <a:schemeClr val="accent2"/>
+                </a:solidFill>
+                <a:latin typeface="Abadi" panose="020B0604020104020204" pitchFamily="34" charset="0"/>
+              </a:rPr>
+              <a:t> </a:t>
+            </a:r>
+            <a:r>
+              <a:rPr b="0" i="1" dirty="0" err="1">
+                <a:solidFill>
+                  <a:schemeClr val="accent2"/>
+                </a:solidFill>
+                <a:latin typeface="Abadi" panose="020B0604020104020204" pitchFamily="34" charset="0"/>
+              </a:rPr>
+              <a:t>warstwa</a:t>
+            </a:r>
+            <a:r>
+              <a:rPr b="0" i="1" dirty="0">
+                <a:solidFill>
+                  <a:schemeClr val="accent2"/>
+                </a:solidFill>
+                <a:latin typeface="Abadi" panose="020B0604020104020204" pitchFamily="34" charset="0"/>
+              </a:rPr>
+              <a:t> </a:t>
+            </a:r>
+            <a:r>
+              <a:rPr b="0" i="1" dirty="0" err="1">
+                <a:solidFill>
+                  <a:schemeClr val="accent2"/>
+                </a:solidFill>
+                <a:latin typeface="Abadi" panose="020B0604020104020204" pitchFamily="34" charset="0"/>
+              </a:rPr>
+              <a:t>łapie</a:t>
+            </a:r>
+            <a:r>
+              <a:rPr b="0" i="1" dirty="0">
+                <a:solidFill>
+                  <a:schemeClr val="accent2"/>
+                </a:solidFill>
+                <a:latin typeface="Abadi" panose="020B0604020104020204" pitchFamily="34" charset="0"/>
+              </a:rPr>
+              <a:t> co </a:t>
+            </a:r>
+            <a:r>
+              <a:rPr b="0" i="1" dirty="0" err="1">
+                <a:solidFill>
+                  <a:schemeClr val="accent2"/>
+                </a:solidFill>
+                <a:latin typeface="Abadi" panose="020B0604020104020204" pitchFamily="34" charset="0"/>
+              </a:rPr>
+              <a:t>druga</a:t>
+            </a:r>
+            <a:r>
+              <a:rPr b="0" i="1" dirty="0">
+                <a:solidFill>
+                  <a:schemeClr val="accent2"/>
+                </a:solidFill>
+                <a:latin typeface="Abadi" panose="020B0604020104020204" pitchFamily="34" charset="0"/>
+              </a:rPr>
+              <a:t> </a:t>
+            </a:r>
+            <a:r>
+              <a:rPr b="0" i="1" dirty="0" err="1">
+                <a:solidFill>
+                  <a:schemeClr val="accent2"/>
+                </a:solidFill>
+                <a:latin typeface="Abadi" panose="020B0604020104020204" pitchFamily="34" charset="0"/>
+              </a:rPr>
+              <a:t>przepuści</a:t>
+            </a:r>
+            <a:r>
+              <a:rPr b="0" i="1" dirty="0">
+                <a:solidFill>
+                  <a:schemeClr val="accent2"/>
+                </a:solidFill>
+                <a:latin typeface="Abadi" panose="020B0604020104020204" pitchFamily="34" charset="0"/>
+              </a:rPr>
+              <a:t>.</a:t>
             </a:r>
           </a:p>
         </p:txBody>
@@ -13221,7 +13357,57 @@
         <p:spPr>
           <a:xfrm>
             <a:off x="640080" y="2194560"/>
-            <a:ext cx="5212080" cy="868680"/>
+            <a:ext cx="5394960" cy="307777"/>
+          </a:xfrm>
+          <a:prstGeom prst="rect">
+            <a:avLst/>
+          </a:prstGeom>
+          <a:noFill/>
+        </p:spPr>
+        <p:txBody>
+          <a:bodyPr wrap="square">
+            <a:spAutoFit/>
+          </a:bodyPr>
+          <a:lstStyle/>
+          <a:p>
+            <a:pPr algn="l"/>
+            <a:r>
+              <a:rPr sz="1400" b="0" i="0" dirty="0">
+                <a:solidFill>
+                  <a:srgbClr val="FFFFFF"/>
+                </a:solidFill>
+              </a:rPr>
+              <a:t>PowerShell → AMSI → ramsi-com.dll (Rust COM) → </a:t>
+            </a:r>
+            <a:r>
+              <a:rPr sz="1400" b="0" i="0" dirty="0" err="1">
+                <a:solidFill>
+                  <a:srgbClr val="FFFFFF"/>
+                </a:solidFill>
+              </a:rPr>
+              <a:t>ps</a:t>
+            </a:r>
+            <a:r>
+              <a:rPr sz="1400" b="0" i="0" dirty="0">
+                <a:solidFill>
+                  <a:srgbClr val="FFFFFF"/>
+                </a:solidFill>
+              </a:rPr>
+              <a:t>-parser engine</a:t>
+            </a:r>
+          </a:p>
+        </p:txBody>
+      </p:sp>
+      <p:sp>
+        <p:nvSpPr>
+          <p:cNvPr id="9" name="TextBox 8"/>
+          <p:cNvSpPr txBox="1"/>
+          <p:nvPr/>
+        </p:nvSpPr>
+        <p:spPr>
+          <a:xfrm>
+            <a:off x="731520" y="2926080"/>
+            <a:ext cx="4158703" cy="2533963"/>
           </a:xfrm>
           <a:prstGeom prst="rect">
             <a:avLst/>
@@ -13234,54 +13420,13 @@
           </a:bodyPr>
           <a:lstStyle/>
           <a:p>
-            <a:pPr algn="l"/>
-            <a:r>
-              <a:rPr sz="1200" b="0" i="0">
-                <a:solidFill>
-                  <a:srgbClr val="FFFFFF"/>
-                </a:solidFill>
-              </a:rPr>
-              <a:t>PowerShell → AMSI → ramsi-com.dll (Rust COM)</a:t>
-            </a:r>
-          </a:p>
-          <a:p>
-            <a:pPr algn="l"/>
-            <a:r>
-              <a:rPr sz="1200" b="0" i="0">
-                <a:solidFill>
-                  <a:srgbClr val="FFFFFF"/>
-                </a:solidFill>
-              </a:rPr>
-              <a:t>                   → ps-parser-cli engine</a:t>
-            </a:r>
-          </a:p>
-        </p:txBody>
-      </p:sp>
-      <p:sp>
-        <p:nvSpPr>
-          <p:cNvPr id="9" name="TextBox 8"/>
-          <p:cNvSpPr txBox="1"/>
-          <p:nvPr/>
-        </p:nvSpPr>
-        <p:spPr>
-          <a:xfrm>
-            <a:off x="640080" y="3200400"/>
-            <a:ext cx="5212080" cy="2468880"/>
-          </a:xfrm>
-          <a:prstGeom prst="rect">
-            <a:avLst/>
-          </a:prstGeom>
-          <a:noFill/>
-        </p:spPr>
-        <p:txBody>
-          <a:bodyPr wrap="none">
-            <a:spAutoFit/>
-          </a:bodyPr>
-          <a:lstStyle/>
-          <a:p>
-            <a:pPr algn="l"/>
-            <a:r>
-              <a:rPr sz="1300" b="1">
+            <a:pPr algn="l">
+              <a:lnSpc>
+                <a:spcPct val="150000"/>
+              </a:lnSpc>
+            </a:pPr>
+            <a:r>
+              <a:rPr b="1" dirty="0">
                 <a:solidFill>
                   <a:srgbClr val="D85218"/>
                 </a:solidFill>
@@ -13289,18 +13434,43 @@
               <a:t>▸ </a:t>
             </a:r>
             <a:r>
-              <a:rPr sz="1300">
-                <a:solidFill>
-                  <a:srgbClr val="FFFFFF"/>
-                </a:solidFill>
-              </a:rPr>
-              <a:t>Statyczna deobfuskacja</a:t>
-            </a:r>
-          </a:p>
-          <a:p>
-            <a:pPr algn="l"/>
-            <a:r>
-              <a:rPr sz="1300" b="1">
+              <a:rPr dirty="0" err="1">
+                <a:solidFill>
+                  <a:srgbClr val="FFFFFF"/>
+                </a:solidFill>
+              </a:rPr>
+              <a:t>Statyczna</a:t>
+            </a:r>
+            <a:r>
+              <a:rPr dirty="0">
+                <a:solidFill>
+                  <a:srgbClr val="FFFFFF"/>
+                </a:solidFill>
+              </a:rPr>
+              <a:t> </a:t>
+            </a:r>
+            <a:r>
+              <a:rPr dirty="0" err="1">
+                <a:solidFill>
+                  <a:srgbClr val="FFFFFF"/>
+                </a:solidFill>
+              </a:rPr>
+              <a:t>deobfuskacja</a:t>
+            </a:r>
+            <a:endParaRPr dirty="0">
+              <a:solidFill>
+                <a:srgbClr val="FFFFFF"/>
+              </a:solidFill>
+            </a:endParaRPr>
+          </a:p>
+          <a:p>
+            <a:pPr algn="l">
+              <a:lnSpc>
+                <a:spcPct val="150000"/>
+              </a:lnSpc>
+            </a:pPr>
+            <a:r>
+              <a:rPr b="1" dirty="0">
                 <a:solidFill>
                   <a:srgbClr val="D85218"/>
                 </a:solidFill>
@@ -13308,7 +13478,7 @@
               <a:t>▸ </a:t>
             </a:r>
             <a:r>
-              <a:rPr sz="1300">
+              <a:rPr dirty="0">
                 <a:solidFill>
                   <a:srgbClr val="FFFFFF"/>
                 </a:solidFill>
@@ -13317,9 +13487,13 @@
             </a:r>
           </a:p>
           <a:p>
-            <a:pPr algn="l"/>
-            <a:r>
-              <a:rPr sz="1300" b="1">
+            <a:pPr algn="l">
+              <a:lnSpc>
+                <a:spcPct val="150000"/>
+              </a:lnSpc>
+            </a:pPr>
+            <a:r>
+              <a:rPr b="1" dirty="0">
                 <a:solidFill>
                   <a:srgbClr val="D85218"/>
                 </a:solidFill>
@@ -13327,18 +13501,30 @@
               <a:t>▸ </a:t>
             </a:r>
             <a:r>
-              <a:rPr sz="1300">
-                <a:solidFill>
-                  <a:srgbClr val="FFFFFF"/>
-                </a:solidFill>
-              </a:rPr>
-              <a:t>Rekursywny base64 (8 layers)</a:t>
-            </a:r>
-          </a:p>
-          <a:p>
-            <a:pPr algn="l"/>
-            <a:r>
-              <a:rPr sz="1300" b="1">
+              <a:rPr dirty="0" err="1">
+                <a:solidFill>
+                  <a:srgbClr val="FFFFFF"/>
+                </a:solidFill>
+              </a:rPr>
+              <a:t>Rekursywny</a:t>
+            </a:r>
+            <a:r>
+              <a:rPr dirty="0">
+                <a:solidFill>
+                  <a:srgbClr val="FFFFFF"/>
+                </a:solidFill>
+              </a:rPr>
+              <a:t> base64 (8 layers)</a:t>
+            </a:r>
+          </a:p>
+          <a:p>
+            <a:pPr algn="l">
+              <a:lnSpc>
+                <a:spcPct val="150000"/>
+              </a:lnSpc>
+            </a:pPr>
+            <a:r>
+              <a:rPr b="1" dirty="0">
                 <a:solidFill>
                   <a:srgbClr val="D85218"/>
                 </a:solidFill>
@@ -13346,18 +13532,38 @@
               <a:t>▸ </a:t>
             </a:r>
             <a:r>
-              <a:rPr sz="1300">
-                <a:solidFill>
-                  <a:srgbClr val="FFFFFF"/>
-                </a:solidFill>
-              </a:rPr>
-              <a:t>30+ predykatów AMSI bypass</a:t>
-            </a:r>
-          </a:p>
-          <a:p>
-            <a:pPr algn="l"/>
-            <a:r>
-              <a:rPr sz="1300" b="1">
+              <a:rPr dirty="0">
+                <a:solidFill>
+                  <a:srgbClr val="FFFFFF"/>
+                </a:solidFill>
+              </a:rPr>
+              <a:t>30+ </a:t>
+            </a:r>
+            <a:r>
+              <a:rPr dirty="0" err="1">
+                <a:solidFill>
+                  <a:srgbClr val="FFFFFF"/>
+                </a:solidFill>
+              </a:rPr>
+              <a:t>predykatów</a:t>
+            </a:r>
+            <a:r>
+              <a:rPr dirty="0">
+                <a:solidFill>
+                  <a:srgbClr val="FFFFFF"/>
+                </a:solidFill>
+              </a:rPr>
+              <a:t> AMSI bypass</a:t>
+            </a:r>
+          </a:p>
+          <a:p>
+            <a:pPr algn="l">
+              <a:lnSpc>
+                <a:spcPct val="150000"/>
+              </a:lnSpc>
+            </a:pPr>
+            <a:r>
+              <a:rPr b="1" dirty="0">
                 <a:solidFill>
                   <a:srgbClr val="D85218"/>
                 </a:solidFill>
@@ -13365,18 +13571,30 @@
               <a:t>▸ </a:t>
             </a:r>
             <a:r>
-              <a:rPr sz="1300">
-                <a:solidFill>
-                  <a:srgbClr val="FFFFFF"/>
-                </a:solidFill>
-              </a:rPr>
-              <a:t>Blokuje BEFORE execution</a:t>
-            </a:r>
-          </a:p>
-          <a:p>
-            <a:pPr algn="l"/>
-            <a:r>
-              <a:rPr sz="1300" b="1">
+              <a:rPr dirty="0" err="1">
+                <a:solidFill>
+                  <a:srgbClr val="FFFFFF"/>
+                </a:solidFill>
+              </a:rPr>
+              <a:t>Blokuje</a:t>
+            </a:r>
+            <a:r>
+              <a:rPr dirty="0">
+                <a:solidFill>
+                  <a:srgbClr val="FFFFFF"/>
+                </a:solidFill>
+              </a:rPr>
+              <a:t> BEFORE execution</a:t>
+            </a:r>
+          </a:p>
+          <a:p>
+            <a:pPr algn="l">
+              <a:lnSpc>
+                <a:spcPct val="150000"/>
+              </a:lnSpc>
+            </a:pPr>
+            <a:r>
+              <a:rPr b="1" dirty="0">
                 <a:solidFill>
                   <a:srgbClr val="D85218"/>
                 </a:solidFill>
@@ -13384,12 +13602,20 @@
               <a:t>▸ </a:t>
             </a:r>
             <a:r>
-              <a:rPr sz="1300">
-                <a:solidFill>
-                  <a:srgbClr val="FFFFFF"/>
-                </a:solidFill>
-              </a:rPr>
-              <a:t>Werdykt: Clean / Suspicious / BYPASS</a:t>
+              <a:rPr dirty="0" err="1">
+                <a:solidFill>
+                  <a:srgbClr val="FFFFFF"/>
+                </a:solidFill>
+              </a:rPr>
+              <a:t>Werdykt</a:t>
+            </a:r>
+            <a:r>
+              <a:rPr dirty="0">
+                <a:solidFill>
+                  <a:srgbClr val="FFFFFF"/>
+                </a:solidFill>
+              </a:rPr>
+              <a:t>: Clean / Suspicious / BYPASS</a:t>
             </a:r>
           </a:p>
         </p:txBody>
@@ -13595,7 +13821,7 @@
         <p:spPr>
           <a:xfrm>
             <a:off x="6400800" y="2194560"/>
-            <a:ext cx="5212080" cy="868680"/>
+            <a:ext cx="5479385" cy="307777"/>
           </a:xfrm>
           <a:prstGeom prst="rect">
             <a:avLst/>
@@ -13610,23 +13836,92 @@
           <a:p>
             <a:pPr algn="l"/>
             <a:r>
-              <a:rPr sz="1200" b="0" i="0">
-                <a:solidFill>
-                  <a:srgbClr val="FFFFFF"/>
-                </a:solidFill>
-              </a:rPr>
-              <a:t>Kernel driver (sysmon-rs, no_std)</a:t>
-            </a:r>
-          </a:p>
-          <a:p>
-            <a:pPr algn="l"/>
-            <a:r>
-              <a:rPr sz="1200" b="0" i="0">
-                <a:solidFill>
-                  <a:srgbClr val="FFFFFF"/>
-                </a:solidFill>
-              </a:rPr>
-              <a:t>→ userspace daemon (sysmon-um)</a:t>
+              <a:rPr sz="1400" b="0" i="0" dirty="0">
+                <a:solidFill>
+                  <a:srgbClr val="FFFFFF"/>
+                </a:solidFill>
+              </a:rPr>
+              <a:t>Kernel driver (</a:t>
+            </a:r>
+            <a:r>
+              <a:rPr sz="1400" b="0" i="0" dirty="0" err="1">
+                <a:solidFill>
+                  <a:srgbClr val="FFFFFF"/>
+                </a:solidFill>
+              </a:rPr>
+              <a:t>sysmon-rs</a:t>
+            </a:r>
+            <a:r>
+              <a:rPr sz="1400" b="0" i="0" dirty="0">
+                <a:solidFill>
+                  <a:srgbClr val="FFFFFF"/>
+                </a:solidFill>
+              </a:rPr>
+              <a:t>, </a:t>
+            </a:r>
+            <a:r>
+              <a:rPr sz="1400" b="0" i="0" dirty="0" err="1">
+                <a:solidFill>
+                  <a:srgbClr val="FFFFFF"/>
+                </a:solidFill>
+              </a:rPr>
+              <a:t>no_std</a:t>
+            </a:r>
+            <a:r>
+              <a:rPr sz="1400" b="0" i="0" dirty="0">
+                <a:solidFill>
+                  <a:srgbClr val="FFFFFF"/>
+                </a:solidFill>
+              </a:rPr>
+              <a:t>)</a:t>
+            </a:r>
+            <a:r>
+              <a:rPr lang="en-US" sz="1400" b="0" i="0" dirty="0">
+                <a:solidFill>
+                  <a:srgbClr val="FFFFFF"/>
+                </a:solidFill>
+              </a:rPr>
+              <a:t> </a:t>
+            </a:r>
+            <a:r>
+              <a:rPr sz="1400" b="0" i="0" dirty="0">
+                <a:solidFill>
+                  <a:srgbClr val="FFFFFF"/>
+                </a:solidFill>
+              </a:rPr>
+              <a:t>→ </a:t>
+            </a:r>
+            <a:r>
+              <a:rPr sz="1400" b="0" i="0" dirty="0" err="1">
+                <a:solidFill>
+                  <a:srgbClr val="FFFFFF"/>
+                </a:solidFill>
+              </a:rPr>
+              <a:t>userspace</a:t>
+            </a:r>
+            <a:r>
+              <a:rPr sz="1400" b="0" i="0" dirty="0">
+                <a:solidFill>
+                  <a:srgbClr val="FFFFFF"/>
+                </a:solidFill>
+              </a:rPr>
+              <a:t> daemon (</a:t>
+            </a:r>
+            <a:r>
+              <a:rPr sz="1400" b="0" i="0" dirty="0" err="1">
+                <a:solidFill>
+                  <a:srgbClr val="FFFFFF"/>
+                </a:solidFill>
+              </a:rPr>
+              <a:t>sysmon</a:t>
+            </a:r>
+            <a:r>
+              <a:rPr sz="1400" b="0" i="0" dirty="0">
+                <a:solidFill>
+                  <a:srgbClr val="FFFFFF"/>
+                </a:solidFill>
+              </a:rPr>
+              <a:t>-um)</a:t>
             </a:r>
           </a:p>
         </p:txBody>
@@ -13639,8 +13934,8 @@
         </p:nvSpPr>
         <p:spPr>
           <a:xfrm>
-            <a:off x="6400800" y="3200400"/>
-            <a:ext cx="5212080" cy="2468880"/>
+            <a:off x="6400800" y="2939258"/>
+            <a:ext cx="3684214" cy="2533963"/>
           </a:xfrm>
           <a:prstGeom prst="rect">
             <a:avLst/>
@@ -13653,9 +13948,13 @@
           </a:bodyPr>
           <a:lstStyle/>
           <a:p>
-            <a:pPr algn="l"/>
-            <a:r>
-              <a:rPr sz="1300" b="1">
+            <a:pPr algn="l">
+              <a:lnSpc>
+                <a:spcPct val="150000"/>
+              </a:lnSpc>
+            </a:pPr>
+            <a:r>
+              <a:rPr b="1" dirty="0">
                 <a:solidFill>
                   <a:srgbClr val="D85218"/>
                 </a:solidFill>
@@ -13663,18 +13962,27 @@
               <a:t>▸ </a:t>
             </a:r>
             <a:r>
-              <a:rPr sz="1300">
+              <a:rPr dirty="0" err="1">
                 <a:solidFill>
                   <a:srgbClr val="FFFFFF"/>
                 </a:solidFill>
               </a:rPr>
               <a:t>PsSetCreateProcessNotifyEx</a:t>
             </a:r>
-          </a:p>
-          <a:p>
-            <a:pPr algn="l"/>
-            <a:r>
-              <a:rPr sz="1300" b="1">
+            <a:endParaRPr dirty="0">
+              <a:solidFill>
+                <a:srgbClr val="FFFFFF"/>
+              </a:solidFill>
+            </a:endParaRPr>
+          </a:p>
+          <a:p>
+            <a:pPr algn="l">
+              <a:lnSpc>
+                <a:spcPct val="150000"/>
+              </a:lnSpc>
+            </a:pPr>
+            <a:r>
+              <a:rPr b="1" dirty="0">
                 <a:solidFill>
                   <a:srgbClr val="D85218"/>
                 </a:solidFill>
@@ -13682,18 +13990,27 @@
               <a:t>▸ </a:t>
             </a:r>
             <a:r>
-              <a:rPr sz="1300">
+              <a:rPr dirty="0" err="1">
                 <a:solidFill>
                   <a:srgbClr val="FFFFFF"/>
                 </a:solidFill>
               </a:rPr>
               <a:t>PsSetLoadImageNotify</a:t>
             </a:r>
-          </a:p>
-          <a:p>
-            <a:pPr algn="l"/>
-            <a:r>
-              <a:rPr sz="1300" b="1">
+            <a:endParaRPr dirty="0">
+              <a:solidFill>
+                <a:srgbClr val="FFFFFF"/>
+              </a:solidFill>
+            </a:endParaRPr>
+          </a:p>
+          <a:p>
+            <a:pPr algn="l">
+              <a:lnSpc>
+                <a:spcPct val="150000"/>
+              </a:lnSpc>
+            </a:pPr>
+            <a:r>
+              <a:rPr b="1" dirty="0">
                 <a:solidFill>
                   <a:srgbClr val="D85218"/>
                 </a:solidFill>
@@ -13701,18 +14018,30 @@
               <a:t>▸ </a:t>
             </a:r>
             <a:r>
-              <a:rPr sz="1300">
-                <a:solidFill>
-                  <a:srgbClr val="FFFFFF"/>
-                </a:solidFill>
-              </a:rPr>
-              <a:t>CmRegisterCallback (registry)</a:t>
-            </a:r>
-          </a:p>
-          <a:p>
-            <a:pPr algn="l"/>
-            <a:r>
-              <a:rPr sz="1300" b="1">
+              <a:rPr dirty="0" err="1">
+                <a:solidFill>
+                  <a:srgbClr val="FFFFFF"/>
+                </a:solidFill>
+              </a:rPr>
+              <a:t>CmRegisterCallback</a:t>
+            </a:r>
+            <a:r>
+              <a:rPr dirty="0">
+                <a:solidFill>
+                  <a:srgbClr val="FFFFFF"/>
+                </a:solidFill>
+              </a:rPr>
+              <a:t> (registry)</a:t>
+            </a:r>
+          </a:p>
+          <a:p>
+            <a:pPr algn="l">
+              <a:lnSpc>
+                <a:spcPct val="150000"/>
+              </a:lnSpc>
+            </a:pPr>
+            <a:r>
+              <a:rPr b="1" dirty="0">
                 <a:solidFill>
                   <a:srgbClr val="D85218"/>
                 </a:solidFill>
@@ -13720,7 +14049,7 @@
               <a:t>▸ </a:t>
             </a:r>
             <a:r>
-              <a:rPr sz="1300">
+              <a:rPr dirty="0">
                 <a:solidFill>
                   <a:srgbClr val="FFFFFF"/>
                 </a:solidFill>
@@ -13729,9 +14058,13 @@
             </a:r>
           </a:p>
           <a:p>
-            <a:pPr algn="l"/>
-            <a:r>
-              <a:rPr sz="1300" b="1">
+            <a:pPr algn="l">
+              <a:lnSpc>
+                <a:spcPct val="150000"/>
+              </a:lnSpc>
+            </a:pPr>
+            <a:r>
+              <a:rPr b="1" dirty="0">
                 <a:solidFill>
                   <a:srgbClr val="D85218"/>
                 </a:solidFill>
@@ -13739,7 +14072,7 @@
               <a:t>▸ </a:t>
             </a:r>
             <a:r>
-              <a:rPr sz="1300">
+              <a:rPr dirty="0">
                 <a:solidFill>
                   <a:srgbClr val="FFFFFF"/>
                 </a:solidFill>
@@ -13748,9 +14081,13 @@
             </a:r>
           </a:p>
           <a:p>
-            <a:pPr algn="l"/>
-            <a:r>
-              <a:rPr sz="1300" b="1">
+            <a:pPr algn="l">
+              <a:lnSpc>
+                <a:spcPct val="150000"/>
+              </a:lnSpc>
+            </a:pPr>
+            <a:r>
+              <a:rPr b="1" dirty="0">
                 <a:solidFill>
                   <a:srgbClr val="D85218"/>
                 </a:solidFill>
@@ -13758,13 +14095,66 @@
               <a:t>▸ </a:t>
             </a:r>
             <a:r>
-              <a:rPr sz="1300">
-                <a:solidFill>
-                  <a:srgbClr val="FFFFFF"/>
-                </a:solidFill>
-              </a:rPr>
-              <a:t>Werdykt na podstawie behaviour</a:t>
-            </a:r>
+              <a:rPr dirty="0" err="1">
+                <a:solidFill>
+                  <a:srgbClr val="FFFFFF"/>
+                </a:solidFill>
+              </a:rPr>
+              <a:t>Werdykt</a:t>
+            </a:r>
+            <a:r>
+              <a:rPr dirty="0">
+                <a:solidFill>
+                  <a:srgbClr val="FFFFFF"/>
+                </a:solidFill>
+              </a:rPr>
+              <a:t> </a:t>
+            </a:r>
+            <a:r>
+              <a:rPr dirty="0" err="1">
+                <a:solidFill>
+                  <a:srgbClr val="FFFFFF"/>
+                </a:solidFill>
+              </a:rPr>
+              <a:t>na</a:t>
+            </a:r>
+            <a:r>
+              <a:rPr dirty="0">
+                <a:solidFill>
+                  <a:srgbClr val="FFFFFF"/>
+                </a:solidFill>
+              </a:rPr>
+              <a:t> </a:t>
+            </a:r>
+            <a:r>
+              <a:rPr dirty="0" err="1">
+                <a:solidFill>
+                  <a:srgbClr val="FFFFFF"/>
+                </a:solidFill>
+              </a:rPr>
+              <a:t>podstawie</a:t>
+            </a:r>
+            <a:r>
+              <a:rPr dirty="0">
+                <a:solidFill>
+                  <a:srgbClr val="FFFFFF"/>
+                </a:solidFill>
+              </a:rPr>
+              <a:t> </a:t>
+            </a:r>
+            <a:r>
+              <a:rPr dirty="0" err="1">
+                <a:solidFill>
+                  <a:srgbClr val="FFFFFF"/>
+                </a:solidFill>
+              </a:rPr>
+              <a:t>behaviour</a:t>
+            </a:r>
+            <a:endParaRPr dirty="0">
+              <a:solidFill>
+                <a:srgbClr val="FFFFFF"/>
+              </a:solidFill>
+            </a:endParaRPr>
           </a:p>
         </p:txBody>
       </p:sp>
@@ -14033,8 +14423,8 @@
         </p:nvSpPr>
         <p:spPr>
           <a:xfrm>
-            <a:off x="731520" y="1097280"/>
-            <a:ext cx="5486400" cy="365760"/>
+            <a:off x="1554480" y="914400"/>
+            <a:ext cx="2256323" cy="523220"/>
           </a:xfrm>
           <a:prstGeom prst="rect">
             <a:avLst/>
@@ -14049,9 +14439,9 @@
           <a:p>
             <a:pPr algn="l"/>
             <a:r>
-              <a:rPr sz="1800" b="1" i="0">
-                <a:solidFill>
-                  <a:srgbClr val="D85218"/>
+              <a:rPr sz="2800" b="1" i="0" dirty="0">
+                <a:solidFill>
+                  <a:schemeClr val="accent2"/>
                 </a:solidFill>
               </a:rPr>
               <a:t>Architecture</a:t>
@@ -14067,8 +14457,8 @@
         </p:nvSpPr>
         <p:spPr>
           <a:xfrm>
-            <a:off x="731520" y="1554480"/>
-            <a:ext cx="5212080" cy="502920"/>
+            <a:off x="978408" y="1617167"/>
+            <a:ext cx="3629648" cy="630258"/>
           </a:xfrm>
           <a:prstGeom prst="rect">
             <a:avLst/>
@@ -14078,7 +14468,10 @@
           </a:solidFill>
           <a:ln w="25400">
             <a:solidFill>
-              <a:srgbClr val="94B6D2"/>
+              <a:schemeClr val="tx2">
+                <a:lumMod val="40000"/>
+                <a:lumOff val="60000"/>
+              </a:schemeClr>
             </a:solidFill>
           </a:ln>
         </p:spPr>
@@ -14101,74 +14494,16 @@
           <a:lstStyle/>
           <a:p>
             <a:pPr algn="ctr"/>
-            <a:endParaRPr/>
-          </a:p>
-        </p:txBody>
-      </p:sp>
-      <p:sp>
-        <p:nvSpPr>
-          <p:cNvPr id="7" name="TextBox 6"/>
-          <p:cNvSpPr txBox="1"/>
-          <p:nvPr/>
-        </p:nvSpPr>
-        <p:spPr>
-          <a:xfrm>
-            <a:off x="914400" y="1618488"/>
-            <a:ext cx="5029200" cy="365760"/>
-          </a:xfrm>
-          <a:prstGeom prst="rect">
-            <a:avLst/>
-          </a:prstGeom>
-          <a:noFill/>
-        </p:spPr>
-        <p:txBody>
-          <a:bodyPr wrap="none">
-            <a:spAutoFit/>
-          </a:bodyPr>
-          <a:lstStyle/>
-          <a:p>
-            <a:pPr algn="l"/>
-            <a:r>
-              <a:rPr sz="1300" b="1" i="0">
-                <a:solidFill>
-                  <a:srgbClr val="94B6D2"/>
+            <a:r>
+              <a:rPr lang="en-US" b="1" dirty="0">
+                <a:solidFill>
+                  <a:schemeClr val="tx2">
+                    <a:lumMod val="40000"/>
+                    <a:lumOff val="60000"/>
+                  </a:schemeClr>
                 </a:solidFill>
               </a:rPr>
               <a:t>PowerShell process</a:t>
-            </a:r>
-          </a:p>
-        </p:txBody>
-      </p:sp>
-      <p:sp>
-        <p:nvSpPr>
-          <p:cNvPr id="8" name="TextBox 7"/>
-          <p:cNvSpPr txBox="1"/>
-          <p:nvPr/>
-        </p:nvSpPr>
-        <p:spPr>
-          <a:xfrm>
-            <a:off x="731520" y="2057400"/>
-            <a:ext cx="5212080" cy="164592"/>
-          </a:xfrm>
-          <a:prstGeom prst="rect">
-            <a:avLst/>
-          </a:prstGeom>
-          <a:noFill/>
-        </p:spPr>
-        <p:txBody>
-          <a:bodyPr wrap="none">
-            <a:spAutoFit/>
-          </a:bodyPr>
-          <a:lstStyle/>
-          <a:p>
-            <a:pPr algn="ctr"/>
-            <a:r>
-              <a:rPr sz="1200" b="0" i="0">
-                <a:solidFill>
-                  <a:srgbClr val="778899"/>
-                </a:solidFill>
-              </a:rPr>
-              <a:t>▼</a:t>
             </a:r>
           </a:p>
         </p:txBody>
@@ -14181,8 +14516,8 @@
         </p:nvSpPr>
         <p:spPr>
           <a:xfrm>
-            <a:off x="731520" y="2240280"/>
-            <a:ext cx="5212080" cy="502920"/>
+            <a:off x="1070773" y="2491400"/>
+            <a:ext cx="3757259" cy="585895"/>
           </a:xfrm>
           <a:prstGeom prst="rect">
             <a:avLst/>
@@ -14192,7 +14527,7 @@
           </a:solidFill>
           <a:ln w="25400">
             <a:solidFill>
-              <a:srgbClr val="D85218"/>
+              <a:srgbClr val="00B050"/>
             </a:solidFill>
           </a:ln>
         </p:spPr>
@@ -14215,7 +14550,27 @@
           <a:lstStyle/>
           <a:p>
             <a:pPr algn="ctr"/>
-            <a:endParaRPr/>
+            <a:r>
+              <a:rPr lang="en-US" b="1" dirty="0">
+                <a:solidFill>
+                  <a:srgbClr val="00B050"/>
+                </a:solidFill>
+              </a:rPr>
+              <a:t>amsi.dll  ::  </a:t>
+            </a:r>
+            <a:r>
+              <a:rPr lang="en-US" b="1" dirty="0" err="1">
+                <a:solidFill>
+                  <a:srgbClr val="00B050"/>
+                </a:solidFill>
+              </a:rPr>
+              <a:t>AmsiScanBuffer</a:t>
+            </a:r>
+            <a:endParaRPr lang="en-US" b="1" dirty="0">
+              <a:solidFill>
+                <a:srgbClr val="00B050"/>
+              </a:solidFill>
+            </a:endParaRPr>
           </a:p>
         </p:txBody>
       </p:sp>
@@ -14227,8 +14582,8 @@
         </p:nvSpPr>
         <p:spPr>
           <a:xfrm>
-            <a:off x="914400" y="2304288"/>
-            <a:ext cx="5029200" cy="365760"/>
+            <a:off x="1005840" y="2304288"/>
+            <a:ext cx="184731" cy="292388"/>
           </a:xfrm>
           <a:prstGeom prst="rect">
             <a:avLst/>
@@ -14242,48 +14597,11 @@
           <a:lstStyle/>
           <a:p>
             <a:pPr algn="l"/>
-            <a:r>
-              <a:rPr sz="1300" b="1" i="0">
-                <a:solidFill>
-                  <a:srgbClr val="D85218"/>
-                </a:solidFill>
-              </a:rPr>
-              <a:t>amsi.dll  ::  AmsiScanBuffer</a:t>
-            </a:r>
-          </a:p>
-        </p:txBody>
-      </p:sp>
-      <p:sp>
-        <p:nvSpPr>
-          <p:cNvPr id="11" name="TextBox 10"/>
-          <p:cNvSpPr txBox="1"/>
-          <p:nvPr/>
-        </p:nvSpPr>
-        <p:spPr>
-          <a:xfrm>
-            <a:off x="731520" y="2743200"/>
-            <a:ext cx="5212080" cy="164592"/>
-          </a:xfrm>
-          <a:prstGeom prst="rect">
-            <a:avLst/>
-          </a:prstGeom>
-          <a:noFill/>
-        </p:spPr>
-        <p:txBody>
-          <a:bodyPr wrap="none">
-            <a:spAutoFit/>
-          </a:bodyPr>
-          <a:lstStyle/>
-          <a:p>
-            <a:pPr algn="ctr"/>
-            <a:r>
-              <a:rPr sz="1200" b="0" i="0">
-                <a:solidFill>
-                  <a:srgbClr val="778899"/>
-                </a:solidFill>
-              </a:rPr>
-              <a:t>▼</a:t>
-            </a:r>
+            <a:endParaRPr sz="1300" b="1" i="0" dirty="0">
+              <a:solidFill>
+                <a:srgbClr val="D85218"/>
+              </a:solidFill>
+            </a:endParaRPr>
           </a:p>
         </p:txBody>
       </p:sp>
@@ -14295,8 +14613,8 @@
         </p:nvSpPr>
         <p:spPr>
           <a:xfrm>
-            <a:off x="731520" y="2926080"/>
-            <a:ext cx="5212080" cy="502920"/>
+            <a:off x="1190571" y="3214455"/>
+            <a:ext cx="3785616" cy="642955"/>
           </a:xfrm>
           <a:prstGeom prst="rect">
             <a:avLst/>
@@ -14329,74 +14647,13 @@
           <a:lstStyle/>
           <a:p>
             <a:pPr algn="ctr"/>
-            <a:endParaRPr/>
-          </a:p>
-        </p:txBody>
-      </p:sp>
-      <p:sp>
-        <p:nvSpPr>
-          <p:cNvPr id="13" name="TextBox 12"/>
-          <p:cNvSpPr txBox="1"/>
-          <p:nvPr/>
-        </p:nvSpPr>
-        <p:spPr>
-          <a:xfrm>
-            <a:off x="914400" y="2990088"/>
-            <a:ext cx="5029200" cy="365760"/>
-          </a:xfrm>
-          <a:prstGeom prst="rect">
-            <a:avLst/>
-          </a:prstGeom>
-          <a:noFill/>
-        </p:spPr>
-        <p:txBody>
-          <a:bodyPr wrap="none">
-            <a:spAutoFit/>
-          </a:bodyPr>
-          <a:lstStyle/>
-          <a:p>
-            <a:pPr algn="l"/>
-            <a:r>
-              <a:rPr sz="1300" b="1" i="0">
+            <a:r>
+              <a:rPr lang="en-US" b="1" dirty="0">
                 <a:solidFill>
                   <a:srgbClr val="7BA79D"/>
                 </a:solidFill>
               </a:rPr>
-              <a:t>ramsi-com.dll  (Rust COM provider)</a:t>
-            </a:r>
-          </a:p>
-        </p:txBody>
-      </p:sp>
-      <p:sp>
-        <p:nvSpPr>
-          <p:cNvPr id="14" name="TextBox 13"/>
-          <p:cNvSpPr txBox="1"/>
-          <p:nvPr/>
-        </p:nvSpPr>
-        <p:spPr>
-          <a:xfrm>
-            <a:off x="731520" y="3429000"/>
-            <a:ext cx="5212080" cy="164592"/>
-          </a:xfrm>
-          <a:prstGeom prst="rect">
-            <a:avLst/>
-          </a:prstGeom>
-          <a:noFill/>
-        </p:spPr>
-        <p:txBody>
-          <a:bodyPr wrap="none">
-            <a:spAutoFit/>
-          </a:bodyPr>
-          <a:lstStyle/>
-          <a:p>
-            <a:pPr algn="ctr"/>
-            <a:r>
-              <a:rPr sz="1200" b="0" i="0">
-                <a:solidFill>
-                  <a:srgbClr val="778899"/>
-                </a:solidFill>
-              </a:rPr>
-              <a:t>▼</a:t>
+              <a:t>ramsi.dll  (Rust COM provider)</a:t>
             </a:r>
           </a:p>
         </p:txBody>
@@ -14409,8 +14666,8 @@
         </p:nvSpPr>
         <p:spPr>
           <a:xfrm>
-            <a:off x="731520" y="3611880"/>
-            <a:ext cx="5212080" cy="502920"/>
+            <a:off x="1280160" y="4050113"/>
+            <a:ext cx="3785616" cy="658368"/>
           </a:xfrm>
           <a:prstGeom prst="rect">
             <a:avLst/>
@@ -14420,7 +14677,10 @@
           </a:solidFill>
           <a:ln w="25400">
             <a:solidFill>
-              <a:srgbClr val="7BA79D"/>
+              <a:schemeClr val="bg2">
+                <a:lumMod val="60000"/>
+                <a:lumOff val="40000"/>
+              </a:schemeClr>
             </a:solidFill>
           </a:ln>
         </p:spPr>
@@ -14443,74 +14703,27 @@
           <a:lstStyle/>
           <a:p>
             <a:pPr algn="ctr"/>
-            <a:endParaRPr/>
-          </a:p>
-        </p:txBody>
-      </p:sp>
-      <p:sp>
-        <p:nvSpPr>
-          <p:cNvPr id="16" name="TextBox 15"/>
-          <p:cNvSpPr txBox="1"/>
-          <p:nvPr/>
-        </p:nvSpPr>
-        <p:spPr>
-          <a:xfrm>
-            <a:off x="914400" y="3675888"/>
-            <a:ext cx="5029200" cy="365760"/>
-          </a:xfrm>
-          <a:prstGeom prst="rect">
-            <a:avLst/>
-          </a:prstGeom>
-          <a:noFill/>
-        </p:spPr>
-        <p:txBody>
-          <a:bodyPr wrap="none">
-            <a:spAutoFit/>
-          </a:bodyPr>
-          <a:lstStyle/>
-          <a:p>
-            <a:pPr algn="l"/>
-            <a:r>
-              <a:rPr sz="1300" b="1" i="0">
-                <a:solidFill>
-                  <a:srgbClr val="7BA79D"/>
-                </a:solidFill>
-              </a:rPr>
-              <a:t>ps-parser-cli engine  (in-process)</a:t>
-            </a:r>
-          </a:p>
-        </p:txBody>
-      </p:sp>
-      <p:sp>
-        <p:nvSpPr>
-          <p:cNvPr id="17" name="TextBox 16"/>
-          <p:cNvSpPr txBox="1"/>
-          <p:nvPr/>
-        </p:nvSpPr>
-        <p:spPr>
-          <a:xfrm>
-            <a:off x="731520" y="4114800"/>
-            <a:ext cx="5212080" cy="164592"/>
-          </a:xfrm>
-          <a:prstGeom prst="rect">
-            <a:avLst/>
-          </a:prstGeom>
-          <a:noFill/>
-        </p:spPr>
-        <p:txBody>
-          <a:bodyPr wrap="none">
-            <a:spAutoFit/>
-          </a:bodyPr>
-          <a:lstStyle/>
-          <a:p>
-            <a:pPr algn="ctr"/>
-            <a:r>
-              <a:rPr sz="1200" b="0" i="0">
-                <a:solidFill>
-                  <a:srgbClr val="778899"/>
-                </a:solidFill>
-              </a:rPr>
-              <a:t>▼</a:t>
+            <a:r>
+              <a:rPr lang="en-US" b="1" dirty="0" err="1">
+                <a:solidFill>
+                  <a:schemeClr val="bg2">
+                    <a:lumMod val="60000"/>
+                    <a:lumOff val="40000"/>
+                  </a:schemeClr>
+                </a:solidFill>
+              </a:rPr>
+              <a:t>ps</a:t>
+            </a:r>
+            <a:r>
+              <a:rPr lang="en-US" b="1" dirty="0">
+                <a:solidFill>
+                  <a:schemeClr val="bg2">
+                    <a:lumMod val="60000"/>
+                    <a:lumOff val="40000"/>
+                  </a:schemeClr>
+                </a:solidFill>
+              </a:rPr>
+              <a:t>-parser engine  (in-process)</a:t>
             </a:r>
           </a:p>
         </p:txBody>
@@ -14523,8 +14736,8 @@
         </p:nvSpPr>
         <p:spPr>
           <a:xfrm>
-            <a:off x="731520" y="4297680"/>
-            <a:ext cx="5212080" cy="502920"/>
+            <a:off x="1389888" y="4901184"/>
+            <a:ext cx="3849624" cy="658368"/>
           </a:xfrm>
           <a:prstGeom prst="rect">
             <a:avLst/>
@@ -14534,7 +14747,7 @@
           </a:solidFill>
           <a:ln w="25400">
             <a:solidFill>
-              <a:srgbClr val="C05040"/>
+              <a:srgbClr val="FF0000"/>
             </a:solidFill>
           </a:ln>
         </p:spPr>
@@ -14557,20 +14770,27 @@
           <a:lstStyle/>
           <a:p>
             <a:pPr algn="ctr"/>
-            <a:endParaRPr/>
-          </a:p>
-        </p:txBody>
-      </p:sp>
-      <p:sp>
-        <p:nvSpPr>
-          <p:cNvPr id="19" name="TextBox 18"/>
+            <a:r>
+              <a:rPr lang="en-US" b="1" dirty="0">
+                <a:solidFill>
+                  <a:srgbClr val="FF0000"/>
+                </a:solidFill>
+              </a:rPr>
+              <a:t>AMSI verdict  →  block / allow</a:t>
+            </a:r>
+          </a:p>
+        </p:txBody>
+      </p:sp>
+      <p:sp>
+        <p:nvSpPr>
+          <p:cNvPr id="20" name="TextBox 19"/>
           <p:cNvSpPr txBox="1"/>
           <p:nvPr/>
         </p:nvSpPr>
         <p:spPr>
           <a:xfrm>
-            <a:off x="914400" y="4361688"/>
-            <a:ext cx="5029200" cy="365760"/>
+            <a:off x="6620256" y="914400"/>
+            <a:ext cx="2903936" cy="461665"/>
           </a:xfrm>
           <a:prstGeom prst="rect">
             <a:avLst/>
@@ -14585,26 +14805,34 @@
           <a:p>
             <a:pPr algn="l"/>
             <a:r>
-              <a:rPr sz="1300" b="1" i="0">
-                <a:solidFill>
-                  <a:srgbClr val="C05040"/>
-                </a:solidFill>
-              </a:rPr>
-              <a:t>AMSI verdict  →  block / allow</a:t>
-            </a:r>
-          </a:p>
-        </p:txBody>
-      </p:sp>
-      <p:sp>
-        <p:nvSpPr>
-          <p:cNvPr id="20" name="TextBox 19"/>
+              <a:rPr sz="2400" b="1" i="0" dirty="0" err="1">
+                <a:solidFill>
+                  <a:schemeClr val="accent2"/>
+                </a:solidFill>
+              </a:rPr>
+              <a:t>ps</a:t>
+            </a:r>
+            <a:r>
+              <a:rPr sz="2400" b="1" i="0" dirty="0">
+                <a:solidFill>
+                  <a:schemeClr val="accent2"/>
+                </a:solidFill>
+              </a:rPr>
+              <a:t>-parser internals</a:t>
+            </a:r>
+          </a:p>
+        </p:txBody>
+      </p:sp>
+      <p:sp>
+        <p:nvSpPr>
+          <p:cNvPr id="21" name="TextBox 20"/>
           <p:cNvSpPr txBox="1"/>
           <p:nvPr/>
         </p:nvSpPr>
         <p:spPr>
           <a:xfrm>
-            <a:off x="6400800" y="1097280"/>
-            <a:ext cx="5486400" cy="365760"/>
+            <a:off x="6400800" y="1554480"/>
+            <a:ext cx="3629648" cy="2960875"/>
           </a:xfrm>
           <a:prstGeom prst="rect">
             <a:avLst/>
@@ -14617,28 +14845,320 @@
           </a:bodyPr>
           <a:lstStyle/>
           <a:p>
-            <a:pPr algn="l"/>
-            <a:r>
-              <a:rPr sz="1800" b="1" i="0">
+            <a:pPr algn="l">
+              <a:lnSpc>
+                <a:spcPct val="150000"/>
+              </a:lnSpc>
+            </a:pPr>
+            <a:r>
+              <a:rPr sz="1400" b="1" dirty="0">
                 <a:solidFill>
                   <a:srgbClr val="D85218"/>
                 </a:solidFill>
               </a:rPr>
-              <a:t>ps-parser-cli internals</a:t>
-            </a:r>
-          </a:p>
-        </p:txBody>
-      </p:sp>
-      <p:sp>
-        <p:nvSpPr>
-          <p:cNvPr id="21" name="TextBox 20"/>
+              <a:t>▸ </a:t>
+            </a:r>
+            <a:r>
+              <a:rPr sz="1400" dirty="0">
+                <a:solidFill>
+                  <a:srgbClr val="FFFFFF"/>
+                </a:solidFill>
+              </a:rPr>
+              <a:t>pest grammar — recovers AST + evaluates</a:t>
+            </a:r>
+          </a:p>
+          <a:p>
+            <a:pPr algn="l">
+              <a:lnSpc>
+                <a:spcPct val="150000"/>
+              </a:lnSpc>
+            </a:pPr>
+            <a:r>
+              <a:rPr sz="1400" b="1" dirty="0">
+                <a:solidFill>
+                  <a:srgbClr val="D85218"/>
+                </a:solidFill>
+              </a:rPr>
+              <a:t>▸ </a:t>
+            </a:r>
+            <a:r>
+              <a:rPr sz="1400" dirty="0">
+                <a:solidFill>
+                  <a:srgbClr val="FFFFFF"/>
+                </a:solidFill>
+              </a:rPr>
+              <a:t>String methods: Replace, </a:t>
+            </a:r>
+            <a:r>
+              <a:rPr sz="1400" dirty="0" err="1">
+                <a:solidFill>
+                  <a:srgbClr val="FFFFFF"/>
+                </a:solidFill>
+              </a:rPr>
+              <a:t>ToUpper</a:t>
+            </a:r>
+            <a:r>
+              <a:rPr sz="1400" dirty="0">
+                <a:solidFill>
+                  <a:srgbClr val="FFFFFF"/>
+                </a:solidFill>
+              </a:rPr>
+              <a:t>, …</a:t>
+            </a:r>
+          </a:p>
+          <a:p>
+            <a:pPr algn="l">
+              <a:lnSpc>
+                <a:spcPct val="150000"/>
+              </a:lnSpc>
+            </a:pPr>
+            <a:r>
+              <a:rPr sz="1400" b="1" dirty="0">
+                <a:solidFill>
+                  <a:srgbClr val="D85218"/>
+                </a:solidFill>
+              </a:rPr>
+              <a:t>▸ </a:t>
+            </a:r>
+            <a:r>
+              <a:rPr sz="1400" dirty="0">
+                <a:solidFill>
+                  <a:srgbClr val="FFFFFF"/>
+                </a:solidFill>
+              </a:rPr>
+              <a:t>Format operator -f, [char] casts</a:t>
+            </a:r>
+          </a:p>
+          <a:p>
+            <a:pPr algn="l">
+              <a:lnSpc>
+                <a:spcPct val="150000"/>
+              </a:lnSpc>
+            </a:pPr>
+            <a:r>
+              <a:rPr sz="1400" b="1" dirty="0">
+                <a:solidFill>
+                  <a:srgbClr val="D85218"/>
+                </a:solidFill>
+              </a:rPr>
+              <a:t>▸ </a:t>
+            </a:r>
+            <a:r>
+              <a:rPr sz="1400" dirty="0">
+                <a:solidFill>
+                  <a:srgbClr val="FFFFFF"/>
+                </a:solidFill>
+              </a:rPr>
+              <a:t>Recursive base64 (up to 8 layers)</a:t>
+            </a:r>
+          </a:p>
+          <a:p>
+            <a:pPr algn="l">
+              <a:lnSpc>
+                <a:spcPct val="150000"/>
+              </a:lnSpc>
+            </a:pPr>
+            <a:r>
+              <a:rPr sz="1400" b="1" dirty="0">
+                <a:solidFill>
+                  <a:srgbClr val="D85218"/>
+                </a:solidFill>
+              </a:rPr>
+              <a:t>▸ </a:t>
+            </a:r>
+            <a:r>
+              <a:rPr sz="1400" dirty="0">
+                <a:solidFill>
+                  <a:srgbClr val="FFFFFF"/>
+                </a:solidFill>
+              </a:rPr>
+              <a:t>UTF-16LE projection for .NET DLLs</a:t>
+            </a:r>
+          </a:p>
+          <a:p>
+            <a:pPr algn="l">
+              <a:lnSpc>
+                <a:spcPct val="150000"/>
+              </a:lnSpc>
+            </a:pPr>
+            <a:r>
+              <a:rPr sz="1400" b="1" dirty="0">
+                <a:solidFill>
+                  <a:srgbClr val="D85218"/>
+                </a:solidFill>
+              </a:rPr>
+              <a:t>▸ </a:t>
+            </a:r>
+            <a:r>
+              <a:rPr sz="1400" dirty="0">
+                <a:solidFill>
+                  <a:srgbClr val="FFFFFF"/>
+                </a:solidFill>
+              </a:rPr>
+              <a:t>30+ </a:t>
+            </a:r>
+            <a:r>
+              <a:rPr sz="1400" dirty="0" err="1">
+                <a:solidFill>
+                  <a:srgbClr val="FFFFFF"/>
+                </a:solidFill>
+              </a:rPr>
+              <a:t>predykatów</a:t>
+            </a:r>
+            <a:r>
+              <a:rPr sz="1400" dirty="0">
+                <a:solidFill>
+                  <a:srgbClr val="FFFFFF"/>
+                </a:solidFill>
+              </a:rPr>
+              <a:t>: amsi.dll, </a:t>
+            </a:r>
+            <a:r>
+              <a:rPr sz="1400" dirty="0" err="1">
+                <a:solidFill>
+                  <a:srgbClr val="FFFFFF"/>
+                </a:solidFill>
+              </a:rPr>
+              <a:t>AmsiScanBuffer</a:t>
+            </a:r>
+            <a:r>
+              <a:rPr sz="1400" dirty="0">
+                <a:solidFill>
+                  <a:srgbClr val="FFFFFF"/>
+                </a:solidFill>
+              </a:rPr>
+              <a:t>,</a:t>
+            </a:r>
+          </a:p>
+          <a:p>
+            <a:pPr algn="l">
+              <a:lnSpc>
+                <a:spcPct val="150000"/>
+              </a:lnSpc>
+            </a:pPr>
+            <a:r>
+              <a:rPr sz="1400" b="1" dirty="0">
+                <a:solidFill>
+                  <a:srgbClr val="D85218"/>
+                </a:solidFill>
+              </a:rPr>
+              <a:t>▸ </a:t>
+            </a:r>
+            <a:r>
+              <a:rPr sz="1400" dirty="0">
+                <a:solidFill>
+                  <a:srgbClr val="FFFFFF"/>
+                </a:solidFill>
+              </a:rPr>
+              <a:t>  </a:t>
+            </a:r>
+            <a:r>
+              <a:rPr sz="1400" dirty="0" err="1">
+                <a:solidFill>
+                  <a:srgbClr val="FFFFFF"/>
+                </a:solidFill>
+              </a:rPr>
+              <a:t>amsiInitFailed</a:t>
+            </a:r>
+            <a:r>
+              <a:rPr sz="1400" dirty="0">
+                <a:solidFill>
+                  <a:srgbClr val="FFFFFF"/>
+                </a:solidFill>
+              </a:rPr>
+              <a:t>, </a:t>
+            </a:r>
+            <a:r>
+              <a:rPr sz="1400" dirty="0" err="1">
+                <a:solidFill>
+                  <a:srgbClr val="FFFFFF"/>
+                </a:solidFill>
+              </a:rPr>
+              <a:t>AmsiUtils</a:t>
+            </a:r>
+            <a:r>
+              <a:rPr sz="1400" dirty="0">
+                <a:solidFill>
+                  <a:srgbClr val="FFFFFF"/>
+                </a:solidFill>
+              </a:rPr>
+              <a:t>, ETW, WLDP, …</a:t>
+            </a:r>
+          </a:p>
+          <a:p>
+            <a:pPr algn="l">
+              <a:lnSpc>
+                <a:spcPct val="150000"/>
+              </a:lnSpc>
+            </a:pPr>
+            <a:r>
+              <a:rPr sz="1400" b="1" dirty="0">
+                <a:solidFill>
+                  <a:srgbClr val="D85218"/>
+                </a:solidFill>
+              </a:rPr>
+              <a:t>▸ </a:t>
+            </a:r>
+            <a:r>
+              <a:rPr sz="1400" dirty="0">
+                <a:solidFill>
+                  <a:srgbClr val="FFFFFF"/>
+                </a:solidFill>
+              </a:rPr>
+              <a:t>Combo bonuses + scoring algorithm</a:t>
+            </a:r>
+          </a:p>
+          <a:p>
+            <a:pPr algn="l">
+              <a:lnSpc>
+                <a:spcPct val="150000"/>
+              </a:lnSpc>
+            </a:pPr>
+            <a:r>
+              <a:rPr sz="1400" b="1" dirty="0">
+                <a:solidFill>
+                  <a:srgbClr val="D85218"/>
+                </a:solidFill>
+              </a:rPr>
+              <a:t>▸ </a:t>
+            </a:r>
+            <a:r>
+              <a:rPr sz="1400" dirty="0">
+                <a:solidFill>
+                  <a:srgbClr val="FFFFFF"/>
+                </a:solidFill>
+              </a:rPr>
+              <a:t>Output: JSON  →  </a:t>
+            </a:r>
+            <a:r>
+              <a:rPr sz="1400" dirty="0" err="1">
+                <a:solidFill>
+                  <a:srgbClr val="FFFFFF"/>
+                </a:solidFill>
+              </a:rPr>
+              <a:t>ramsi</a:t>
+            </a:r>
+            <a:r>
+              <a:rPr sz="1400" dirty="0">
+                <a:solidFill>
+                  <a:srgbClr val="FFFFFF"/>
+                </a:solidFill>
+              </a:rPr>
+              <a:t>-com</a:t>
+            </a:r>
+          </a:p>
+        </p:txBody>
+      </p:sp>
+      <p:sp>
+        <p:nvSpPr>
+          <p:cNvPr id="22" name="TextBox 21"/>
           <p:cNvSpPr txBox="1"/>
           <p:nvPr/>
         </p:nvSpPr>
         <p:spPr>
           <a:xfrm>
-            <a:off x="6400800" y="1554480"/>
-            <a:ext cx="5486400" cy="4114800"/>
+            <a:off x="6400800" y="5852160"/>
+            <a:ext cx="5486400" cy="365760"/>
           </a:xfrm>
           <a:prstGeom prst="rect">
             <a:avLst/>
@@ -14653,186 +15173,32 @@
           <a:p>
             <a:pPr algn="l"/>
             <a:r>
-              <a:rPr sz="1300" b="1">
-                <a:solidFill>
-                  <a:srgbClr val="D85218"/>
-                </a:solidFill>
-              </a:rPr>
-              <a:t>▸ </a:t>
-            </a:r>
-            <a:r>
-              <a:rPr sz="1300">
-                <a:solidFill>
-                  <a:srgbClr val="FFFFFF"/>
-                </a:solidFill>
-              </a:rPr>
-              <a:t>pest grammar — recovers AST + evaluates</a:t>
-            </a:r>
-          </a:p>
-          <a:p>
-            <a:pPr algn="l"/>
-            <a:r>
-              <a:rPr sz="1300" b="1">
-                <a:solidFill>
-                  <a:srgbClr val="D85218"/>
-                </a:solidFill>
-              </a:rPr>
-              <a:t>▸ </a:t>
-            </a:r>
-            <a:r>
-              <a:rPr sz="1300">
-                <a:solidFill>
-                  <a:srgbClr val="FFFFFF"/>
-                </a:solidFill>
-              </a:rPr>
-              <a:t>String methods: Replace, ToUpper, …</a:t>
-            </a:r>
-          </a:p>
-          <a:p>
-            <a:pPr algn="l"/>
-            <a:r>
-              <a:rPr sz="1300" b="1">
-                <a:solidFill>
-                  <a:srgbClr val="D85218"/>
-                </a:solidFill>
-              </a:rPr>
-              <a:t>▸ </a:t>
-            </a:r>
-            <a:r>
-              <a:rPr sz="1300">
-                <a:solidFill>
-                  <a:srgbClr val="FFFFFF"/>
-                </a:solidFill>
-              </a:rPr>
-              <a:t>Format operator -f, [char] casts</a:t>
-            </a:r>
-          </a:p>
-          <a:p>
-            <a:pPr algn="l"/>
-            <a:r>
-              <a:rPr sz="1300" b="1">
-                <a:solidFill>
-                  <a:srgbClr val="D85218"/>
-                </a:solidFill>
-              </a:rPr>
-              <a:t>▸ </a:t>
-            </a:r>
-            <a:r>
-              <a:rPr sz="1300">
-                <a:solidFill>
-                  <a:srgbClr val="FFFFFF"/>
-                </a:solidFill>
-              </a:rPr>
-              <a:t>Recursive base64 (up to 8 layers)</a:t>
-            </a:r>
-          </a:p>
-          <a:p>
-            <a:pPr algn="l"/>
-            <a:r>
-              <a:rPr sz="1300" b="1">
-                <a:solidFill>
-                  <a:srgbClr val="D85218"/>
-                </a:solidFill>
-              </a:rPr>
-              <a:t>▸ </a:t>
-            </a:r>
-            <a:r>
-              <a:rPr sz="1300">
-                <a:solidFill>
-                  <a:srgbClr val="FFFFFF"/>
-                </a:solidFill>
-              </a:rPr>
-              <a:t>UTF-16LE projection for .NET DLLs</a:t>
-            </a:r>
-          </a:p>
-          <a:p>
-            <a:pPr algn="l"/>
-            <a:r>
-              <a:rPr sz="1300" b="1">
-                <a:solidFill>
-                  <a:srgbClr val="D85218"/>
-                </a:solidFill>
-              </a:rPr>
-              <a:t>▸ </a:t>
-            </a:r>
-            <a:r>
-              <a:rPr sz="1300">
-                <a:solidFill>
-                  <a:srgbClr val="FFFFFF"/>
-                </a:solidFill>
-              </a:rPr>
-              <a:t>30+ predykatów: amsi.dll, AmsiScanBuffer,</a:t>
-            </a:r>
-          </a:p>
-          <a:p>
-            <a:pPr algn="l"/>
-            <a:r>
-              <a:rPr sz="1300" b="1">
-                <a:solidFill>
-                  <a:srgbClr val="D85218"/>
-                </a:solidFill>
-              </a:rPr>
-              <a:t>▸ </a:t>
-            </a:r>
-            <a:r>
-              <a:rPr sz="1300">
-                <a:solidFill>
-                  <a:srgbClr val="FFFFFF"/>
-                </a:solidFill>
-              </a:rPr>
-              <a:t>  amsiInitFailed, AmsiUtils, ETW, WLDP, …</a:t>
-            </a:r>
-          </a:p>
-          <a:p>
-            <a:pPr algn="l"/>
-            <a:r>
-              <a:rPr sz="1300" b="1">
-                <a:solidFill>
-                  <a:srgbClr val="D85218"/>
-                </a:solidFill>
-              </a:rPr>
-              <a:t>▸ </a:t>
-            </a:r>
-            <a:r>
-              <a:rPr sz="1300">
-                <a:solidFill>
-                  <a:srgbClr val="FFFFFF"/>
-                </a:solidFill>
-              </a:rPr>
-              <a:t>Combo bonuses + scoring algorithm</a:t>
-            </a:r>
-          </a:p>
-          <a:p>
-            <a:pPr algn="l"/>
-            <a:r>
-              <a:rPr sz="1300" b="1">
-                <a:solidFill>
-                  <a:srgbClr val="D85218"/>
-                </a:solidFill>
-              </a:rPr>
-              <a:t>▸ </a:t>
-            </a:r>
-            <a:r>
-              <a:rPr sz="1300">
-                <a:solidFill>
-                  <a:srgbClr val="FFFFFF"/>
-                </a:solidFill>
-              </a:rPr>
-              <a:t>Output: JSON  →  ramsi-com</a:t>
-            </a:r>
-          </a:p>
-        </p:txBody>
-      </p:sp>
-      <p:sp>
-        <p:nvSpPr>
-          <p:cNvPr id="22" name="TextBox 21"/>
+              <a:rPr sz="1300" b="0" i="1">
+                <a:solidFill>
+                  <a:srgbClr val="94B6D2"/>
+                </a:solidFill>
+              </a:rPr>
+              <a:t>4.7 MB statyczna binarka  •  zero .NET dependencies</a:t>
+            </a:r>
+          </a:p>
+        </p:txBody>
+      </p:sp>
+      <p:sp>
+        <p:nvSpPr>
+          <p:cNvPr id="24" name="TextBox 23">
+            <a:extLst>
+              <a:ext uri="{FF2B5EF4-FFF2-40B4-BE49-F238E27FC236}">
+                <a16:creationId xmlns:a16="http://schemas.microsoft.com/office/drawing/2014/main" id="{737929B4-9397-D9C5-D3D3-B5DF1DB77B59}"/>
+              </a:ext>
+            </a:extLst>
+          </p:cNvPr>
           <p:cNvSpPr txBox="1"/>
           <p:nvPr/>
         </p:nvSpPr>
         <p:spPr>
           <a:xfrm>
-            <a:off x="6400800" y="5852160"/>
-            <a:ext cx="5486400" cy="365760"/>
+            <a:off x="731520" y="4723197"/>
+            <a:ext cx="795528" cy="1015663"/>
           </a:xfrm>
           <a:prstGeom prst="rect">
             <a:avLst/>
@@ -14840,20 +15206,197 @@
           <a:noFill/>
         </p:spPr>
         <p:txBody>
-          <a:bodyPr wrap="none">
+          <a:bodyPr wrap="square">
             <a:spAutoFit/>
           </a:bodyPr>
           <a:lstStyle/>
           <a:p>
             <a:pPr algn="l"/>
             <a:r>
-              <a:rPr sz="1300" b="0" i="1">
-                <a:solidFill>
-                  <a:srgbClr val="94B6D2"/>
-                </a:solidFill>
-              </a:rPr>
-              <a:t>4.7 MB statyczna binarka  •  zero .NET dependencies</a:t>
-            </a:r>
+              <a:rPr lang="en-US" sz="6000" b="1" i="0" dirty="0">
+                <a:solidFill>
+                  <a:srgbClr val="FF0000"/>
+                </a:solidFill>
+              </a:rPr>
+              <a:t>5</a:t>
+            </a:r>
+          </a:p>
+        </p:txBody>
+      </p:sp>
+      <p:sp>
+        <p:nvSpPr>
+          <p:cNvPr id="25" name="TextBox 24">
+            <a:extLst>
+              <a:ext uri="{FF2B5EF4-FFF2-40B4-BE49-F238E27FC236}">
+                <a16:creationId xmlns:a16="http://schemas.microsoft.com/office/drawing/2014/main" id="{920565B9-5723-5F2D-4130-B5C3A58CEAC5}"/>
+              </a:ext>
+            </a:extLst>
+          </p:cNvPr>
+          <p:cNvSpPr txBox="1"/>
+          <p:nvPr/>
+        </p:nvSpPr>
+        <p:spPr>
+          <a:xfrm>
+            <a:off x="644652" y="3857410"/>
+            <a:ext cx="745236" cy="1015663"/>
+          </a:xfrm>
+          <a:prstGeom prst="rect">
+            <a:avLst/>
+          </a:prstGeom>
+          <a:noFill/>
+        </p:spPr>
+        <p:txBody>
+          <a:bodyPr wrap="square">
+            <a:spAutoFit/>
+          </a:bodyPr>
+          <a:lstStyle/>
+          <a:p>
+            <a:pPr algn="l"/>
+            <a:r>
+              <a:rPr lang="en-US" sz="6000" b="1" i="0" dirty="0">
+                <a:solidFill>
+                  <a:schemeClr val="bg2">
+                    <a:lumMod val="60000"/>
+                    <a:lumOff val="40000"/>
+                  </a:schemeClr>
+                </a:solidFill>
+              </a:rPr>
+              <a:t>4</a:t>
+            </a:r>
+          </a:p>
+        </p:txBody>
+      </p:sp>
+      <p:sp>
+        <p:nvSpPr>
+          <p:cNvPr id="26" name="TextBox 25">
+            <a:extLst>
+              <a:ext uri="{FF2B5EF4-FFF2-40B4-BE49-F238E27FC236}">
+                <a16:creationId xmlns:a16="http://schemas.microsoft.com/office/drawing/2014/main" id="{13FC403C-2EB3-C55B-CF73-DB010622E890}"/>
+              </a:ext>
+            </a:extLst>
+          </p:cNvPr>
+          <p:cNvSpPr txBox="1"/>
+          <p:nvPr/>
+        </p:nvSpPr>
+        <p:spPr>
+          <a:xfrm>
+            <a:off x="519848" y="3012860"/>
+            <a:ext cx="795528" cy="1015663"/>
+          </a:xfrm>
+          <a:prstGeom prst="rect">
+            <a:avLst/>
+          </a:prstGeom>
+          <a:noFill/>
+        </p:spPr>
+        <p:txBody>
+          <a:bodyPr wrap="square">
+            <a:spAutoFit/>
+          </a:bodyPr>
+          <a:lstStyle/>
+          <a:p>
+            <a:pPr algn="l"/>
+            <a:r>
+              <a:rPr lang="en-US" sz="6000" b="1" i="0" dirty="0">
+                <a:solidFill>
+                  <a:schemeClr val="accent6">
+                    <a:lumMod val="60000"/>
+                    <a:lumOff val="40000"/>
+                  </a:schemeClr>
+                </a:solidFill>
+              </a:rPr>
+              <a:t>3</a:t>
+            </a:r>
+          </a:p>
+        </p:txBody>
+      </p:sp>
+      <p:sp>
+        <p:nvSpPr>
+          <p:cNvPr id="27" name="TextBox 26">
+            <a:extLst>
+              <a:ext uri="{FF2B5EF4-FFF2-40B4-BE49-F238E27FC236}">
+                <a16:creationId xmlns:a16="http://schemas.microsoft.com/office/drawing/2014/main" id="{27256E5E-60EC-3D85-AAD2-22C5E50665AE}"/>
+              </a:ext>
+            </a:extLst>
+          </p:cNvPr>
+          <p:cNvSpPr txBox="1"/>
+          <p:nvPr/>
+        </p:nvSpPr>
+        <p:spPr>
+          <a:xfrm>
+            <a:off x="397547" y="2231214"/>
+            <a:ext cx="795528" cy="1015663"/>
+          </a:xfrm>
+          <a:prstGeom prst="rect">
+            <a:avLst/>
+          </a:prstGeom>
+          <a:noFill/>
+        </p:spPr>
+        <p:txBody>
+          <a:bodyPr wrap="square">
+            <a:spAutoFit/>
+          </a:bodyPr>
+          <a:lstStyle/>
+          <a:p>
+            <a:pPr algn="l"/>
+            <a:r>
+              <a:rPr lang="en-US" sz="6000" b="1" i="0" dirty="0">
+                <a:solidFill>
+                  <a:srgbClr val="00B050"/>
+                </a:solidFill>
+              </a:rPr>
+              <a:t>3</a:t>
+            </a:r>
+          </a:p>
+        </p:txBody>
+      </p:sp>
+      <p:sp>
+        <p:nvSpPr>
+          <p:cNvPr id="28" name="TextBox 27">
+            <a:extLst>
+              <a:ext uri="{FF2B5EF4-FFF2-40B4-BE49-F238E27FC236}">
+                <a16:creationId xmlns:a16="http://schemas.microsoft.com/office/drawing/2014/main" id="{264352AD-9C52-00DB-16B7-CF913380144B}"/>
+              </a:ext>
+            </a:extLst>
+          </p:cNvPr>
+          <p:cNvSpPr txBox="1"/>
+          <p:nvPr/>
+        </p:nvSpPr>
+        <p:spPr>
+          <a:xfrm>
+            <a:off x="339146" y="1353749"/>
+            <a:ext cx="795528" cy="1015663"/>
+          </a:xfrm>
+          <a:prstGeom prst="rect">
+            <a:avLst/>
+          </a:prstGeom>
+          <a:noFill/>
+        </p:spPr>
+        <p:txBody>
+          <a:bodyPr wrap="square">
+            <a:spAutoFit/>
+          </a:bodyPr>
+          <a:lstStyle/>
+          <a:p>
+            <a:pPr algn="l"/>
+            <a:r>
+              <a:rPr lang="en-US" sz="6000" b="1" dirty="0">
+                <a:solidFill>
+                  <a:schemeClr val="tx2">
+                    <a:lumMod val="40000"/>
+                    <a:lumOff val="60000"/>
+                  </a:schemeClr>
+                </a:solidFill>
+              </a:rPr>
+              <a:t>1</a:t>
+            </a:r>
+            <a:endParaRPr lang="en-US" sz="6000" b="1" i="0" dirty="0">
+              <a:solidFill>
+                <a:schemeClr val="tx2">
+                  <a:lumMod val="40000"/>
+                  <a:lumOff val="60000"/>
+                </a:schemeClr>
+              </a:solidFill>
+            </a:endParaRPr>
           </a:p>
         </p:txBody>
       </p:sp>
@@ -14976,7 +15519,7 @@
         </p:nvSpPr>
         <p:spPr>
           <a:xfrm>
-            <a:off x="1280160" y="73152"/>
+            <a:off x="1856232" y="126336"/>
             <a:ext cx="10515600" cy="502920"/>
           </a:xfrm>
           <a:prstGeom prst="rect">
@@ -14992,12 +15535,20 @@
           <a:p>
             <a:pPr algn="l"/>
             <a:r>
-              <a:rPr sz="2600" b="1" i="0">
-                <a:solidFill>
-                  <a:srgbClr val="FFFFFF"/>
-                </a:solidFill>
-              </a:rPr>
-              <a:t>ps-parser  —  safe evaluation</a:t>
+              <a:rPr sz="2600" b="1" i="0" dirty="0" err="1">
+                <a:solidFill>
+                  <a:srgbClr val="FFFFFF"/>
+                </a:solidFill>
+              </a:rPr>
+              <a:t>ps</a:t>
+            </a:r>
+            <a:r>
+              <a:rPr sz="2600" b="1" i="0" dirty="0">
+                <a:solidFill>
+                  <a:srgbClr val="FFFFFF"/>
+                </a:solidFill>
+              </a:rPr>
+              <a:t>-parser  —  safe evaluation</a:t>
             </a:r>
           </a:p>
         </p:txBody>
@@ -15010,8 +15561,8 @@
         </p:nvSpPr>
         <p:spPr>
           <a:xfrm>
-            <a:off x="731520" y="1005840"/>
-            <a:ext cx="10972800" cy="640080"/>
+            <a:off x="1242019" y="1017876"/>
+            <a:ext cx="9220281" cy="646331"/>
           </a:xfrm>
           <a:prstGeom prst="rect">
             <a:avLst/>
@@ -15026,9 +15577,9 @@
           <a:p>
             <a:pPr algn="l"/>
             <a:r>
-              <a:rPr sz="1300" b="0" i="1">
-                <a:solidFill>
-                  <a:srgbClr val="D85218"/>
+              <a:rPr b="0" i="1" dirty="0">
+                <a:solidFill>
+                  <a:schemeClr val="accent2"/>
                 </a:solidFill>
               </a:rPr>
               <a:t>Pure data transforms execute.  Side-effectful calls return typed errors — never silently skipped.</a:t>
@@ -15037,12 +15588,124 @@
           <a:p>
             <a:pPr algn="l"/>
             <a:r>
-              <a:rPr sz="1300" b="0" i="1">
-                <a:solidFill>
-                  <a:srgbClr val="D85218"/>
-                </a:solidFill>
-              </a:rPr>
-              <a:t>API celowo nazwane `safe_eval` — granica zaufania jest wbudowana w architekturę.</a:t>
+              <a:rPr b="0" i="1" dirty="0">
+                <a:solidFill>
+                  <a:schemeClr val="accent2"/>
+                </a:solidFill>
+              </a:rPr>
+              <a:t>API </a:t>
+            </a:r>
+            <a:r>
+              <a:rPr b="0" i="1" dirty="0" err="1">
+                <a:solidFill>
+                  <a:schemeClr val="accent2"/>
+                </a:solidFill>
+              </a:rPr>
+              <a:t>celowo</a:t>
+            </a:r>
+            <a:r>
+              <a:rPr b="0" i="1" dirty="0">
+                <a:solidFill>
+                  <a:schemeClr val="accent2"/>
+                </a:solidFill>
+              </a:rPr>
+              <a:t> </a:t>
+            </a:r>
+            <a:r>
+              <a:rPr b="0" i="1" dirty="0" err="1">
+                <a:solidFill>
+                  <a:schemeClr val="accent2"/>
+                </a:solidFill>
+              </a:rPr>
+              <a:t>nazwane</a:t>
+            </a:r>
+            <a:r>
+              <a:rPr b="0" i="1" dirty="0">
+                <a:solidFill>
+                  <a:schemeClr val="accent2"/>
+                </a:solidFill>
+              </a:rPr>
+              <a:t> `</a:t>
+            </a:r>
+            <a:r>
+              <a:rPr b="0" i="1" dirty="0" err="1">
+                <a:solidFill>
+                  <a:schemeClr val="accent2"/>
+                </a:solidFill>
+              </a:rPr>
+              <a:t>safe_eval</a:t>
+            </a:r>
+            <a:r>
+              <a:rPr b="0" i="1" dirty="0">
+                <a:solidFill>
+                  <a:schemeClr val="accent2"/>
+                </a:solidFill>
+              </a:rPr>
+              <a:t>` — </a:t>
+            </a:r>
+            <a:r>
+              <a:rPr b="0" i="1" dirty="0" err="1">
+                <a:solidFill>
+                  <a:schemeClr val="accent2"/>
+                </a:solidFill>
+              </a:rPr>
+              <a:t>granica</a:t>
+            </a:r>
+            <a:r>
+              <a:rPr b="0" i="1" dirty="0">
+                <a:solidFill>
+                  <a:schemeClr val="accent2"/>
+                </a:solidFill>
+              </a:rPr>
+              <a:t> </a:t>
+            </a:r>
+            <a:r>
+              <a:rPr b="0" i="1" dirty="0" err="1">
+                <a:solidFill>
+                  <a:schemeClr val="accent2"/>
+                </a:solidFill>
+              </a:rPr>
+              <a:t>zaufania</a:t>
+            </a:r>
+            <a:r>
+              <a:rPr b="0" i="1" dirty="0">
+                <a:solidFill>
+                  <a:schemeClr val="accent2"/>
+                </a:solidFill>
+              </a:rPr>
+              <a:t> jest </a:t>
+            </a:r>
+            <a:r>
+              <a:rPr b="0" i="1" dirty="0" err="1">
+                <a:solidFill>
+                  <a:schemeClr val="accent2"/>
+                </a:solidFill>
+              </a:rPr>
+              <a:t>wbudowana</a:t>
+            </a:r>
+            <a:r>
+              <a:rPr b="0" i="1" dirty="0">
+                <a:solidFill>
+                  <a:schemeClr val="accent2"/>
+                </a:solidFill>
+              </a:rPr>
+              <a:t> w </a:t>
+            </a:r>
+            <a:r>
+              <a:rPr b="0" i="1" dirty="0" err="1">
+                <a:solidFill>
+                  <a:schemeClr val="accent2"/>
+                </a:solidFill>
+              </a:rPr>
+              <a:t>architekturę</a:t>
+            </a:r>
+            <a:r>
+              <a:rPr b="0" i="1" dirty="0">
+                <a:solidFill>
+                  <a:schemeClr val="accent2"/>
+                </a:solidFill>
+              </a:rPr>
+              <a:t>.</a:t>
             </a:r>
           </a:p>
         </p:txBody>
@@ -15066,7 +15729,7 @@
           </a:solidFill>
           <a:ln w="25400">
             <a:solidFill>
-              <a:srgbClr val="7BA79D"/>
+              <a:srgbClr val="00B050"/>
             </a:solidFill>
           </a:ln>
         </p:spPr>
@@ -15102,7 +15765,7 @@
         <p:spPr>
           <a:xfrm>
             <a:off x="640080" y="1874519"/>
-            <a:ext cx="5212080" cy="365760"/>
+            <a:ext cx="1383071" cy="353943"/>
           </a:xfrm>
           <a:prstGeom prst="rect">
             <a:avLst/>
@@ -15117,9 +15780,9 @@
           <a:p>
             <a:pPr algn="l"/>
             <a:r>
-              <a:rPr sz="1700" b="1" i="0">
-                <a:solidFill>
-                  <a:srgbClr val="7BA79D"/>
+              <a:rPr sz="1700" b="1" i="0" dirty="0">
+                <a:solidFill>
+                  <a:srgbClr val="00B050"/>
                 </a:solidFill>
               </a:rPr>
               <a:t>✓ Evaluated</a:t>
@@ -15588,7 +16251,7 @@
           </a:solidFill>
           <a:ln w="25400">
             <a:solidFill>
-              <a:srgbClr val="C05040"/>
+              <a:srgbClr val="FF0000"/>
             </a:solidFill>
           </a:ln>
         </p:spPr>
@@ -15624,7 +16287,7 @@
         <p:spPr>
           <a:xfrm>
             <a:off x="6309360" y="1874519"/>
-            <a:ext cx="5212080" cy="365760"/>
+            <a:ext cx="1225015" cy="353943"/>
           </a:xfrm>
           <a:prstGeom prst="rect">
             <a:avLst/>
@@ -15639,9 +16302,9 @@
           <a:p>
             <a:pPr algn="l"/>
             <a:r>
-              <a:rPr sz="1700" b="1" i="0">
-                <a:solidFill>
-                  <a:srgbClr val="C05040"/>
+              <a:rPr sz="1700" b="1" i="0" dirty="0">
+                <a:solidFill>
+                  <a:srgbClr val="FF0000"/>
                 </a:solidFill>
               </a:rPr>
               <a:t>✗ Skipped</a:t>
@@ -16323,7 +16986,7 @@
         <p:spPr>
           <a:xfrm>
             <a:off x="731520" y="1097280"/>
-            <a:ext cx="5486400" cy="365760"/>
+            <a:ext cx="3721532" cy="369332"/>
           </a:xfrm>
           <a:prstGeom prst="rect">
             <a:avLst/>
@@ -16338,12 +17001,44 @@
           <a:p>
             <a:pPr algn="l"/>
             <a:r>
-              <a:rPr sz="1800" b="1" i="0">
-                <a:solidFill>
-                  <a:srgbClr val="D85218"/>
-                </a:solidFill>
-              </a:rPr>
-              <a:t>Kernel driver (sysmon-rs, no_std)</a:t>
+              <a:rPr sz="1800" b="1" i="0" dirty="0">
+                <a:solidFill>
+                  <a:schemeClr val="accent2"/>
+                </a:solidFill>
+              </a:rPr>
+              <a:t>Kernel driver (</a:t>
+            </a:r>
+            <a:r>
+              <a:rPr sz="1800" b="1" i="0" dirty="0" err="1">
+                <a:solidFill>
+                  <a:schemeClr val="accent2"/>
+                </a:solidFill>
+              </a:rPr>
+              <a:t>sysmon-rs</a:t>
+            </a:r>
+            <a:r>
+              <a:rPr sz="1800" b="1" i="0" dirty="0">
+                <a:solidFill>
+                  <a:schemeClr val="accent2"/>
+                </a:solidFill>
+              </a:rPr>
+              <a:t>, </a:t>
+            </a:r>
+            <a:r>
+              <a:rPr sz="1800" b="1" i="0" dirty="0" err="1">
+                <a:solidFill>
+                  <a:schemeClr val="accent2"/>
+                </a:solidFill>
+              </a:rPr>
+              <a:t>no_std</a:t>
+            </a:r>
+            <a:r>
+              <a:rPr sz="1800" b="1" i="0" dirty="0">
+                <a:solidFill>
+                  <a:schemeClr val="accent2"/>
+                </a:solidFill>
+              </a:rPr>
+              <a:t>)</a:t>
             </a:r>
           </a:p>
         </p:txBody>
@@ -16357,7 +17052,7 @@
         <p:spPr>
           <a:xfrm>
             <a:off x="731520" y="1554480"/>
-            <a:ext cx="5486400" cy="2880360"/>
+            <a:ext cx="4641271" cy="2949462"/>
           </a:xfrm>
           <a:prstGeom prst="rect">
             <a:avLst/>
@@ -16370,137 +17065,194 @@
           </a:bodyPr>
           <a:lstStyle/>
           <a:p>
-            <a:pPr algn="l"/>
-            <a:r>
-              <a:rPr sz="1300" b="1">
-                <a:solidFill>
-                  <a:srgbClr val="D85218"/>
-                </a:solidFill>
-              </a:rPr>
-              <a:t>▸ </a:t>
-            </a:r>
-            <a:r>
-              <a:rPr sz="1300">
+            <a:pPr marL="342900" indent="-342900" algn="l">
+              <a:lnSpc>
+                <a:spcPct val="150000"/>
+              </a:lnSpc>
+              <a:buFont typeface="+mj-lt"/>
+              <a:buAutoNum type="arabicPeriod"/>
+            </a:pPr>
+            <a:r>
+              <a:rPr dirty="0" err="1">
                 <a:solidFill>
                   <a:srgbClr val="FFFFFF"/>
                 </a:solidFill>
               </a:rPr>
               <a:t>PsSetCreateProcessNotifyRoutineEx</a:t>
             </a:r>
-          </a:p>
-          <a:p>
-            <a:pPr algn="l"/>
-            <a:r>
-              <a:rPr sz="1300" b="1">
-                <a:solidFill>
-                  <a:srgbClr val="D85218"/>
-                </a:solidFill>
-              </a:rPr>
-              <a:t>▸ </a:t>
-            </a:r>
-            <a:r>
-              <a:rPr sz="1300">
-                <a:solidFill>
-                  <a:srgbClr val="FFFFFF"/>
-                </a:solidFill>
-              </a:rPr>
-              <a:t>    → capture cmdline at process spawn</a:t>
-            </a:r>
-          </a:p>
-          <a:p>
-            <a:pPr algn="l"/>
-            <a:r>
-              <a:rPr sz="1300" b="1">
-                <a:solidFill>
-                  <a:srgbClr val="D85218"/>
-                </a:solidFill>
-              </a:rPr>
-              <a:t>▸ </a:t>
-            </a:r>
-            <a:r>
-              <a:rPr sz="1300">
-                <a:solidFill>
-                  <a:srgbClr val="FFFFFF"/>
-                </a:solidFill>
-              </a:rPr>
+            <a:r>
+              <a:rPr dirty="0">
+                <a:solidFill>
+                  <a:srgbClr val="FFFFFF"/>
+                </a:solidFill>
+              </a:rPr>
+              <a:t> </a:t>
+            </a:r>
+            <a:endParaRPr lang="en-US" dirty="0">
+              <a:solidFill>
+                <a:srgbClr val="FFFFFF"/>
+              </a:solidFill>
+            </a:endParaRPr>
+          </a:p>
+          <a:p>
+            <a:pPr marL="742950" lvl="1" indent="-285750">
+              <a:lnSpc>
+                <a:spcPct val="150000"/>
+              </a:lnSpc>
+              <a:buFont typeface="Arial" panose="020B0604020202020204" pitchFamily="34" charset="0"/>
+              <a:buChar char="•"/>
+            </a:pPr>
+            <a:r>
+              <a:rPr dirty="0">
+                <a:solidFill>
+                  <a:srgbClr val="FFFFFF"/>
+                </a:solidFill>
+              </a:rPr>
+              <a:t>capture </a:t>
+            </a:r>
+            <a:r>
+              <a:rPr dirty="0" err="1">
+                <a:solidFill>
+                  <a:srgbClr val="FFFFFF"/>
+                </a:solidFill>
+              </a:rPr>
+              <a:t>cmdline</a:t>
+            </a:r>
+            <a:r>
+              <a:rPr dirty="0">
+                <a:solidFill>
+                  <a:srgbClr val="FFFFFF"/>
+                </a:solidFill>
+              </a:rPr>
+              <a:t> at process spawn</a:t>
+            </a:r>
+            <a:endParaRPr lang="en-US" dirty="0">
+              <a:solidFill>
+                <a:srgbClr val="FFFFFF"/>
+              </a:solidFill>
+            </a:endParaRPr>
+          </a:p>
+          <a:p>
+            <a:pPr marL="342900" indent="-342900">
+              <a:lnSpc>
+                <a:spcPct val="150000"/>
+              </a:lnSpc>
+              <a:buFont typeface="+mj-lt"/>
+              <a:buAutoNum type="arabicPeriod"/>
+            </a:pPr>
+            <a:r>
+              <a:rPr b="1" dirty="0"/>
+              <a:t> </a:t>
+            </a:r>
+            <a:r>
+              <a:rPr dirty="0" err="1"/>
               <a:t>PsSetLoadImageNotifyRoutine</a:t>
             </a:r>
-          </a:p>
-          <a:p>
-            <a:pPr algn="l"/>
-            <a:r>
-              <a:rPr sz="1300" b="1">
-                <a:solidFill>
-                  <a:srgbClr val="D85218"/>
-                </a:solidFill>
-              </a:rPr>
-              <a:t>▸ </a:t>
-            </a:r>
-            <a:r>
-              <a:rPr sz="1300">
-                <a:solidFill>
-                  <a:srgbClr val="FFFFFF"/>
-                </a:solidFill>
-              </a:rPr>
-              <a:t>    → flag amsi.dll / wldp.dll loads</a:t>
-            </a:r>
-          </a:p>
-          <a:p>
-            <a:pPr algn="l"/>
-            <a:r>
-              <a:rPr sz="1300" b="1">
-                <a:solidFill>
-                  <a:srgbClr val="D85218"/>
-                </a:solidFill>
-              </a:rPr>
-              <a:t>▸ </a:t>
-            </a:r>
-            <a:r>
-              <a:rPr sz="1300">
+            <a:endParaRPr lang="en-US" dirty="0"/>
+          </a:p>
+          <a:p>
+            <a:pPr marL="800100" lvl="1" indent="-342900">
+              <a:lnSpc>
+                <a:spcPct val="150000"/>
+              </a:lnSpc>
+              <a:buFont typeface="Arial" panose="020B0604020202020204" pitchFamily="34" charset="0"/>
+              <a:buChar char="•"/>
+            </a:pPr>
+            <a:r>
+              <a:rPr dirty="0">
+                <a:solidFill>
+                  <a:srgbClr val="FFFFFF"/>
+                </a:solidFill>
+              </a:rPr>
+              <a:t>flag amsi.dll / wldp.dll loads</a:t>
+            </a:r>
+            <a:endParaRPr lang="en-US" dirty="0">
+              <a:solidFill>
+                <a:srgbClr val="FFFFFF"/>
+              </a:solidFill>
+            </a:endParaRPr>
+          </a:p>
+          <a:p>
+            <a:pPr marL="342900" indent="-342900">
+              <a:lnSpc>
+                <a:spcPct val="150000"/>
+              </a:lnSpc>
+              <a:buFont typeface="+mj-lt"/>
+              <a:buAutoNum type="arabicPeriod"/>
+            </a:pPr>
+            <a:r>
+              <a:rPr dirty="0" err="1">
                 <a:solidFill>
                   <a:srgbClr val="FFFFFF"/>
                 </a:solidFill>
               </a:rPr>
               <a:t>CmRegisterCallbackEx</a:t>
             </a:r>
-          </a:p>
-          <a:p>
-            <a:pPr algn="l"/>
-            <a:r>
-              <a:rPr sz="1300" b="1">
-                <a:solidFill>
-                  <a:srgbClr val="D85218"/>
-                </a:solidFill>
-              </a:rPr>
-              <a:t>▸ </a:t>
-            </a:r>
-            <a:r>
-              <a:rPr sz="1300">
-                <a:solidFill>
-                  <a:srgbClr val="FFFFFF"/>
-                </a:solidFill>
-              </a:rPr>
-              <a:t>    → filter Registry access by path</a:t>
-            </a:r>
-          </a:p>
-          <a:p>
-            <a:pPr algn="l"/>
-            <a:r>
-              <a:rPr sz="1300" b="1">
-                <a:solidFill>
-                  <a:srgbClr val="D85218"/>
-                </a:solidFill>
-              </a:rPr>
-              <a:t>▸ </a:t>
-            </a:r>
-            <a:r>
-              <a:rPr sz="1300">
-                <a:solidFill>
-                  <a:srgbClr val="FFFFFF"/>
-                </a:solidFill>
-              </a:rPr>
-              <a:t>Sends events via \\.\SysMon to userspace</a:t>
-            </a:r>
+            <a:endParaRPr lang="en-US" dirty="0">
+              <a:solidFill>
+                <a:srgbClr val="FFFFFF"/>
+              </a:solidFill>
+            </a:endParaRPr>
+          </a:p>
+          <a:p>
+            <a:pPr marL="800100" lvl="1" indent="-342900">
+              <a:lnSpc>
+                <a:spcPct val="150000"/>
+              </a:lnSpc>
+              <a:buFont typeface="Arial" panose="020B0604020202020204" pitchFamily="34" charset="0"/>
+              <a:buChar char="•"/>
+            </a:pPr>
+            <a:r>
+              <a:rPr lang="en-US" dirty="0">
+                <a:solidFill>
+                  <a:srgbClr val="FFFFFF"/>
+                </a:solidFill>
+              </a:rPr>
+              <a:t>f</a:t>
+            </a:r>
+            <a:r>
+              <a:rPr dirty="0">
+                <a:solidFill>
+                  <a:srgbClr val="FFFFFF"/>
+                </a:solidFill>
+              </a:rPr>
+              <a:t>ilter Registry access by path</a:t>
+            </a:r>
+            <a:endParaRPr lang="en-US" dirty="0">
+              <a:solidFill>
+                <a:srgbClr val="FFFFFF"/>
+              </a:solidFill>
+            </a:endParaRPr>
+          </a:p>
+          <a:p>
+            <a:pPr marL="342900" indent="-342900">
+              <a:lnSpc>
+                <a:spcPct val="150000"/>
+              </a:lnSpc>
+              <a:buFont typeface="+mj-lt"/>
+              <a:buAutoNum type="arabicPeriod"/>
+            </a:pPr>
+            <a:r>
+              <a:rPr dirty="0">
+                <a:solidFill>
+                  <a:srgbClr val="FFFFFF"/>
+                </a:solidFill>
+              </a:rPr>
+              <a:t>Sends events via \\.\SysMon to </a:t>
+            </a:r>
+            <a:r>
+              <a:rPr dirty="0" err="1">
+                <a:solidFill>
+                  <a:srgbClr val="FFFFFF"/>
+                </a:solidFill>
+              </a:rPr>
+              <a:t>userspace</a:t>
+            </a:r>
+            <a:endParaRPr dirty="0">
+              <a:solidFill>
+                <a:srgbClr val="FFFFFF"/>
+              </a:solidFill>
+            </a:endParaRPr>
           </a:p>
         </p:txBody>
       </p:sp>
@@ -16513,7 +17265,7 @@
         <p:spPr>
           <a:xfrm>
             <a:off x="6400800" y="1097280"/>
-            <a:ext cx="5486400" cy="365760"/>
+            <a:ext cx="3646832" cy="369332"/>
           </a:xfrm>
           <a:prstGeom prst="rect">
             <a:avLst/>
@@ -16528,12 +17280,36 @@
           <a:p>
             <a:pPr algn="l"/>
             <a:r>
-              <a:rPr sz="1800" b="1" i="0">
-                <a:solidFill>
-                  <a:srgbClr val="D85218"/>
-                </a:solidFill>
-              </a:rPr>
-              <a:t>Userspace daemon (sysmon-um)</a:t>
+              <a:rPr sz="1800" b="1" i="0" dirty="0" err="1">
+                <a:solidFill>
+                  <a:schemeClr val="accent2"/>
+                </a:solidFill>
+              </a:rPr>
+              <a:t>Userspace</a:t>
+            </a:r>
+            <a:r>
+              <a:rPr sz="1800" b="1" i="0" dirty="0">
+                <a:solidFill>
+                  <a:schemeClr val="accent2"/>
+                </a:solidFill>
+              </a:rPr>
+              <a:t> daemon (</a:t>
+            </a:r>
+            <a:r>
+              <a:rPr sz="1800" b="1" i="0" dirty="0" err="1">
+                <a:solidFill>
+                  <a:schemeClr val="accent2"/>
+                </a:solidFill>
+              </a:rPr>
+              <a:t>sysmon</a:t>
+            </a:r>
+            <a:r>
+              <a:rPr sz="1800" b="1" i="0" dirty="0">
+                <a:solidFill>
+                  <a:schemeClr val="accent2"/>
+                </a:solidFill>
+              </a:rPr>
+              <a:t>-um)</a:t>
             </a:r>
           </a:p>
         </p:txBody>
@@ -16546,8 +17322,8 @@
         </p:nvSpPr>
         <p:spPr>
           <a:xfrm>
-            <a:off x="6400800" y="1554480"/>
-            <a:ext cx="5486400" cy="2880360"/>
+            <a:off x="6400800" y="1378751"/>
+            <a:ext cx="3873689" cy="3780458"/>
           </a:xfrm>
           <a:prstGeom prst="rect">
             <a:avLst/>
@@ -16560,135 +17336,169 @@
           </a:bodyPr>
           <a:lstStyle/>
           <a:p>
-            <a:pPr algn="l"/>
-            <a:r>
-              <a:rPr sz="1300" b="1">
-                <a:solidFill>
-                  <a:srgbClr val="D85218"/>
-                </a:solidFill>
-              </a:rPr>
-              <a:t>▸ </a:t>
-            </a:r>
-            <a:r>
-              <a:rPr sz="1300">
-                <a:solidFill>
-                  <a:srgbClr val="FFFFFF"/>
-                </a:solidFill>
-              </a:rPr>
-              <a:t>Polling \\.\SysMon at 200 ms</a:t>
-            </a:r>
-          </a:p>
-          <a:p>
-            <a:pPr algn="l"/>
-            <a:r>
-              <a:rPr sz="1300" b="1">
-                <a:solidFill>
-                  <a:srgbClr val="D85218"/>
-                </a:solidFill>
-              </a:rPr>
-              <a:t>▸ </a:t>
-            </a:r>
-            <a:r>
-              <a:rPr sz="1300">
-                <a:solidFill>
-                  <a:srgbClr val="FFFFFF"/>
-                </a:solidFill>
-              </a:rPr>
-              <a:t>Tracks pid → cmdline mapping</a:t>
-            </a:r>
-          </a:p>
-          <a:p>
-            <a:pPr algn="l"/>
-            <a:r>
-              <a:rPr sz="1300" b="1">
-                <a:solidFill>
-                  <a:srgbClr val="D85218"/>
-                </a:solidFill>
-              </a:rPr>
-              <a:t>▸ </a:t>
-            </a:r>
-            <a:r>
-              <a:rPr sz="1300">
-                <a:solidFill>
-                  <a:srgbClr val="FFFFFF"/>
-                </a:solidFill>
-              </a:rPr>
+            <a:pPr marL="285750" indent="-285750" algn="l">
+              <a:lnSpc>
+                <a:spcPct val="150000"/>
+              </a:lnSpc>
+              <a:buFont typeface="Arial" panose="020B0604020202020204" pitchFamily="34" charset="0"/>
+              <a:buChar char="•"/>
+            </a:pPr>
+            <a:r>
+              <a:rPr dirty="0"/>
+              <a:t>Polling \\.\SysMon at 200 </a:t>
+            </a:r>
+            <a:r>
+              <a:rPr dirty="0" err="1"/>
+              <a:t>ms</a:t>
+            </a:r>
+            <a:endParaRPr lang="en-US" dirty="0"/>
+          </a:p>
+          <a:p>
+            <a:pPr marL="285750" indent="-285750" algn="l">
+              <a:lnSpc>
+                <a:spcPct val="150000"/>
+              </a:lnSpc>
+              <a:buFont typeface="Arial" panose="020B0604020202020204" pitchFamily="34" charset="0"/>
+              <a:buChar char="•"/>
+            </a:pPr>
+            <a:r>
+              <a:rPr dirty="0"/>
+              <a:t>Tracks </a:t>
+            </a:r>
+            <a:r>
+              <a:rPr dirty="0" err="1"/>
+              <a:t>pid</a:t>
+            </a:r>
+            <a:r>
+              <a:rPr dirty="0"/>
+              <a:t> → </a:t>
+            </a:r>
+            <a:r>
+              <a:rPr dirty="0" err="1"/>
+              <a:t>cmdline</a:t>
+            </a:r>
+            <a:r>
+              <a:rPr dirty="0"/>
+              <a:t> mapping</a:t>
+            </a:r>
+            <a:endParaRPr lang="en-US" dirty="0"/>
+          </a:p>
+          <a:p>
+            <a:pPr marL="285750" indent="-285750" algn="l">
+              <a:lnSpc>
+                <a:spcPct val="150000"/>
+              </a:lnSpc>
+              <a:buFont typeface="Arial" panose="020B0604020202020204" pitchFamily="34" charset="0"/>
+              <a:buChar char="•"/>
+            </a:pPr>
+            <a:endParaRPr lang="en-US" dirty="0"/>
+          </a:p>
+          <a:p>
+            <a:pPr marL="285750" indent="-285750" algn="l">
+              <a:lnSpc>
+                <a:spcPct val="150000"/>
+              </a:lnSpc>
+              <a:buFont typeface="Arial" panose="020B0604020202020204" pitchFamily="34" charset="0"/>
+              <a:buChar char="•"/>
+            </a:pPr>
+            <a:r>
+              <a:rPr dirty="0"/>
               <a:t>On AMSI registry recon:</a:t>
             </a:r>
           </a:p>
           <a:p>
-            <a:pPr algn="l"/>
-            <a:r>
-              <a:rPr sz="1300" b="1">
-                <a:solidFill>
-                  <a:srgbClr val="D85218"/>
-                </a:solidFill>
-              </a:rPr>
-              <a:t>▸ </a:t>
-            </a:r>
-            <a:r>
-              <a:rPr sz="1300">
-                <a:solidFill>
-                  <a:srgbClr val="FFFFFF"/>
-                </a:solidFill>
-              </a:rPr>
-              <a:t>    1.  NtSuspendProcess(pid)</a:t>
-            </a:r>
-          </a:p>
-          <a:p>
-            <a:pPr algn="l"/>
-            <a:r>
-              <a:rPr sz="1300" b="1">
-                <a:solidFill>
-                  <a:srgbClr val="D85218"/>
-                </a:solidFill>
-              </a:rPr>
-              <a:t>▸ </a:t>
-            </a:r>
-            <a:r>
-              <a:rPr sz="1300">
-                <a:solidFill>
-                  <a:srgbClr val="FFFFFF"/>
-                </a:solidFill>
-              </a:rPr>
-              <a:t>    2.  call ps-parser-cli on cmdline</a:t>
-            </a:r>
-          </a:p>
-          <a:p>
-            <a:pPr algn="l"/>
-            <a:r>
-              <a:rPr sz="1300" b="1">
-                <a:solidFill>
-                  <a:srgbClr val="D85218"/>
-                </a:solidFill>
-              </a:rPr>
-              <a:t>▸ </a:t>
-            </a:r>
-            <a:r>
-              <a:rPr sz="1300">
-                <a:solidFill>
-                  <a:srgbClr val="FFFFFF"/>
-                </a:solidFill>
-              </a:rPr>
+            <a:pPr algn="l">
+              <a:lnSpc>
+                <a:spcPct val="150000"/>
+              </a:lnSpc>
+            </a:pPr>
+            <a:r>
+              <a:rPr b="1" dirty="0"/>
+              <a:t> </a:t>
+            </a:r>
+            <a:r>
+              <a:rPr dirty="0"/>
+              <a:t>    1.  </a:t>
+            </a:r>
+            <a:r>
+              <a:rPr dirty="0" err="1"/>
+              <a:t>NtSuspendProcess</a:t>
+            </a:r>
+            <a:r>
+              <a:rPr dirty="0"/>
+              <a:t>(</a:t>
+            </a:r>
+            <a:r>
+              <a:rPr dirty="0" err="1"/>
+              <a:t>pid</a:t>
+            </a:r>
+            <a:r>
+              <a:rPr dirty="0"/>
+              <a:t>)</a:t>
+            </a:r>
+          </a:p>
+          <a:p>
+            <a:pPr algn="l">
+              <a:lnSpc>
+                <a:spcPct val="150000"/>
+              </a:lnSpc>
+            </a:pPr>
+            <a:r>
+              <a:rPr b="1" dirty="0"/>
+              <a:t> </a:t>
+            </a:r>
+            <a:r>
+              <a:rPr dirty="0"/>
+              <a:t>    2.  call </a:t>
+            </a:r>
+            <a:r>
+              <a:rPr dirty="0" err="1"/>
+              <a:t>ps</a:t>
+            </a:r>
+            <a:r>
+              <a:rPr dirty="0"/>
+              <a:t>-parser-cli on </a:t>
+            </a:r>
+            <a:r>
+              <a:rPr dirty="0" err="1"/>
+              <a:t>cmdline</a:t>
+            </a:r>
+            <a:endParaRPr dirty="0"/>
+          </a:p>
+          <a:p>
+            <a:pPr algn="l">
+              <a:lnSpc>
+                <a:spcPct val="150000"/>
+              </a:lnSpc>
+            </a:pPr>
+            <a:r>
+              <a:rPr b="1" dirty="0"/>
+              <a:t> </a:t>
+            </a:r>
+            <a:r>
+              <a:rPr dirty="0"/>
               <a:t>    3.  Suspicious → log,  BYPASS → kill</a:t>
             </a:r>
-          </a:p>
-          <a:p>
-            <a:pPr algn="l"/>
-            <a:r>
-              <a:rPr sz="1300" b="1">
-                <a:solidFill>
-                  <a:srgbClr val="D85218"/>
-                </a:solidFill>
-              </a:rPr>
-              <a:t>▸ </a:t>
-            </a:r>
-            <a:r>
-              <a:rPr sz="1300">
-                <a:solidFill>
-                  <a:srgbClr val="FFFFFF"/>
-                </a:solidFill>
-              </a:rPr>
+            <a:endParaRPr lang="en-US" dirty="0"/>
+          </a:p>
+          <a:p>
+            <a:pPr algn="l">
+              <a:lnSpc>
+                <a:spcPct val="150000"/>
+              </a:lnSpc>
+            </a:pPr>
+            <a:endParaRPr lang="en-US" dirty="0"/>
+          </a:p>
+          <a:p>
+            <a:pPr marL="285750" indent="-285750" algn="l">
+              <a:lnSpc>
+                <a:spcPct val="150000"/>
+              </a:lnSpc>
+              <a:buFont typeface="Arial" panose="020B0604020202020204" pitchFamily="34" charset="0"/>
+              <a:buChar char="•"/>
+            </a:pPr>
+            <a:r>
+              <a:rPr dirty="0"/>
               <a:t>Audit log per scanned process</a:t>
             </a:r>
           </a:p>
@@ -16713,7 +17523,9 @@
           </a:solidFill>
           <a:ln w="25400">
             <a:solidFill>
-              <a:srgbClr val="C05040"/>
+              <a:schemeClr val="tx1">
+                <a:lumMod val="85000"/>
+              </a:schemeClr>
             </a:solidFill>
           </a:ln>
         </p:spPr>
@@ -16749,7 +17561,7 @@
         <p:spPr>
           <a:xfrm>
             <a:off x="914400" y="5303520"/>
-            <a:ext cx="10058400" cy="365760"/>
+            <a:ext cx="2649764" cy="307777"/>
           </a:xfrm>
           <a:prstGeom prst="rect">
             <a:avLst/>
@@ -16764,12 +17576,44 @@
           <a:p>
             <a:pPr algn="l"/>
             <a:r>
-              <a:rPr sz="1400" b="1" i="0">
-                <a:solidFill>
-                  <a:srgbClr val="C05040"/>
-                </a:solidFill>
-              </a:rPr>
-              <a:t>Co Layer 2 widzi a Layer 1 nie:</a:t>
+              <a:rPr sz="1400" b="1" i="0" dirty="0">
+                <a:solidFill>
+                  <a:schemeClr val="accent2"/>
+                </a:solidFill>
+              </a:rPr>
+              <a:t>Co Layer 2 </a:t>
+            </a:r>
+            <a:r>
+              <a:rPr sz="1400" b="1" i="0" dirty="0" err="1">
+                <a:solidFill>
+                  <a:schemeClr val="accent2"/>
+                </a:solidFill>
+              </a:rPr>
+              <a:t>widzi</a:t>
+            </a:r>
+            <a:r>
+              <a:rPr sz="1400" b="1" i="0" dirty="0">
+                <a:solidFill>
+                  <a:schemeClr val="accent2"/>
+                </a:solidFill>
+              </a:rPr>
+              <a:t> a Layer 1 </a:t>
+            </a:r>
+            <a:r>
+              <a:rPr sz="1400" b="1" i="0" dirty="0" err="1">
+                <a:solidFill>
+                  <a:schemeClr val="accent2"/>
+                </a:solidFill>
+              </a:rPr>
+              <a:t>nie</a:t>
+            </a:r>
+            <a:r>
+              <a:rPr sz="1400" b="1" i="0" dirty="0">
+                <a:solidFill>
+                  <a:schemeClr val="accent2"/>
+                </a:solidFill>
+              </a:rPr>
+              <a:t>:</a:t>
             </a:r>
           </a:p>
         </p:txBody>
@@ -24149,7 +24993,9 @@
             <a:avLst/>
           </a:prstGeom>
           <a:solidFill>
-            <a:srgbClr val="2A3B4D"/>
+            <a:schemeClr val="accent6">
+              <a:lumMod val="50000"/>
+            </a:schemeClr>
           </a:solidFill>
           <a:ln>
             <a:noFill/>
@@ -24518,7 +25364,9 @@
             <a:avLst/>
           </a:prstGeom>
           <a:solidFill>
-            <a:srgbClr val="2A3B4D"/>
+            <a:schemeClr val="accent5">
+              <a:lumMod val="50000"/>
+            </a:schemeClr>
           </a:solidFill>
           <a:ln>
             <a:noFill/>
@@ -25346,7 +26194,7 @@
         </p:nvSpPr>
         <p:spPr>
           <a:xfrm>
-            <a:off x="731520" y="1097280"/>
+            <a:off x="868680" y="1114658"/>
             <a:ext cx="7062639" cy="553998"/>
           </a:xfrm>
           <a:prstGeom prst="rect">
@@ -25362,236 +26210,98 @@
           <a:p>
             <a:pPr algn="l"/>
             <a:r>
-              <a:rPr sz="1500" b="0" i="0" dirty="0">
-                <a:solidFill>
-                  <a:schemeClr val="tx1">
-                    <a:lumMod val="85000"/>
-                  </a:schemeClr>
-                </a:solidFill>
-              </a:rPr>
+              <a:rPr sz="1500" b="0" i="1" dirty="0"/>
               <a:t>PowerShell jest </a:t>
             </a:r>
             <a:r>
-              <a:rPr sz="1500" b="0" i="0" dirty="0" err="1">
-                <a:solidFill>
-                  <a:schemeClr val="tx1">
-                    <a:lumMod val="85000"/>
-                  </a:schemeClr>
-                </a:solidFill>
-              </a:rPr>
+              <a:rPr sz="1500" b="0" i="1" dirty="0" err="1"/>
               <a:t>preinstalowany</a:t>
             </a:r>
             <a:r>
-              <a:rPr sz="1500" b="0" i="0" dirty="0">
-                <a:solidFill>
-                  <a:schemeClr val="tx1">
-                    <a:lumMod val="85000"/>
-                  </a:schemeClr>
-                </a:solidFill>
-              </a:rPr>
+              <a:rPr sz="1500" b="0" i="1" dirty="0"/>
               <a:t> </a:t>
             </a:r>
             <a:r>
-              <a:rPr sz="1500" b="0" i="0" dirty="0" err="1">
-                <a:solidFill>
-                  <a:schemeClr val="tx1">
-                    <a:lumMod val="85000"/>
-                  </a:schemeClr>
-                </a:solidFill>
-              </a:rPr>
+              <a:rPr sz="1500" b="0" i="1" dirty="0" err="1"/>
               <a:t>na</a:t>
             </a:r>
             <a:r>
-              <a:rPr sz="1500" b="0" i="0" dirty="0">
-                <a:solidFill>
-                  <a:schemeClr val="tx1">
-                    <a:lumMod val="85000"/>
-                  </a:schemeClr>
-                </a:solidFill>
-              </a:rPr>
+              <a:rPr sz="1500" b="0" i="1" dirty="0"/>
               <a:t> </a:t>
             </a:r>
             <a:r>
-              <a:rPr sz="1500" b="0" i="0" dirty="0" err="1">
-                <a:solidFill>
-                  <a:schemeClr val="tx1">
-                    <a:lumMod val="85000"/>
-                  </a:schemeClr>
-                </a:solidFill>
-              </a:rPr>
+              <a:rPr sz="1500" b="0" i="1" dirty="0" err="1"/>
               <a:t>każdym</a:t>
             </a:r>
             <a:r>
-              <a:rPr sz="1500" b="0" i="0" dirty="0">
-                <a:solidFill>
-                  <a:schemeClr val="tx1">
-                    <a:lumMod val="85000"/>
-                  </a:schemeClr>
-                </a:solidFill>
-              </a:rPr>
+              <a:rPr sz="1500" b="0" i="1" dirty="0"/>
               <a:t> </a:t>
             </a:r>
             <a:r>
-              <a:rPr sz="1500" b="0" i="0" dirty="0" err="1">
-                <a:solidFill>
-                  <a:schemeClr val="tx1">
-                    <a:lumMod val="85000"/>
-                  </a:schemeClr>
-                </a:solidFill>
-              </a:rPr>
+              <a:rPr sz="1500" b="0" i="1" dirty="0" err="1"/>
               <a:t>Windowsie</a:t>
             </a:r>
             <a:r>
-              <a:rPr sz="1500" b="0" i="0" dirty="0">
-                <a:solidFill>
-                  <a:schemeClr val="tx1">
-                    <a:lumMod val="85000"/>
-                  </a:schemeClr>
-                </a:solidFill>
-              </a:rPr>
+              <a:rPr sz="1500" b="0" i="1" dirty="0"/>
               <a:t> od </a:t>
             </a:r>
             <a:r>
-              <a:rPr sz="1500" b="0" i="0" dirty="0" err="1">
-                <a:solidFill>
-                  <a:schemeClr val="tx1">
-                    <a:lumMod val="85000"/>
-                  </a:schemeClr>
-                </a:solidFill>
-              </a:rPr>
+              <a:rPr sz="1500" b="0" i="1" dirty="0" err="1"/>
               <a:t>ery</a:t>
             </a:r>
             <a:r>
-              <a:rPr sz="1500" b="0" i="0" dirty="0">
-                <a:solidFill>
-                  <a:schemeClr val="tx1">
-                    <a:lumMod val="85000"/>
-                  </a:schemeClr>
-                </a:solidFill>
-              </a:rPr>
+              <a:rPr sz="1500" b="0" i="1" dirty="0"/>
               <a:t> Win 7 SP1.</a:t>
             </a:r>
           </a:p>
           <a:p>
             <a:pPr algn="l"/>
             <a:r>
-              <a:rPr sz="1500" b="0" i="0" dirty="0" err="1">
-                <a:solidFill>
-                  <a:schemeClr val="tx1">
-                    <a:lumMod val="85000"/>
-                  </a:schemeClr>
-                </a:solidFill>
-              </a:rPr>
+              <a:rPr sz="1500" b="0" i="1" dirty="0" err="1"/>
               <a:t>Dla</a:t>
             </a:r>
             <a:r>
-              <a:rPr sz="1500" b="0" i="0" dirty="0">
-                <a:solidFill>
-                  <a:schemeClr val="tx1">
-                    <a:lumMod val="85000"/>
-                  </a:schemeClr>
-                </a:solidFill>
-              </a:rPr>
+              <a:rPr sz="1500" b="0" i="1" dirty="0"/>
               <a:t> </a:t>
             </a:r>
             <a:r>
-              <a:rPr sz="1500" b="0" i="0" dirty="0" err="1">
-                <a:solidFill>
-                  <a:schemeClr val="tx1">
-                    <a:lumMod val="85000"/>
-                  </a:schemeClr>
-                </a:solidFill>
-              </a:rPr>
+              <a:rPr sz="1500" b="0" i="1" dirty="0" err="1"/>
               <a:t>atakującego</a:t>
             </a:r>
             <a:r>
-              <a:rPr sz="1500" b="0" i="0" dirty="0">
-                <a:solidFill>
-                  <a:schemeClr val="tx1">
-                    <a:lumMod val="85000"/>
-                  </a:schemeClr>
-                </a:solidFill>
-              </a:rPr>
+              <a:rPr sz="1500" b="0" i="1" dirty="0"/>
               <a:t>: </a:t>
             </a:r>
             <a:r>
-              <a:rPr sz="1500" b="0" i="0" dirty="0" err="1">
-                <a:solidFill>
-                  <a:schemeClr val="tx1">
-                    <a:lumMod val="85000"/>
-                  </a:schemeClr>
-                </a:solidFill>
-              </a:rPr>
+              <a:rPr sz="1500" b="0" i="1" dirty="0" err="1"/>
               <a:t>zaufany</a:t>
             </a:r>
             <a:r>
-              <a:rPr sz="1500" b="0" i="0" dirty="0">
-                <a:solidFill>
-                  <a:schemeClr val="tx1">
-                    <a:lumMod val="85000"/>
-                  </a:schemeClr>
-                </a:solidFill>
-              </a:rPr>
+              <a:rPr sz="1500" b="0" i="1" dirty="0"/>
               <a:t> binary, </a:t>
             </a:r>
             <a:r>
-              <a:rPr sz="1500" b="0" i="0" dirty="0" err="1">
-                <a:solidFill>
-                  <a:schemeClr val="tx1">
-                    <a:lumMod val="85000"/>
-                  </a:schemeClr>
-                </a:solidFill>
-              </a:rPr>
+              <a:rPr sz="1500" b="0" i="1" dirty="0" err="1"/>
               <a:t>podpisany</a:t>
             </a:r>
             <a:r>
-              <a:rPr sz="1500" b="0" i="0" dirty="0">
-                <a:solidFill>
-                  <a:schemeClr val="tx1">
-                    <a:lumMod val="85000"/>
-                  </a:schemeClr>
-                </a:solidFill>
-              </a:rPr>
+              <a:rPr sz="1500" b="0" i="1" dirty="0"/>
               <a:t> </a:t>
             </a:r>
             <a:r>
-              <a:rPr sz="1500" b="0" i="0" dirty="0" err="1">
-                <a:solidFill>
-                  <a:schemeClr val="tx1">
-                    <a:lumMod val="85000"/>
-                  </a:schemeClr>
-                </a:solidFill>
-              </a:rPr>
+              <a:rPr sz="1500" b="0" i="1" dirty="0" err="1"/>
               <a:t>przez</a:t>
             </a:r>
             <a:r>
-              <a:rPr sz="1500" b="0" i="0" dirty="0">
-                <a:solidFill>
-                  <a:schemeClr val="tx1">
-                    <a:lumMod val="85000"/>
-                  </a:schemeClr>
-                </a:solidFill>
-              </a:rPr>
+              <a:rPr sz="1500" b="0" i="1" dirty="0"/>
               <a:t> Microsoft, z </a:t>
             </a:r>
             <a:r>
-              <a:rPr sz="1500" b="0" i="0" dirty="0" err="1">
-                <a:solidFill>
-                  <a:schemeClr val="tx1">
-                    <a:lumMod val="85000"/>
-                  </a:schemeClr>
-                </a:solidFill>
-              </a:rPr>
+              <a:rPr sz="1500" b="0" i="1" dirty="0" err="1"/>
               <a:t>pełnym</a:t>
             </a:r>
             <a:r>
-              <a:rPr sz="1500" b="0" i="0" dirty="0">
-                <a:solidFill>
-                  <a:schemeClr val="tx1">
-                    <a:lumMod val="85000"/>
-                  </a:schemeClr>
-                </a:solidFill>
-              </a:rPr>
+              <a:rPr sz="1500" b="0" i="1" dirty="0"/>
               <a:t> .NET runtime.</a:t>
             </a:r>
           </a:p>
@@ -26260,8 +26970,8 @@
         </p:nvSpPr>
         <p:spPr>
           <a:xfrm>
-            <a:off x="731520" y="2286000"/>
-            <a:ext cx="1994457" cy="369332"/>
+            <a:off x="4152941" y="1756935"/>
+            <a:ext cx="3474413" cy="584775"/>
           </a:xfrm>
           <a:prstGeom prst="rect">
             <a:avLst/>
@@ -26276,7 +26986,7 @@
           <a:p>
             <a:pPr algn="l"/>
             <a:r>
-              <a:rPr sz="1800" b="1" i="0" dirty="0">
+              <a:rPr sz="3200" b="1" i="0" dirty="0">
                 <a:solidFill>
                   <a:schemeClr val="accent2"/>
                 </a:solidFill>
@@ -26284,7 +26994,7 @@
               <a:t>Co AMSI </a:t>
             </a:r>
             <a:r>
-              <a:rPr sz="1800" b="1" i="0" dirty="0" err="1">
+              <a:rPr sz="3200" b="1" i="0" dirty="0" err="1">
                 <a:solidFill>
                   <a:schemeClr val="accent2"/>
                 </a:solidFill>
@@ -26292,374 +27002,16 @@
               <a:t>skanuje</a:t>
             </a:r>
             <a:r>
-              <a:rPr sz="1800" b="1" i="0" dirty="0">
+              <a:rPr lang="en-US" sz="3200" b="1" i="0" dirty="0">
                 <a:solidFill>
                   <a:schemeClr val="accent2"/>
                 </a:solidFill>
               </a:rPr>
-              <a:t>:</a:t>
-            </a:r>
-          </a:p>
-        </p:txBody>
-      </p:sp>
-      <p:sp>
-        <p:nvSpPr>
-          <p:cNvPr id="7" name="TextBox 6"/>
-          <p:cNvSpPr txBox="1"/>
-          <p:nvPr/>
-        </p:nvSpPr>
-        <p:spPr>
-          <a:xfrm>
-            <a:off x="1097280" y="2834640"/>
-            <a:ext cx="10058400" cy="2514600"/>
-          </a:xfrm>
-          <a:prstGeom prst="rect">
-            <a:avLst/>
-          </a:prstGeom>
-          <a:noFill/>
-        </p:spPr>
-        <p:txBody>
-          <a:bodyPr wrap="none">
-            <a:spAutoFit/>
-          </a:bodyPr>
-          <a:lstStyle/>
-          <a:p>
-            <a:pPr algn="l"/>
-            <a:r>
-              <a:rPr sz="1500" b="1" dirty="0">
-                <a:solidFill>
-                  <a:srgbClr val="D85218"/>
-                </a:solidFill>
-              </a:rPr>
-              <a:t>▸ </a:t>
-            </a:r>
-            <a:r>
-              <a:rPr sz="1500" dirty="0">
-                <a:solidFill>
-                  <a:srgbClr val="FFFFFF"/>
-                </a:solidFill>
-              </a:rPr>
-              <a:t>PowerShell — </a:t>
-            </a:r>
-            <a:r>
-              <a:rPr sz="1500" dirty="0" err="1">
-                <a:solidFill>
-                  <a:srgbClr val="FFFFFF"/>
-                </a:solidFill>
-              </a:rPr>
-              <a:t>całe</a:t>
-            </a:r>
-            <a:r>
-              <a:rPr sz="1500" dirty="0">
-                <a:solidFill>
-                  <a:srgbClr val="FFFFFF"/>
-                </a:solidFill>
-              </a:rPr>
-              <a:t> </a:t>
-            </a:r>
-            <a:r>
-              <a:rPr sz="1500" dirty="0" err="1">
-                <a:solidFill>
-                  <a:srgbClr val="FFFFFF"/>
-                </a:solidFill>
-              </a:rPr>
-              <a:t>bloki</a:t>
-            </a:r>
-            <a:r>
-              <a:rPr sz="1500" dirty="0">
-                <a:solidFill>
-                  <a:srgbClr val="FFFFFF"/>
-                </a:solidFill>
-              </a:rPr>
-              <a:t> </a:t>
-            </a:r>
-            <a:r>
-              <a:rPr sz="1500" dirty="0" err="1">
-                <a:solidFill>
-                  <a:srgbClr val="FFFFFF"/>
-                </a:solidFill>
-              </a:rPr>
-              <a:t>skryptów</a:t>
-            </a:r>
-            <a:r>
-              <a:rPr sz="1500" dirty="0">
-                <a:solidFill>
-                  <a:srgbClr val="FFFFFF"/>
-                </a:solidFill>
-              </a:rPr>
-              <a:t>, </a:t>
-            </a:r>
-            <a:r>
-              <a:rPr sz="1500" dirty="0" err="1">
-                <a:solidFill>
-                  <a:srgbClr val="FFFFFF"/>
-                </a:solidFill>
-              </a:rPr>
-              <a:t>dynamiczne</a:t>
-            </a:r>
-            <a:r>
-              <a:rPr sz="1500" dirty="0">
-                <a:solidFill>
-                  <a:srgbClr val="FFFFFF"/>
-                </a:solidFill>
-              </a:rPr>
-              <a:t> `Invoke-Expression`</a:t>
-            </a:r>
-          </a:p>
-          <a:p>
-            <a:pPr algn="l"/>
-            <a:r>
-              <a:rPr sz="1500" b="1" dirty="0">
-                <a:solidFill>
-                  <a:srgbClr val="D85218"/>
-                </a:solidFill>
-              </a:rPr>
-              <a:t>▸ </a:t>
-            </a:r>
-            <a:r>
-              <a:rPr sz="1500" dirty="0">
-                <a:solidFill>
-                  <a:srgbClr val="FFFFFF"/>
-                </a:solidFill>
-              </a:rPr>
-              <a:t>JScript / VBScript — Windows Script Host</a:t>
-            </a:r>
-          </a:p>
-          <a:p>
-            <a:pPr algn="l"/>
-            <a:r>
-              <a:rPr sz="1500" b="1" dirty="0">
-                <a:solidFill>
-                  <a:srgbClr val="D85218"/>
-                </a:solidFill>
-              </a:rPr>
-              <a:t>▸ </a:t>
-            </a:r>
-            <a:r>
-              <a:rPr sz="1500" dirty="0">
-                <a:solidFill>
-                  <a:srgbClr val="FFFFFF"/>
-                </a:solidFill>
-              </a:rPr>
-              <a:t>WMI — </a:t>
-            </a:r>
-            <a:r>
-              <a:rPr sz="1500" dirty="0" err="1">
-                <a:solidFill>
-                  <a:srgbClr val="FFFFFF"/>
-                </a:solidFill>
-              </a:rPr>
-              <a:t>operacje</a:t>
-            </a:r>
-            <a:r>
-              <a:rPr sz="1500" dirty="0">
-                <a:solidFill>
-                  <a:srgbClr val="FFFFFF"/>
-                </a:solidFill>
-              </a:rPr>
-              <a:t> </a:t>
-            </a:r>
-            <a:r>
-              <a:rPr sz="1500" dirty="0" err="1">
-                <a:solidFill>
-                  <a:srgbClr val="FFFFFF"/>
-                </a:solidFill>
-              </a:rPr>
-              <a:t>na</a:t>
-            </a:r>
-            <a:r>
-              <a:rPr sz="1500" dirty="0">
-                <a:solidFill>
-                  <a:srgbClr val="FFFFFF"/>
-                </a:solidFill>
-              </a:rPr>
-              <a:t> </a:t>
-            </a:r>
-            <a:r>
-              <a:rPr sz="1500" dirty="0" err="1">
-                <a:solidFill>
-                  <a:srgbClr val="FFFFFF"/>
-                </a:solidFill>
-              </a:rPr>
-              <a:t>obiektach</a:t>
-            </a:r>
-            <a:r>
-              <a:rPr sz="1500" dirty="0">
-                <a:solidFill>
-                  <a:srgbClr val="FFFFFF"/>
-                </a:solidFill>
-              </a:rPr>
-              <a:t> COM</a:t>
-            </a:r>
-          </a:p>
-          <a:p>
-            <a:pPr algn="l"/>
-            <a:r>
-              <a:rPr sz="1500" b="1" dirty="0">
-                <a:solidFill>
-                  <a:srgbClr val="D85218"/>
-                </a:solidFill>
-              </a:rPr>
-              <a:t>▸ </a:t>
-            </a:r>
-            <a:r>
-              <a:rPr sz="1500" dirty="0">
-                <a:solidFill>
-                  <a:srgbClr val="FFFFFF"/>
-                </a:solidFill>
-              </a:rPr>
-              <a:t>Office macros, .NET </a:t>
-            </a:r>
-            <a:r>
-              <a:rPr sz="1500" dirty="0" err="1">
-                <a:solidFill>
-                  <a:srgbClr val="FFFFFF"/>
-                </a:solidFill>
-              </a:rPr>
-              <a:t>Assembly.Load</a:t>
-            </a:r>
-            <a:r>
-              <a:rPr sz="1500" dirty="0">
-                <a:solidFill>
-                  <a:srgbClr val="FFFFFF"/>
-                </a:solidFill>
-              </a:rPr>
-              <a:t>()</a:t>
-            </a:r>
-          </a:p>
-          <a:p>
-            <a:pPr algn="l"/>
-            <a:r>
-              <a:rPr sz="1500" b="1" dirty="0">
-                <a:solidFill>
-                  <a:srgbClr val="D85218"/>
-                </a:solidFill>
-              </a:rPr>
-              <a:t>▸ </a:t>
-            </a:r>
-            <a:r>
-              <a:rPr sz="1500" dirty="0" err="1">
-                <a:solidFill>
-                  <a:srgbClr val="FFFFFF"/>
-                </a:solidFill>
-              </a:rPr>
-              <a:t>Każda</a:t>
-            </a:r>
-            <a:r>
-              <a:rPr sz="1500" dirty="0">
-                <a:solidFill>
-                  <a:srgbClr val="FFFFFF"/>
-                </a:solidFill>
-              </a:rPr>
-              <a:t> </a:t>
-            </a:r>
-            <a:r>
-              <a:rPr sz="1500" dirty="0" err="1">
-                <a:solidFill>
-                  <a:srgbClr val="FFFFFF"/>
-                </a:solidFill>
-              </a:rPr>
-              <a:t>aplikacja</a:t>
-            </a:r>
-            <a:r>
-              <a:rPr sz="1500" dirty="0">
-                <a:solidFill>
-                  <a:srgbClr val="FFFFFF"/>
-                </a:solidFill>
-              </a:rPr>
-              <a:t> </a:t>
-            </a:r>
-            <a:r>
-              <a:rPr sz="1500" dirty="0" err="1">
-                <a:solidFill>
-                  <a:srgbClr val="FFFFFF"/>
-                </a:solidFill>
-              </a:rPr>
-              <a:t>może</a:t>
-            </a:r>
-            <a:r>
-              <a:rPr sz="1500" dirty="0">
-                <a:solidFill>
-                  <a:srgbClr val="FFFFFF"/>
-                </a:solidFill>
-              </a:rPr>
-              <a:t> </a:t>
-            </a:r>
-            <a:r>
-              <a:rPr sz="1500" dirty="0" err="1">
-                <a:solidFill>
-                  <a:srgbClr val="FFFFFF"/>
-                </a:solidFill>
-              </a:rPr>
-              <a:t>wywołać</a:t>
-            </a:r>
-            <a:r>
-              <a:rPr sz="1500" dirty="0">
-                <a:solidFill>
-                  <a:srgbClr val="FFFFFF"/>
-                </a:solidFill>
-              </a:rPr>
-              <a:t> `</a:t>
-            </a:r>
-            <a:r>
-              <a:rPr sz="1500" dirty="0" err="1">
-                <a:solidFill>
-                  <a:srgbClr val="FFFFFF"/>
-                </a:solidFill>
-              </a:rPr>
-              <a:t>AmsiScanBuffer</a:t>
-            </a:r>
-            <a:r>
-              <a:rPr sz="1500" dirty="0">
-                <a:solidFill>
-                  <a:srgbClr val="FFFFFF"/>
-                </a:solidFill>
-              </a:rPr>
-              <a:t>` </a:t>
-            </a:r>
-            <a:r>
-              <a:rPr sz="1500" dirty="0" err="1">
-                <a:solidFill>
-                  <a:srgbClr val="FFFFFF"/>
-                </a:solidFill>
-              </a:rPr>
-              <a:t>na</a:t>
-            </a:r>
-            <a:r>
-              <a:rPr sz="1500" dirty="0">
-                <a:solidFill>
-                  <a:srgbClr val="FFFFFF"/>
-                </a:solidFill>
-              </a:rPr>
-              <a:t> </a:t>
-            </a:r>
-            <a:r>
-              <a:rPr sz="1500" dirty="0" err="1">
-                <a:solidFill>
-                  <a:srgbClr val="FFFFFF"/>
-                </a:solidFill>
-              </a:rPr>
-              <a:t>własnych</a:t>
-            </a:r>
-            <a:r>
-              <a:rPr sz="1500" dirty="0">
-                <a:solidFill>
-                  <a:srgbClr val="FFFFFF"/>
-                </a:solidFill>
-              </a:rPr>
-              <a:t> </a:t>
-            </a:r>
-            <a:r>
-              <a:rPr sz="1500" dirty="0" err="1">
-                <a:solidFill>
-                  <a:srgbClr val="FFFFFF"/>
-                </a:solidFill>
-              </a:rPr>
-              <a:t>buforach</a:t>
-            </a:r>
-            <a:endParaRPr sz="1500" dirty="0">
+              <a:t>?</a:t>
+            </a:r>
+            <a:endParaRPr sz="3200" b="1" i="0" dirty="0">
               <a:solidFill>
-                <a:srgbClr val="FFFFFF"/>
+                <a:schemeClr val="accent2"/>
               </a:solidFill>
             </a:endParaRPr>
           </a:p>
@@ -26751,6 +27103,260 @@
               </a:rPr>
               <a:t>AMSI woła wszystkich providerów, jeden 'malicious' = blokada.</a:t>
             </a:r>
+          </a:p>
+        </p:txBody>
+      </p:sp>
+      <p:pic>
+        <p:nvPicPr>
+          <p:cNvPr id="10" name="Picture 9" descr="A blue square with white arrow&#10;&#10;AI-generated content may be incorrect.">
+            <a:extLst>
+              <a:ext uri="{FF2B5EF4-FFF2-40B4-BE49-F238E27FC236}">
+                <a16:creationId xmlns:a16="http://schemas.microsoft.com/office/drawing/2014/main" id="{F50254F9-5FB0-C2AF-4E79-BA0FA968D695}"/>
+              </a:ext>
+            </a:extLst>
+          </p:cNvPr>
+          <p:cNvPicPr>
+            <a:picLocks noChangeAspect="1"/>
+          </p:cNvPicPr>
+          <p:nvPr/>
+        </p:nvPicPr>
+        <p:blipFill>
+          <a:blip r:embed="rId2"/>
+          <a:stretch>
+            <a:fillRect/>
+          </a:stretch>
+        </p:blipFill>
+        <p:spPr>
+          <a:xfrm>
+            <a:off x="1554480" y="2194560"/>
+            <a:ext cx="1981325" cy="1981325"/>
+          </a:xfrm>
+          <a:prstGeom prst="rect">
+            <a:avLst/>
+          </a:prstGeom>
+        </p:spPr>
+      </p:pic>
+      <p:pic>
+        <p:nvPicPr>
+          <p:cNvPr id="12" name="Picture 11">
+            <a:extLst>
+              <a:ext uri="{FF2B5EF4-FFF2-40B4-BE49-F238E27FC236}">
+                <a16:creationId xmlns:a16="http://schemas.microsoft.com/office/drawing/2014/main" id="{39CF03A1-7ADC-3565-9B98-B8620B645C59}"/>
+              </a:ext>
+            </a:extLst>
+          </p:cNvPr>
+          <p:cNvPicPr>
+            <a:picLocks noChangeAspect="1"/>
+          </p:cNvPicPr>
+          <p:nvPr/>
+        </p:nvPicPr>
+        <p:blipFill>
+          <a:blip r:embed="rId3"/>
+          <a:stretch>
+            <a:fillRect/>
+          </a:stretch>
+        </p:blipFill>
+        <p:spPr>
+          <a:xfrm>
+            <a:off x="3769584" y="4015283"/>
+            <a:ext cx="1343028" cy="1402537"/>
+          </a:xfrm>
+          <a:prstGeom prst="rect">
+            <a:avLst/>
+          </a:prstGeom>
+        </p:spPr>
+      </p:pic>
+      <p:pic>
+        <p:nvPicPr>
+          <p:cNvPr id="15" name="Picture 14">
+            <a:extLst>
+              <a:ext uri="{FF2B5EF4-FFF2-40B4-BE49-F238E27FC236}">
+                <a16:creationId xmlns:a16="http://schemas.microsoft.com/office/drawing/2014/main" id="{728E1686-A9BD-FC1C-C8CD-DB649A3419F7}"/>
+              </a:ext>
+            </a:extLst>
+          </p:cNvPr>
+          <p:cNvPicPr>
+            <a:picLocks noChangeAspect="1"/>
+          </p:cNvPicPr>
+          <p:nvPr/>
+        </p:nvPicPr>
+        <p:blipFill>
+          <a:blip r:embed="rId4"/>
+          <a:stretch>
+            <a:fillRect/>
+          </a:stretch>
+        </p:blipFill>
+        <p:spPr>
+          <a:xfrm>
+            <a:off x="6764174" y="3991856"/>
+            <a:ext cx="1269387" cy="1425964"/>
+          </a:xfrm>
+          <a:prstGeom prst="rect">
+            <a:avLst/>
+          </a:prstGeom>
+          <a:ln w="57150">
+            <a:solidFill>
+              <a:schemeClr val="accent5"/>
+            </a:solidFill>
+          </a:ln>
+        </p:spPr>
+      </p:pic>
+      <p:pic>
+        <p:nvPicPr>
+          <p:cNvPr id="21" name="Picture 20">
+            <a:extLst>
+              <a:ext uri="{FF2B5EF4-FFF2-40B4-BE49-F238E27FC236}">
+                <a16:creationId xmlns:a16="http://schemas.microsoft.com/office/drawing/2014/main" id="{C5AB832F-0FF3-E600-D229-50B0EE4D3C46}"/>
+              </a:ext>
+            </a:extLst>
+          </p:cNvPr>
+          <p:cNvPicPr>
+            <a:picLocks noChangeAspect="1"/>
+          </p:cNvPicPr>
+          <p:nvPr/>
+        </p:nvPicPr>
+        <p:blipFill>
+          <a:blip r:embed="rId5"/>
+          <a:stretch>
+            <a:fillRect/>
+          </a:stretch>
+        </p:blipFill>
+        <p:spPr>
+          <a:xfrm>
+            <a:off x="8761280" y="2483953"/>
+            <a:ext cx="1416075" cy="1402537"/>
+          </a:xfrm>
+          <a:prstGeom prst="rect">
+            <a:avLst/>
+          </a:prstGeom>
+        </p:spPr>
+      </p:pic>
+      <p:sp>
+        <p:nvSpPr>
+          <p:cNvPr id="22" name="Oval 21">
+            <a:extLst>
+              <a:ext uri="{FF2B5EF4-FFF2-40B4-BE49-F238E27FC236}">
+                <a16:creationId xmlns:a16="http://schemas.microsoft.com/office/drawing/2014/main" id="{5DC7336D-5206-F0A9-D7B6-D3433856693A}"/>
+              </a:ext>
+            </a:extLst>
+          </p:cNvPr>
+          <p:cNvSpPr/>
+          <p:nvPr/>
+        </p:nvSpPr>
+        <p:spPr>
+          <a:xfrm>
+            <a:off x="4289948" y="2488456"/>
+            <a:ext cx="3017520" cy="914400"/>
+          </a:xfrm>
+          <a:prstGeom prst="ellipse">
+            <a:avLst/>
+          </a:prstGeom>
+          <a:gradFill flip="none" rotWithShape="1">
+            <a:gsLst>
+              <a:gs pos="0">
+                <a:schemeClr val="accent3">
+                  <a:lumMod val="67000"/>
+                </a:schemeClr>
+              </a:gs>
+              <a:gs pos="48000">
+                <a:schemeClr val="accent3">
+                  <a:lumMod val="97000"/>
+                  <a:lumOff val="3000"/>
+                </a:schemeClr>
+              </a:gs>
+              <a:gs pos="100000">
+                <a:schemeClr val="accent3">
+                  <a:lumMod val="60000"/>
+                  <a:lumOff val="40000"/>
+                </a:schemeClr>
+              </a:gs>
+            </a:gsLst>
+            <a:lin ang="16200000" scaled="1"/>
+            <a:tileRect/>
+          </a:gradFill>
+          <a:ln>
+            <a:noFill/>
+          </a:ln>
+        </p:spPr>
+        <p:style>
+          <a:lnRef idx="0">
+            <a:scrgbClr r="0" g="0" b="0"/>
+          </a:lnRef>
+          <a:fillRef idx="0">
+            <a:scrgbClr r="0" g="0" b="0"/>
+          </a:fillRef>
+          <a:effectRef idx="0">
+            <a:scrgbClr r="0" g="0" b="0"/>
+          </a:effectRef>
+          <a:fontRef idx="minor">
+            <a:schemeClr val="lt1"/>
+          </a:fontRef>
+        </p:style>
+        <p:txBody>
+          <a:bodyPr rtlCol="0" anchor="ctr"/>
+          <a:lstStyle/>
+          <a:p>
+            <a:pPr algn="ctr"/>
+            <a:r>
+              <a:rPr lang="en-US" dirty="0" err="1"/>
+              <a:t>AmsiScanBuffer</a:t>
+            </a:r>
+            <a:endParaRPr lang="en-US" dirty="0"/>
+          </a:p>
+        </p:txBody>
+      </p:sp>
+      <p:sp>
+        <p:nvSpPr>
+          <p:cNvPr id="23" name="Rectangle: Rounded Corners 22">
+            <a:extLst>
+              <a:ext uri="{FF2B5EF4-FFF2-40B4-BE49-F238E27FC236}">
+                <a16:creationId xmlns:a16="http://schemas.microsoft.com/office/drawing/2014/main" id="{89EF534B-F2A3-2DE4-500C-2F9A998C950F}"/>
+              </a:ext>
+            </a:extLst>
+          </p:cNvPr>
+          <p:cNvSpPr/>
+          <p:nvPr/>
+        </p:nvSpPr>
+        <p:spPr>
+          <a:xfrm>
+            <a:off x="1069848" y="2322135"/>
+            <a:ext cx="9884664" cy="3301425"/>
+          </a:xfrm>
+          <a:prstGeom prst="roundRect">
+            <a:avLst/>
+          </a:prstGeom>
+          <a:noFill/>
+          <a:ln w="57150">
+            <a:solidFill>
+              <a:schemeClr val="tx2">
+                <a:lumMod val="20000"/>
+                <a:lumOff val="80000"/>
+              </a:schemeClr>
+            </a:solidFill>
+          </a:ln>
+        </p:spPr>
+        <p:style>
+          <a:lnRef idx="2">
+            <a:schemeClr val="accent1">
+              <a:shade val="15000"/>
+            </a:schemeClr>
+          </a:lnRef>
+          <a:fillRef idx="1">
+            <a:schemeClr val="accent1"/>
+          </a:fillRef>
+          <a:effectRef idx="0">
+            <a:schemeClr val="accent1"/>
+          </a:effectRef>
+          <a:fontRef idx="minor">
+            <a:schemeClr val="lt1"/>
+          </a:fontRef>
+        </p:style>
+        <p:txBody>
+          <a:bodyPr rtlCol="0" anchor="ctr"/>
+          <a:lstStyle/>
+          <a:p>
+            <a:pPr algn="ctr"/>
+            <a:endParaRPr lang="en-US"/>
           </a:p>
         </p:txBody>
       </p:sp>
@@ -26901,35 +27507,218 @@
       </p:sp>
       <p:sp>
         <p:nvSpPr>
-          <p:cNvPr id="5" name="Rectangle 4"/>
+          <p:cNvPr id="8" name="TextBox 7"/>
+          <p:cNvSpPr txBox="1"/>
+          <p:nvPr/>
+        </p:nvSpPr>
+        <p:spPr>
+          <a:xfrm>
+            <a:off x="5760720" y="1920239"/>
+            <a:ext cx="640080" cy="182880"/>
+          </a:xfrm>
+          <a:prstGeom prst="rect">
+            <a:avLst/>
+          </a:prstGeom>
+          <a:noFill/>
+        </p:spPr>
+        <p:txBody>
+          <a:bodyPr wrap="none">
+            <a:spAutoFit/>
+          </a:bodyPr>
+          <a:lstStyle/>
+          <a:p>
+            <a:pPr algn="ctr"/>
+            <a:r>
+              <a:rPr sz="1400" b="0" i="0">
+                <a:solidFill>
+                  <a:srgbClr val="778899"/>
+                </a:solidFill>
+              </a:rPr>
+              <a:t>▼</a:t>
+            </a:r>
+          </a:p>
+        </p:txBody>
+      </p:sp>
+      <p:sp>
+        <p:nvSpPr>
+          <p:cNvPr id="12" name="TextBox 11"/>
+          <p:cNvSpPr txBox="1"/>
+          <p:nvPr/>
+        </p:nvSpPr>
+        <p:spPr>
+          <a:xfrm>
+            <a:off x="5760720" y="2697480"/>
+            <a:ext cx="640080" cy="182880"/>
+          </a:xfrm>
+          <a:prstGeom prst="rect">
+            <a:avLst/>
+          </a:prstGeom>
+          <a:noFill/>
+        </p:spPr>
+        <p:txBody>
+          <a:bodyPr wrap="none">
+            <a:spAutoFit/>
+          </a:bodyPr>
+          <a:lstStyle/>
+          <a:p>
+            <a:pPr algn="ctr"/>
+            <a:r>
+              <a:rPr sz="1400" b="0" i="0">
+                <a:solidFill>
+                  <a:srgbClr val="778899"/>
+                </a:solidFill>
+              </a:rPr>
+              <a:t>▼</a:t>
+            </a:r>
+          </a:p>
+        </p:txBody>
+      </p:sp>
+      <p:sp>
+        <p:nvSpPr>
+          <p:cNvPr id="16" name="TextBox 15"/>
+          <p:cNvSpPr txBox="1"/>
+          <p:nvPr/>
+        </p:nvSpPr>
+        <p:spPr>
+          <a:xfrm>
+            <a:off x="5760720" y="3474720"/>
+            <a:ext cx="640080" cy="182880"/>
+          </a:xfrm>
+          <a:prstGeom prst="rect">
+            <a:avLst/>
+          </a:prstGeom>
+          <a:noFill/>
+        </p:spPr>
+        <p:txBody>
+          <a:bodyPr wrap="none">
+            <a:spAutoFit/>
+          </a:bodyPr>
+          <a:lstStyle/>
+          <a:p>
+            <a:pPr algn="ctr"/>
+            <a:r>
+              <a:rPr sz="1400" b="0" i="0">
+                <a:solidFill>
+                  <a:srgbClr val="778899"/>
+                </a:solidFill>
+              </a:rPr>
+              <a:t>▼</a:t>
+            </a:r>
+          </a:p>
+        </p:txBody>
+      </p:sp>
+      <p:sp>
+        <p:nvSpPr>
+          <p:cNvPr id="20" name="TextBox 19"/>
+          <p:cNvSpPr txBox="1"/>
+          <p:nvPr/>
+        </p:nvSpPr>
+        <p:spPr>
+          <a:xfrm>
+            <a:off x="5760720" y="4251959"/>
+            <a:ext cx="640080" cy="182880"/>
+          </a:xfrm>
+          <a:prstGeom prst="rect">
+            <a:avLst/>
+          </a:prstGeom>
+          <a:noFill/>
+        </p:spPr>
+        <p:txBody>
+          <a:bodyPr wrap="none">
+            <a:spAutoFit/>
+          </a:bodyPr>
+          <a:lstStyle/>
+          <a:p>
+            <a:pPr algn="ctr"/>
+            <a:r>
+              <a:rPr sz="1400" b="0" i="0">
+                <a:solidFill>
+                  <a:srgbClr val="778899"/>
+                </a:solidFill>
+              </a:rPr>
+              <a:t>▼</a:t>
+            </a:r>
+          </a:p>
+        </p:txBody>
+      </p:sp>
+      <p:sp>
+        <p:nvSpPr>
+          <p:cNvPr id="24" name="TextBox 23"/>
+          <p:cNvSpPr txBox="1"/>
+          <p:nvPr/>
+        </p:nvSpPr>
+        <p:spPr>
+          <a:xfrm>
+            <a:off x="5760720" y="5029200"/>
+            <a:ext cx="640080" cy="182880"/>
+          </a:xfrm>
+          <a:prstGeom prst="rect">
+            <a:avLst/>
+          </a:prstGeom>
+          <a:noFill/>
+        </p:spPr>
+        <p:txBody>
+          <a:bodyPr wrap="none">
+            <a:spAutoFit/>
+          </a:bodyPr>
+          <a:lstStyle/>
+          <a:p>
+            <a:pPr algn="ctr"/>
+            <a:r>
+              <a:rPr sz="1400" b="0" i="0">
+                <a:solidFill>
+                  <a:srgbClr val="778899"/>
+                </a:solidFill>
+              </a:rPr>
+              <a:t>▼</a:t>
+            </a:r>
+          </a:p>
+        </p:txBody>
+      </p:sp>
+      <p:sp>
+        <p:nvSpPr>
+          <p:cNvPr id="28" name="Rectangle: Rounded Corners 27">
+            <a:extLst>
+              <a:ext uri="{FF2B5EF4-FFF2-40B4-BE49-F238E27FC236}">
+                <a16:creationId xmlns:a16="http://schemas.microsoft.com/office/drawing/2014/main" id="{343F390D-50AC-6242-37E4-EDB0ED3FFE99}"/>
+              </a:ext>
+            </a:extLst>
+          </p:cNvPr>
           <p:cNvSpPr/>
           <p:nvPr/>
         </p:nvSpPr>
         <p:spPr>
           <a:xfrm>
-            <a:off x="3200400" y="1280160"/>
-            <a:ext cx="5760720" cy="640080"/>
-          </a:xfrm>
-          <a:prstGeom prst="rect">
+            <a:off x="1267459" y="1176786"/>
+            <a:ext cx="2935669" cy="1233661"/>
+          </a:xfrm>
+          <a:prstGeom prst="roundRect">
             <a:avLst/>
           </a:prstGeom>
           <a:solidFill>
-            <a:srgbClr val="2A3B4D"/>
+            <a:schemeClr val="bg2">
+              <a:lumMod val="50000"/>
+            </a:schemeClr>
           </a:solidFill>
-          <a:ln w="25400">
+          <a:ln>
             <a:solidFill>
-              <a:srgbClr val="94B6D2"/>
+              <a:schemeClr val="bg2">
+                <a:lumMod val="40000"/>
+                <a:lumOff val="60000"/>
+              </a:schemeClr>
             </a:solidFill>
           </a:ln>
         </p:spPr>
         <p:style>
-          <a:lnRef idx="1">
-            <a:schemeClr val="accent1"/>
+          <a:lnRef idx="2">
+            <a:schemeClr val="accent1">
+              <a:shade val="15000"/>
+            </a:schemeClr>
           </a:lnRef>
-          <a:fillRef idx="3">
+          <a:fillRef idx="1">
             <a:schemeClr val="accent1"/>
           </a:fillRef>
-          <a:effectRef idx="2">
+          <a:effectRef idx="0">
             <a:schemeClr val="accent1"/>
           </a:effectRef>
           <a:fontRef idx="minor">
@@ -26941,20 +27730,33 @@
           <a:lstStyle/>
           <a:p>
             <a:pPr algn="ctr"/>
-            <a:endParaRPr/>
-          </a:p>
-        </p:txBody>
-      </p:sp>
-      <p:sp>
-        <p:nvSpPr>
-          <p:cNvPr id="6" name="TextBox 5"/>
+            <a:r>
+              <a:rPr lang="en-US" sz="2800" dirty="0"/>
+              <a:t>PowerShell.exe</a:t>
+            </a:r>
+          </a:p>
+          <a:p>
+            <a:pPr algn="ctr"/>
+            <a:endParaRPr lang="en-US" sz="2800" dirty="0"/>
+          </a:p>
+        </p:txBody>
+      </p:sp>
+      <p:sp>
+        <p:nvSpPr>
+          <p:cNvPr id="30" name="TextBox 29">
+            <a:extLst>
+              <a:ext uri="{FF2B5EF4-FFF2-40B4-BE49-F238E27FC236}">
+                <a16:creationId xmlns:a16="http://schemas.microsoft.com/office/drawing/2014/main" id="{4B6F42F0-1283-AA07-FC14-433B1FC0EEC4}"/>
+              </a:ext>
+            </a:extLst>
+          </p:cNvPr>
           <p:cNvSpPr txBox="1"/>
           <p:nvPr/>
         </p:nvSpPr>
         <p:spPr>
           <a:xfrm>
-            <a:off x="3383280" y="1325880"/>
-            <a:ext cx="5486400" cy="320040"/>
+            <a:off x="1546050" y="1923023"/>
+            <a:ext cx="2258568" cy="307777"/>
           </a:xfrm>
           <a:prstGeom prst="rect">
             <a:avLst/>
@@ -26962,122 +27764,67 @@
           <a:noFill/>
         </p:spPr>
         <p:txBody>
-          <a:bodyPr wrap="none">
+          <a:bodyPr wrap="square">
             <a:spAutoFit/>
           </a:bodyPr>
           <a:lstStyle/>
           <a:p>
-            <a:pPr algn="l"/>
-            <a:r>
-              <a:rPr sz="1500" b="1" i="0">
-                <a:solidFill>
-                  <a:srgbClr val="94B6D2"/>
-                </a:solidFill>
-              </a:rPr>
-              <a:t>PowerShell.exe</a:t>
-            </a:r>
-          </a:p>
-        </p:txBody>
-      </p:sp>
-      <p:sp>
-        <p:nvSpPr>
-          <p:cNvPr id="7" name="TextBox 6"/>
-          <p:cNvSpPr txBox="1"/>
-          <p:nvPr/>
-        </p:nvSpPr>
-        <p:spPr>
-          <a:xfrm>
-            <a:off x="3383280" y="1645919"/>
-            <a:ext cx="5486400" cy="274320"/>
-          </a:xfrm>
-          <a:prstGeom prst="rect">
-            <a:avLst/>
-          </a:prstGeom>
-          <a:noFill/>
-        </p:spPr>
-        <p:txBody>
-          <a:bodyPr wrap="none">
-            <a:spAutoFit/>
-          </a:bodyPr>
-          <a:lstStyle/>
-          <a:p>
-            <a:pPr algn="l"/>
-            <a:r>
-              <a:rPr sz="1100" b="0" i="0">
+            <a:r>
+              <a:rPr lang="en-US" sz="1400" b="0" i="0" dirty="0">
                 <a:solidFill>
                   <a:srgbClr val="AABBCC"/>
                 </a:solidFill>
               </a:rPr>
-              <a:t>  user invokes a script</a:t>
-            </a:r>
-          </a:p>
-        </p:txBody>
-      </p:sp>
-      <p:sp>
-        <p:nvSpPr>
-          <p:cNvPr id="8" name="TextBox 7"/>
-          <p:cNvSpPr txBox="1"/>
-          <p:nvPr/>
-        </p:nvSpPr>
-        <p:spPr>
-          <a:xfrm>
-            <a:off x="5760720" y="1920239"/>
-            <a:ext cx="640080" cy="182880"/>
-          </a:xfrm>
-          <a:prstGeom prst="rect">
-            <a:avLst/>
-          </a:prstGeom>
-          <a:noFill/>
-        </p:spPr>
-        <p:txBody>
-          <a:bodyPr wrap="none">
-            <a:spAutoFit/>
-          </a:bodyPr>
-          <a:lstStyle/>
-          <a:p>
-            <a:pPr algn="ctr"/>
-            <a:r>
-              <a:rPr sz="1400" b="0" i="0">
-                <a:solidFill>
-                  <a:srgbClr val="778899"/>
-                </a:solidFill>
-              </a:rPr>
-              <a:t>▼</a:t>
-            </a:r>
-          </a:p>
-        </p:txBody>
-      </p:sp>
-      <p:sp>
-        <p:nvSpPr>
-          <p:cNvPr id="9" name="Rectangle 8"/>
+              <a:t> user invokes a script</a:t>
+            </a:r>
+            <a:endParaRPr lang="en-US" sz="1400" dirty="0"/>
+          </a:p>
+        </p:txBody>
+      </p:sp>
+      <p:sp>
+        <p:nvSpPr>
+          <p:cNvPr id="31" name="Rectangle: Rounded Corners 30">
+            <a:extLst>
+              <a:ext uri="{FF2B5EF4-FFF2-40B4-BE49-F238E27FC236}">
+                <a16:creationId xmlns:a16="http://schemas.microsoft.com/office/drawing/2014/main" id="{DB09FA4B-9631-D792-F95C-CFBD5D75B142}"/>
+              </a:ext>
+            </a:extLst>
+          </p:cNvPr>
           <p:cNvSpPr/>
           <p:nvPr/>
         </p:nvSpPr>
         <p:spPr>
           <a:xfrm>
-            <a:off x="3200400" y="2057400"/>
-            <a:ext cx="5760720" cy="640080"/>
-          </a:xfrm>
-          <a:prstGeom prst="rect">
+            <a:off x="4899628" y="1524389"/>
+            <a:ext cx="2852992" cy="1225330"/>
+          </a:xfrm>
+          <a:prstGeom prst="roundRect">
             <a:avLst/>
           </a:prstGeom>
           <a:solidFill>
-            <a:srgbClr val="2A3B4D"/>
+            <a:schemeClr val="bg2">
+              <a:lumMod val="50000"/>
+            </a:schemeClr>
           </a:solidFill>
-          <a:ln w="25400">
+          <a:ln>
             <a:solidFill>
-              <a:srgbClr val="D85218"/>
+              <a:schemeClr val="accent2">
+                <a:lumMod val="60000"/>
+                <a:lumOff val="40000"/>
+              </a:schemeClr>
             </a:solidFill>
           </a:ln>
         </p:spPr>
         <p:style>
-          <a:lnRef idx="1">
-            <a:schemeClr val="accent1"/>
+          <a:lnRef idx="2">
+            <a:schemeClr val="accent1">
+              <a:shade val="15000"/>
+            </a:schemeClr>
           </a:lnRef>
-          <a:fillRef idx="3">
+          <a:fillRef idx="1">
             <a:schemeClr val="accent1"/>
           </a:fillRef>
-          <a:effectRef idx="2">
+          <a:effectRef idx="0">
             <a:schemeClr val="accent1"/>
           </a:effectRef>
           <a:fontRef idx="minor">
@@ -27089,143 +27836,68 @@
           <a:lstStyle/>
           <a:p>
             <a:pPr algn="ctr"/>
-            <a:endParaRPr/>
-          </a:p>
-        </p:txBody>
-      </p:sp>
-      <p:sp>
-        <p:nvSpPr>
-          <p:cNvPr id="10" name="TextBox 9"/>
-          <p:cNvSpPr txBox="1"/>
-          <p:nvPr/>
-        </p:nvSpPr>
-        <p:spPr>
-          <a:xfrm>
-            <a:off x="3383280" y="2103120"/>
-            <a:ext cx="5486400" cy="320040"/>
-          </a:xfrm>
-          <a:prstGeom prst="rect">
-            <a:avLst/>
-          </a:prstGeom>
-          <a:noFill/>
-        </p:spPr>
-        <p:txBody>
-          <a:bodyPr wrap="none">
-            <a:spAutoFit/>
-          </a:bodyPr>
-          <a:lstStyle/>
-          <a:p>
-            <a:pPr algn="l"/>
-            <a:r>
-              <a:rPr sz="1500" b="1" i="0">
-                <a:solidFill>
-                  <a:srgbClr val="D85218"/>
+            <a:r>
+              <a:rPr lang="en-US" sz="2800" dirty="0">
+                <a:solidFill>
+                  <a:schemeClr val="accent2"/>
                 </a:solidFill>
               </a:rPr>
               <a:t>AMSI.dll</a:t>
             </a:r>
           </a:p>
-        </p:txBody>
-      </p:sp>
-      <p:sp>
-        <p:nvSpPr>
-          <p:cNvPr id="11" name="TextBox 10"/>
-          <p:cNvSpPr txBox="1"/>
-          <p:nvPr/>
-        </p:nvSpPr>
-        <p:spPr>
-          <a:xfrm>
-            <a:off x="3383280" y="2423160"/>
-            <a:ext cx="5486400" cy="274320"/>
-          </a:xfrm>
-          <a:prstGeom prst="rect">
-            <a:avLst/>
-          </a:prstGeom>
-          <a:noFill/>
-        </p:spPr>
-        <p:txBody>
-          <a:bodyPr wrap="none">
-            <a:spAutoFit/>
-          </a:bodyPr>
-          <a:lstStyle/>
-          <a:p>
-            <a:pPr algn="l"/>
-            <a:r>
-              <a:rPr sz="1100" b="0" i="0">
-                <a:solidFill>
-                  <a:srgbClr val="AABBCC"/>
-                </a:solidFill>
-              </a:rPr>
-              <a:t>  AmsiScanBuffer(content)</a:t>
-            </a:r>
-          </a:p>
-        </p:txBody>
-      </p:sp>
-      <p:sp>
-        <p:nvSpPr>
-          <p:cNvPr id="12" name="TextBox 11"/>
-          <p:cNvSpPr txBox="1"/>
-          <p:nvPr/>
-        </p:nvSpPr>
-        <p:spPr>
-          <a:xfrm>
-            <a:off x="5760720" y="2697480"/>
-            <a:ext cx="640080" cy="182880"/>
-          </a:xfrm>
-          <a:prstGeom prst="rect">
-            <a:avLst/>
-          </a:prstGeom>
-          <a:noFill/>
-        </p:spPr>
-        <p:txBody>
-          <a:bodyPr wrap="none">
-            <a:spAutoFit/>
-          </a:bodyPr>
-          <a:lstStyle/>
           <a:p>
             <a:pPr algn="ctr"/>
-            <a:r>
-              <a:rPr sz="1400" b="0" i="0">
-                <a:solidFill>
-                  <a:srgbClr val="778899"/>
-                </a:solidFill>
-              </a:rPr>
-              <a:t>▼</a:t>
-            </a:r>
-          </a:p>
-        </p:txBody>
-      </p:sp>
-      <p:sp>
-        <p:nvSpPr>
-          <p:cNvPr id="13" name="Rectangle 12"/>
+            <a:endParaRPr lang="en-US" sz="2800" dirty="0">
+              <a:solidFill>
+                <a:schemeClr val="accent2"/>
+              </a:solidFill>
+            </a:endParaRPr>
+          </a:p>
+        </p:txBody>
+      </p:sp>
+      <p:sp>
+        <p:nvSpPr>
+          <p:cNvPr id="32" name="Rectangle: Rounded Corners 31">
+            <a:extLst>
+              <a:ext uri="{FF2B5EF4-FFF2-40B4-BE49-F238E27FC236}">
+                <a16:creationId xmlns:a16="http://schemas.microsoft.com/office/drawing/2014/main" id="{9AA7702F-240D-560D-7328-AA391061A4A9}"/>
+              </a:ext>
+            </a:extLst>
+          </p:cNvPr>
           <p:cNvSpPr/>
           <p:nvPr/>
         </p:nvSpPr>
         <p:spPr>
           <a:xfrm>
-            <a:off x="3200400" y="2834639"/>
-            <a:ext cx="5760720" cy="640080"/>
-          </a:xfrm>
-          <a:prstGeom prst="rect">
+            <a:off x="8396891" y="1875415"/>
+            <a:ext cx="3295270" cy="1287055"/>
+          </a:xfrm>
+          <a:prstGeom prst="roundRect">
             <a:avLst/>
           </a:prstGeom>
           <a:solidFill>
-            <a:srgbClr val="2A3B4D"/>
+            <a:schemeClr val="bg2">
+              <a:lumMod val="50000"/>
+            </a:schemeClr>
           </a:solidFill>
-          <a:ln w="25400">
+          <a:ln>
             <a:solidFill>
-              <a:srgbClr val="7BA79D"/>
+              <a:schemeClr val="accent6">
+                <a:lumMod val="75000"/>
+              </a:schemeClr>
             </a:solidFill>
           </a:ln>
         </p:spPr>
         <p:style>
-          <a:lnRef idx="1">
-            <a:schemeClr val="accent1"/>
+          <a:lnRef idx="2">
+            <a:schemeClr val="accent1">
+              <a:shade val="15000"/>
+            </a:schemeClr>
           </a:lnRef>
-          <a:fillRef idx="3">
+          <a:fillRef idx="1">
             <a:schemeClr val="accent1"/>
           </a:fillRef>
-          <a:effectRef idx="2">
+          <a:effectRef idx="0">
             <a:schemeClr val="accent1"/>
           </a:effectRef>
           <a:fontRef idx="minor">
@@ -27236,21 +27908,40 @@
           <a:bodyPr rtlCol="0" anchor="ctr"/>
           <a:lstStyle/>
           <a:p>
-            <a:pPr algn="ctr"/>
-            <a:endParaRPr/>
-          </a:p>
-        </p:txBody>
-      </p:sp>
-      <p:sp>
-        <p:nvSpPr>
-          <p:cNvPr id="14" name="TextBox 13"/>
+            <a:r>
+              <a:rPr lang="en-US" sz="2400" b="1" dirty="0">
+                <a:solidFill>
+                  <a:srgbClr val="7BA79D"/>
+                </a:solidFill>
+              </a:rPr>
+              <a:t>Registered providers</a:t>
+            </a:r>
+          </a:p>
+          <a:p>
+            <a:endParaRPr lang="en-US" sz="2400" b="1" dirty="0">
+              <a:solidFill>
+                <a:srgbClr val="7BA79D"/>
+              </a:solidFill>
+            </a:endParaRPr>
+          </a:p>
+        </p:txBody>
+      </p:sp>
+      <p:sp>
+        <p:nvSpPr>
+          <p:cNvPr id="33" name="TextBox 32">
+            <a:extLst>
+              <a:ext uri="{FF2B5EF4-FFF2-40B4-BE49-F238E27FC236}">
+                <a16:creationId xmlns:a16="http://schemas.microsoft.com/office/drawing/2014/main" id="{5CEF7347-0439-2CE5-B9D2-8F45949C3A1B}"/>
+              </a:ext>
+            </a:extLst>
+          </p:cNvPr>
           <p:cNvSpPr txBox="1"/>
           <p:nvPr/>
         </p:nvSpPr>
         <p:spPr>
           <a:xfrm>
-            <a:off x="3383280" y="2880359"/>
-            <a:ext cx="5486400" cy="320040"/>
+            <a:off x="5331175" y="2230800"/>
+            <a:ext cx="2258568" cy="307777"/>
           </a:xfrm>
           <a:prstGeom prst="rect">
             <a:avLst/>
@@ -27258,33 +27949,60 @@
           <a:noFill/>
         </p:spPr>
         <p:txBody>
-          <a:bodyPr wrap="none">
+          <a:bodyPr wrap="square">
             <a:spAutoFit/>
           </a:bodyPr>
           <a:lstStyle/>
           <a:p>
-            <a:pPr algn="l"/>
-            <a:r>
-              <a:rPr sz="1500" b="1" i="0">
-                <a:solidFill>
-                  <a:srgbClr val="7BA79D"/>
-                </a:solidFill>
-              </a:rPr>
-              <a:t>Registered providers</a:t>
-            </a:r>
-          </a:p>
-        </p:txBody>
-      </p:sp>
-      <p:sp>
-        <p:nvSpPr>
-          <p:cNvPr id="15" name="TextBox 14"/>
+            <a:r>
+              <a:rPr lang="en-US" sz="1400" b="0" i="0" dirty="0" err="1">
+                <a:solidFill>
+                  <a:schemeClr val="accent2">
+                    <a:lumMod val="60000"/>
+                    <a:lumOff val="40000"/>
+                  </a:schemeClr>
+                </a:solidFill>
+              </a:rPr>
+              <a:t>AmsiScanBuffer</a:t>
+            </a:r>
+            <a:r>
+              <a:rPr lang="en-US" sz="1400" b="0" i="0" dirty="0">
+                <a:solidFill>
+                  <a:schemeClr val="accent2">
+                    <a:lumMod val="60000"/>
+                    <a:lumOff val="40000"/>
+                  </a:schemeClr>
+                </a:solidFill>
+              </a:rPr>
+              <a:t>(content)</a:t>
+            </a:r>
+            <a:endParaRPr lang="en-US" sz="1400" dirty="0">
+              <a:solidFill>
+                <a:schemeClr val="accent2">
+                  <a:lumMod val="60000"/>
+                  <a:lumOff val="40000"/>
+                </a:schemeClr>
+              </a:solidFill>
+            </a:endParaRPr>
+          </a:p>
+        </p:txBody>
+      </p:sp>
+      <p:sp>
+        <p:nvSpPr>
+          <p:cNvPr id="35" name="TextBox 34">
+            <a:extLst>
+              <a:ext uri="{FF2B5EF4-FFF2-40B4-BE49-F238E27FC236}">
+                <a16:creationId xmlns:a16="http://schemas.microsoft.com/office/drawing/2014/main" id="{41A07C84-55BB-2564-C448-CEBF3E8FE48C}"/>
+              </a:ext>
+            </a:extLst>
+          </p:cNvPr>
           <p:cNvSpPr txBox="1"/>
           <p:nvPr/>
         </p:nvSpPr>
         <p:spPr>
           <a:xfrm>
-            <a:off x="3383280" y="3200399"/>
-            <a:ext cx="5486400" cy="274320"/>
+            <a:off x="8839200" y="2365055"/>
+            <a:ext cx="2545080" cy="307777"/>
           </a:xfrm>
           <a:prstGeom prst="rect">
             <a:avLst/>
@@ -27292,88 +28010,64 @@
           <a:noFill/>
         </p:spPr>
         <p:txBody>
-          <a:bodyPr wrap="none">
+          <a:bodyPr wrap="square">
             <a:spAutoFit/>
           </a:bodyPr>
           <a:lstStyle/>
           <a:p>
-            <a:pPr algn="l"/>
-            <a:r>
-              <a:rPr sz="1100" b="0" i="0">
+            <a:r>
+              <a:rPr lang="en-US" sz="1400" b="0" i="0" dirty="0">
                 <a:solidFill>
                   <a:srgbClr val="AABBCC"/>
                 </a:solidFill>
               </a:rPr>
-              <a:t>  enumerated from registry</a:t>
-            </a:r>
-          </a:p>
-        </p:txBody>
-      </p:sp>
-      <p:sp>
-        <p:nvSpPr>
-          <p:cNvPr id="16" name="TextBox 15"/>
-          <p:cNvSpPr txBox="1"/>
-          <p:nvPr/>
-        </p:nvSpPr>
-        <p:spPr>
-          <a:xfrm>
-            <a:off x="5760720" y="3474720"/>
-            <a:ext cx="640080" cy="182880"/>
-          </a:xfrm>
-          <a:prstGeom prst="rect">
-            <a:avLst/>
-          </a:prstGeom>
-          <a:noFill/>
-        </p:spPr>
-        <p:txBody>
-          <a:bodyPr wrap="none">
-            <a:spAutoFit/>
-          </a:bodyPr>
-          <a:lstStyle/>
-          <a:p>
-            <a:pPr algn="ctr"/>
-            <a:r>
-              <a:rPr sz="1400" b="0" i="0">
-                <a:solidFill>
-                  <a:srgbClr val="778899"/>
-                </a:solidFill>
-              </a:rPr>
-              <a:t>▼</a:t>
-            </a:r>
-          </a:p>
-        </p:txBody>
-      </p:sp>
-      <p:sp>
-        <p:nvSpPr>
-          <p:cNvPr id="17" name="Rectangle 16"/>
+              <a:t> enumerated from registry</a:t>
+            </a:r>
+            <a:endParaRPr lang="en-US" sz="1400" dirty="0"/>
+          </a:p>
+        </p:txBody>
+      </p:sp>
+      <p:sp>
+        <p:nvSpPr>
+          <p:cNvPr id="36" name="Rectangle: Rounded Corners 35">
+            <a:extLst>
+              <a:ext uri="{FF2B5EF4-FFF2-40B4-BE49-F238E27FC236}">
+                <a16:creationId xmlns:a16="http://schemas.microsoft.com/office/drawing/2014/main" id="{F8C4BC11-5B0F-13AD-0B6E-1927871056CB}"/>
+              </a:ext>
+            </a:extLst>
+          </p:cNvPr>
           <p:cNvSpPr/>
           <p:nvPr/>
         </p:nvSpPr>
         <p:spPr>
           <a:xfrm>
-            <a:off x="3200400" y="3611879"/>
-            <a:ext cx="5760720" cy="640080"/>
-          </a:xfrm>
-          <a:prstGeom prst="rect">
+            <a:off x="8500490" y="3785625"/>
+            <a:ext cx="3295270" cy="1298427"/>
+          </a:xfrm>
+          <a:prstGeom prst="roundRect">
             <a:avLst/>
           </a:prstGeom>
           <a:solidFill>
-            <a:srgbClr val="2A3B4D"/>
+            <a:schemeClr val="bg2">
+              <a:lumMod val="50000"/>
+            </a:schemeClr>
           </a:solidFill>
-          <a:ln w="25400">
+          <a:ln>
             <a:solidFill>
-              <a:srgbClr val="7BA79D"/>
+              <a:srgbClr val="00B0F0"/>
             </a:solidFill>
           </a:ln>
         </p:spPr>
         <p:style>
-          <a:lnRef idx="1">
-            <a:schemeClr val="accent1"/>
+          <a:lnRef idx="2">
+            <a:schemeClr val="accent1">
+              <a:shade val="15000"/>
+            </a:schemeClr>
           </a:lnRef>
-          <a:fillRef idx="3">
+          <a:fillRef idx="1">
             <a:schemeClr val="accent1"/>
           </a:fillRef>
-          <a:effectRef idx="2">
+          <a:effectRef idx="0">
             <a:schemeClr val="accent1"/>
           </a:effectRef>
           <a:fontRef idx="minor">
@@ -27384,21 +28078,46 @@
           <a:bodyPr rtlCol="0" anchor="ctr"/>
           <a:lstStyle/>
           <a:p>
-            <a:pPr algn="ctr"/>
-            <a:endParaRPr/>
-          </a:p>
-        </p:txBody>
-      </p:sp>
-      <p:sp>
-        <p:nvSpPr>
-          <p:cNvPr id="18" name="TextBox 17"/>
+            <a:r>
+              <a:rPr lang="en-US" sz="2400" b="1" dirty="0">
+                <a:solidFill>
+                  <a:schemeClr val="bg2">
+                    <a:lumMod val="60000"/>
+                    <a:lumOff val="40000"/>
+                  </a:schemeClr>
+                </a:solidFill>
+              </a:rPr>
+              <a:t> Provider COM DLLs</a:t>
+            </a:r>
+          </a:p>
+          <a:p>
+            <a:endParaRPr lang="en-US" sz="2400" b="1" dirty="0">
+              <a:solidFill>
+                <a:schemeClr val="bg2">
+                  <a:lumMod val="60000"/>
+                  <a:lumOff val="40000"/>
+                </a:schemeClr>
+              </a:solidFill>
+            </a:endParaRPr>
+          </a:p>
+        </p:txBody>
+      </p:sp>
+      <p:sp>
+        <p:nvSpPr>
+          <p:cNvPr id="38" name="TextBox 37">
+            <a:extLst>
+              <a:ext uri="{FF2B5EF4-FFF2-40B4-BE49-F238E27FC236}">
+                <a16:creationId xmlns:a16="http://schemas.microsoft.com/office/drawing/2014/main" id="{6ED54DDF-0A50-2331-C253-E64463C76D68}"/>
+              </a:ext>
+            </a:extLst>
+          </p:cNvPr>
           <p:cNvSpPr txBox="1"/>
           <p:nvPr/>
         </p:nvSpPr>
         <p:spPr>
           <a:xfrm>
-            <a:off x="3383280" y="3657599"/>
-            <a:ext cx="5486400" cy="320040"/>
+            <a:off x="8973312" y="4343399"/>
+            <a:ext cx="2276856" cy="307777"/>
           </a:xfrm>
           <a:prstGeom prst="rect">
             <a:avLst/>
@@ -27406,122 +28125,66 @@
           <a:noFill/>
         </p:spPr>
         <p:txBody>
-          <a:bodyPr wrap="none">
+          <a:bodyPr wrap="square">
             <a:spAutoFit/>
           </a:bodyPr>
           <a:lstStyle/>
           <a:p>
-            <a:pPr algn="l"/>
-            <a:r>
-              <a:rPr sz="1500" b="1" i="0">
-                <a:solidFill>
-                  <a:srgbClr val="7BA79D"/>
-                </a:solidFill>
-              </a:rPr>
-              <a:t>Provider COM DLLs</a:t>
-            </a:r>
-          </a:p>
-        </p:txBody>
-      </p:sp>
-      <p:sp>
-        <p:nvSpPr>
-          <p:cNvPr id="19" name="TextBox 18"/>
-          <p:cNvSpPr txBox="1"/>
-          <p:nvPr/>
-        </p:nvSpPr>
-        <p:spPr>
-          <a:xfrm>
-            <a:off x="3383280" y="3977639"/>
-            <a:ext cx="5486400" cy="274320"/>
-          </a:xfrm>
-          <a:prstGeom prst="rect">
-            <a:avLst/>
-          </a:prstGeom>
-          <a:noFill/>
-        </p:spPr>
-        <p:txBody>
-          <a:bodyPr wrap="none">
-            <a:spAutoFit/>
-          </a:bodyPr>
-          <a:lstStyle/>
-          <a:p>
-            <a:pPr algn="l"/>
-            <a:r>
-              <a:rPr sz="1100" b="0" i="0">
+            <a:r>
+              <a:rPr lang="en-US" sz="1400" b="0" i="0" dirty="0">
                 <a:solidFill>
                   <a:srgbClr val="AABBCC"/>
                 </a:solidFill>
               </a:rPr>
-              <a:t>  each scans, returns verdict</a:t>
-            </a:r>
-          </a:p>
-        </p:txBody>
-      </p:sp>
-      <p:sp>
-        <p:nvSpPr>
-          <p:cNvPr id="20" name="TextBox 19"/>
-          <p:cNvSpPr txBox="1"/>
-          <p:nvPr/>
-        </p:nvSpPr>
-        <p:spPr>
-          <a:xfrm>
-            <a:off x="5760720" y="4251959"/>
-            <a:ext cx="640080" cy="182880"/>
-          </a:xfrm>
-          <a:prstGeom prst="rect">
-            <a:avLst/>
-          </a:prstGeom>
-          <a:noFill/>
-        </p:spPr>
-        <p:txBody>
-          <a:bodyPr wrap="none">
-            <a:spAutoFit/>
-          </a:bodyPr>
-          <a:lstStyle/>
-          <a:p>
-            <a:pPr algn="ctr"/>
-            <a:r>
-              <a:rPr sz="1400" b="0" i="0">
-                <a:solidFill>
-                  <a:srgbClr val="778899"/>
-                </a:solidFill>
-              </a:rPr>
-              <a:t>▼</a:t>
-            </a:r>
-          </a:p>
-        </p:txBody>
-      </p:sp>
-      <p:sp>
-        <p:nvSpPr>
-          <p:cNvPr id="21" name="Rectangle 20"/>
+              <a:t> each scans, returns verdict</a:t>
+            </a:r>
+            <a:endParaRPr lang="en-US" sz="1400" dirty="0"/>
+          </a:p>
+        </p:txBody>
+      </p:sp>
+      <p:sp>
+        <p:nvSpPr>
+          <p:cNvPr id="39" name="Rectangle: Rounded Corners 38">
+            <a:extLst>
+              <a:ext uri="{FF2B5EF4-FFF2-40B4-BE49-F238E27FC236}">
+                <a16:creationId xmlns:a16="http://schemas.microsoft.com/office/drawing/2014/main" id="{0C6244CE-55DF-279B-FFBB-A9B03E04F034}"/>
+              </a:ext>
+            </a:extLst>
+          </p:cNvPr>
           <p:cNvSpPr/>
           <p:nvPr/>
         </p:nvSpPr>
         <p:spPr>
           <a:xfrm>
-            <a:off x="3200400" y="4389120"/>
-            <a:ext cx="5760720" cy="640080"/>
-          </a:xfrm>
-          <a:prstGeom prst="rect">
+            <a:off x="4872419" y="4370830"/>
+            <a:ext cx="2976372" cy="1337383"/>
+          </a:xfrm>
+          <a:prstGeom prst="roundRect">
             <a:avLst/>
           </a:prstGeom>
           <a:solidFill>
-            <a:srgbClr val="2A3B4D"/>
+            <a:schemeClr val="bg2">
+              <a:lumMod val="50000"/>
+            </a:schemeClr>
           </a:solidFill>
-          <a:ln w="25400">
+          <a:ln>
             <a:solidFill>
-              <a:srgbClr val="D85218"/>
+              <a:schemeClr val="accent6">
+                <a:lumMod val="75000"/>
+              </a:schemeClr>
             </a:solidFill>
           </a:ln>
         </p:spPr>
         <p:style>
-          <a:lnRef idx="1">
-            <a:schemeClr val="accent1"/>
+          <a:lnRef idx="2">
+            <a:schemeClr val="accent1">
+              <a:shade val="15000"/>
+            </a:schemeClr>
           </a:lnRef>
-          <a:fillRef idx="3">
+          <a:fillRef idx="1">
             <a:schemeClr val="accent1"/>
           </a:fillRef>
-          <a:effectRef idx="2">
+          <a:effectRef idx="0">
             <a:schemeClr val="accent1"/>
           </a:effectRef>
           <a:fontRef idx="minor">
@@ -27532,21 +28195,40 @@
           <a:bodyPr rtlCol="0" anchor="ctr"/>
           <a:lstStyle/>
           <a:p>
-            <a:pPr algn="ctr"/>
-            <a:endParaRPr/>
-          </a:p>
-        </p:txBody>
-      </p:sp>
-      <p:sp>
-        <p:nvSpPr>
-          <p:cNvPr id="22" name="TextBox 21"/>
+            <a:r>
+              <a:rPr lang="en-US" sz="2400" b="1" dirty="0">
+                <a:solidFill>
+                  <a:srgbClr val="7BA79D"/>
+                </a:solidFill>
+              </a:rPr>
+              <a:t>Aggregated Verdict</a:t>
+            </a:r>
+          </a:p>
+          <a:p>
+            <a:endParaRPr lang="en-US" sz="2400" b="1" dirty="0">
+              <a:solidFill>
+                <a:srgbClr val="7BA79D"/>
+              </a:solidFill>
+            </a:endParaRPr>
+          </a:p>
+        </p:txBody>
+      </p:sp>
+      <p:sp>
+        <p:nvSpPr>
+          <p:cNvPr id="41" name="TextBox 40">
+            <a:extLst>
+              <a:ext uri="{FF2B5EF4-FFF2-40B4-BE49-F238E27FC236}">
+                <a16:creationId xmlns:a16="http://schemas.microsoft.com/office/drawing/2014/main" id="{8995ABFE-4E5D-F3FF-57BE-DA74511CA39D}"/>
+              </a:ext>
+            </a:extLst>
+          </p:cNvPr>
           <p:cNvSpPr txBox="1"/>
           <p:nvPr/>
         </p:nvSpPr>
         <p:spPr>
           <a:xfrm>
-            <a:off x="3383280" y="4434840"/>
-            <a:ext cx="5486400" cy="320040"/>
+            <a:off x="5328285" y="5233486"/>
+            <a:ext cx="1995678" cy="307777"/>
           </a:xfrm>
           <a:prstGeom prst="rect">
             <a:avLst/>
@@ -27554,122 +28236,64 @@
           <a:noFill/>
         </p:spPr>
         <p:txBody>
-          <a:bodyPr wrap="none">
+          <a:bodyPr wrap="square">
             <a:spAutoFit/>
           </a:bodyPr>
           <a:lstStyle/>
           <a:p>
-            <a:pPr algn="l"/>
-            <a:r>
-              <a:rPr sz="1500" b="1" i="0">
-                <a:solidFill>
-                  <a:srgbClr val="D85218"/>
-                </a:solidFill>
-              </a:rPr>
-              <a:t>Aggregated verdict</a:t>
-            </a:r>
-          </a:p>
-        </p:txBody>
-      </p:sp>
-      <p:sp>
-        <p:nvSpPr>
-          <p:cNvPr id="23" name="TextBox 22"/>
-          <p:cNvSpPr txBox="1"/>
-          <p:nvPr/>
-        </p:nvSpPr>
-        <p:spPr>
-          <a:xfrm>
-            <a:off x="3383280" y="4754880"/>
-            <a:ext cx="5486400" cy="274320"/>
-          </a:xfrm>
-          <a:prstGeom prst="rect">
-            <a:avLst/>
-          </a:prstGeom>
-          <a:noFill/>
-        </p:spPr>
-        <p:txBody>
-          <a:bodyPr wrap="none">
-            <a:spAutoFit/>
-          </a:bodyPr>
-          <a:lstStyle/>
-          <a:p>
-            <a:pPr algn="l"/>
-            <a:r>
-              <a:rPr sz="1100" b="0" i="0">
+            <a:r>
+              <a:rPr lang="en-US" sz="1400" b="0" i="0" dirty="0">
                 <a:solidFill>
                   <a:srgbClr val="AABBCC"/>
                 </a:solidFill>
               </a:rPr>
-              <a:t>  any 'malicious' = block</a:t>
-            </a:r>
-          </a:p>
-        </p:txBody>
-      </p:sp>
-      <p:sp>
-        <p:nvSpPr>
-          <p:cNvPr id="24" name="TextBox 23"/>
-          <p:cNvSpPr txBox="1"/>
-          <p:nvPr/>
-        </p:nvSpPr>
-        <p:spPr>
-          <a:xfrm>
-            <a:off x="5760720" y="5029200"/>
-            <a:ext cx="640080" cy="182880"/>
-          </a:xfrm>
-          <a:prstGeom prst="rect">
-            <a:avLst/>
-          </a:prstGeom>
-          <a:noFill/>
-        </p:spPr>
-        <p:txBody>
-          <a:bodyPr wrap="none">
-            <a:spAutoFit/>
-          </a:bodyPr>
-          <a:lstStyle/>
-          <a:p>
-            <a:pPr algn="ctr"/>
-            <a:r>
-              <a:rPr sz="1400" b="0" i="0">
-                <a:solidFill>
-                  <a:srgbClr val="778899"/>
-                </a:solidFill>
-              </a:rPr>
-              <a:t>▼</a:t>
-            </a:r>
-          </a:p>
-        </p:txBody>
-      </p:sp>
-      <p:sp>
-        <p:nvSpPr>
-          <p:cNvPr id="25" name="Rectangle 24"/>
+              <a:t> any 'malicious' = block</a:t>
+            </a:r>
+            <a:endParaRPr lang="en-US" sz="1400" dirty="0"/>
+          </a:p>
+        </p:txBody>
+      </p:sp>
+      <p:sp>
+        <p:nvSpPr>
+          <p:cNvPr id="42" name="Rectangle: Rounded Corners 41">
+            <a:extLst>
+              <a:ext uri="{FF2B5EF4-FFF2-40B4-BE49-F238E27FC236}">
+                <a16:creationId xmlns:a16="http://schemas.microsoft.com/office/drawing/2014/main" id="{790BBB6F-0864-425C-7E60-3F1000323175}"/>
+              </a:ext>
+            </a:extLst>
+          </p:cNvPr>
           <p:cNvSpPr/>
           <p:nvPr/>
         </p:nvSpPr>
         <p:spPr>
           <a:xfrm>
-            <a:off x="3200400" y="5166360"/>
-            <a:ext cx="5760720" cy="640080"/>
-          </a:xfrm>
-          <a:prstGeom prst="rect">
+            <a:off x="1020144" y="4940253"/>
+            <a:ext cx="3210116" cy="1150275"/>
+          </a:xfrm>
+          <a:prstGeom prst="roundRect">
             <a:avLst/>
           </a:prstGeom>
           <a:solidFill>
-            <a:srgbClr val="2A3B4D"/>
+            <a:schemeClr val="bg2">
+              <a:lumMod val="50000"/>
+            </a:schemeClr>
           </a:solidFill>
-          <a:ln w="25400">
+          <a:ln>
             <a:solidFill>
-              <a:srgbClr val="C05040"/>
+              <a:srgbClr val="FF0000"/>
             </a:solidFill>
           </a:ln>
         </p:spPr>
         <p:style>
-          <a:lnRef idx="1">
-            <a:schemeClr val="accent1"/>
+          <a:lnRef idx="2">
+            <a:schemeClr val="accent1">
+              <a:shade val="15000"/>
+            </a:schemeClr>
           </a:lnRef>
-          <a:fillRef idx="3">
+          <a:fillRef idx="1">
             <a:schemeClr val="accent1"/>
           </a:fillRef>
-          <a:effectRef idx="2">
+          <a:effectRef idx="0">
             <a:schemeClr val="accent1"/>
           </a:effectRef>
           <a:fontRef idx="minor">
@@ -27680,21 +28304,40 @@
           <a:bodyPr rtlCol="0" anchor="ctr"/>
           <a:lstStyle/>
           <a:p>
-            <a:pPr algn="ctr"/>
-            <a:endParaRPr/>
-          </a:p>
-        </p:txBody>
-      </p:sp>
-      <p:sp>
-        <p:nvSpPr>
-          <p:cNvPr id="26" name="TextBox 25"/>
+            <a:r>
+              <a:rPr lang="en-US" sz="2400" b="1" dirty="0">
+                <a:solidFill>
+                  <a:srgbClr val="FF0000"/>
+                </a:solidFill>
+              </a:rPr>
+              <a:t>PowerShell decision</a:t>
+            </a:r>
+          </a:p>
+          <a:p>
+            <a:endParaRPr lang="en-US" sz="2400" b="1" dirty="0">
+              <a:solidFill>
+                <a:srgbClr val="FF0000"/>
+              </a:solidFill>
+            </a:endParaRPr>
+          </a:p>
+        </p:txBody>
+      </p:sp>
+      <p:sp>
+        <p:nvSpPr>
+          <p:cNvPr id="44" name="TextBox 43">
+            <a:extLst>
+              <a:ext uri="{FF2B5EF4-FFF2-40B4-BE49-F238E27FC236}">
+                <a16:creationId xmlns:a16="http://schemas.microsoft.com/office/drawing/2014/main" id="{0897D5A4-7A74-5F48-1356-221D06184314}"/>
+              </a:ext>
+            </a:extLst>
+          </p:cNvPr>
           <p:cNvSpPr txBox="1"/>
           <p:nvPr/>
         </p:nvSpPr>
         <p:spPr>
           <a:xfrm>
-            <a:off x="3383280" y="5212080"/>
-            <a:ext cx="5486400" cy="320040"/>
+            <a:off x="1280160" y="5644294"/>
+            <a:ext cx="2623566" cy="307777"/>
           </a:xfrm>
           <a:prstGeom prst="rect">
             <a:avLst/>
@@ -27702,57 +28345,276 @@
           <a:noFill/>
         </p:spPr>
         <p:txBody>
-          <a:bodyPr wrap="none">
+          <a:bodyPr wrap="square">
             <a:spAutoFit/>
           </a:bodyPr>
           <a:lstStyle/>
           <a:p>
-            <a:pPr algn="l"/>
-            <a:r>
-              <a:rPr sz="1500" b="1" i="0">
-                <a:solidFill>
-                  <a:srgbClr val="C05040"/>
-                </a:solidFill>
-              </a:rPr>
-              <a:t>PowerShell decision</a:t>
-            </a:r>
-          </a:p>
-        </p:txBody>
-      </p:sp>
-      <p:sp>
-        <p:nvSpPr>
-          <p:cNvPr id="27" name="TextBox 26"/>
-          <p:cNvSpPr txBox="1"/>
-          <p:nvPr/>
-        </p:nvSpPr>
-        <p:spPr>
-          <a:xfrm>
-            <a:off x="3383280" y="5532120"/>
-            <a:ext cx="5486400" cy="274320"/>
-          </a:xfrm>
-          <a:prstGeom prst="rect">
-            <a:avLst/>
-          </a:prstGeom>
-          <a:noFill/>
-        </p:spPr>
-        <p:txBody>
-          <a:bodyPr wrap="none">
-            <a:spAutoFit/>
-          </a:bodyPr>
-          <a:lstStyle/>
-          <a:p>
-            <a:pPr algn="l"/>
-            <a:r>
-              <a:rPr sz="1100" b="0" i="0">
-                <a:solidFill>
-                  <a:srgbClr val="AABBCC"/>
-                </a:solidFill>
-              </a:rPr>
-              <a:t>  CLEAN → execute   /   MAL → red error</a:t>
-            </a:r>
-          </a:p>
-        </p:txBody>
-      </p:sp>
+            <a:r>
+              <a:rPr lang="es-ES" sz="1400" b="0" i="0" dirty="0">
+                <a:solidFill>
+                  <a:schemeClr val="accent3">
+                    <a:lumMod val="60000"/>
+                    <a:lumOff val="40000"/>
+                  </a:schemeClr>
+                </a:solidFill>
+              </a:rPr>
+              <a:t> </a:t>
+            </a:r>
+            <a:r>
+              <a:rPr lang="es-ES" sz="1400" b="0" i="0" dirty="0" err="1">
+                <a:solidFill>
+                  <a:schemeClr val="accent3">
+                    <a:lumMod val="60000"/>
+                    <a:lumOff val="40000"/>
+                  </a:schemeClr>
+                </a:solidFill>
+              </a:rPr>
+              <a:t>CLEAN→execute</a:t>
+            </a:r>
+            <a:r>
+              <a:rPr lang="es-ES" sz="1400" b="0" i="0" dirty="0">
+                <a:solidFill>
+                  <a:schemeClr val="accent3">
+                    <a:lumMod val="60000"/>
+                    <a:lumOff val="40000"/>
+                  </a:schemeClr>
+                </a:solidFill>
+              </a:rPr>
+              <a:t> / MAL → error</a:t>
+            </a:r>
+            <a:endParaRPr lang="en-US" sz="1400" dirty="0">
+              <a:solidFill>
+                <a:schemeClr val="accent3">
+                  <a:lumMod val="60000"/>
+                  <a:lumOff val="40000"/>
+                </a:schemeClr>
+              </a:solidFill>
+            </a:endParaRPr>
+          </a:p>
+        </p:txBody>
+      </p:sp>
+      <p:cxnSp>
+        <p:nvCxnSpPr>
+          <p:cNvPr id="46" name="Straight Arrow Connector 45">
+            <a:extLst>
+              <a:ext uri="{FF2B5EF4-FFF2-40B4-BE49-F238E27FC236}">
+                <a16:creationId xmlns:a16="http://schemas.microsoft.com/office/drawing/2014/main" id="{B78B926D-CF5E-299A-4825-B22C5E6E4175}"/>
+              </a:ext>
+            </a:extLst>
+          </p:cNvPr>
+          <p:cNvCxnSpPr>
+            <a:stCxn id="28" idx="3"/>
+          </p:cNvCxnSpPr>
+          <p:nvPr/>
+        </p:nvCxnSpPr>
+        <p:spPr>
+          <a:xfrm>
+            <a:off x="4203128" y="1793617"/>
+            <a:ext cx="696500" cy="218062"/>
+          </a:xfrm>
+          <a:prstGeom prst="straightConnector1">
+            <a:avLst/>
+          </a:prstGeom>
+          <a:ln w="38100">
+            <a:solidFill>
+              <a:schemeClr val="bg1"/>
+            </a:solidFill>
+            <a:tailEnd type="triangle"/>
+          </a:ln>
+        </p:spPr>
+        <p:style>
+          <a:lnRef idx="1">
+            <a:schemeClr val="accent1"/>
+          </a:lnRef>
+          <a:fillRef idx="0">
+            <a:schemeClr val="accent1"/>
+          </a:fillRef>
+          <a:effectRef idx="0">
+            <a:schemeClr val="accent1"/>
+          </a:effectRef>
+          <a:fontRef idx="minor">
+            <a:schemeClr val="tx1"/>
+          </a:fontRef>
+        </p:style>
+      </p:cxnSp>
+      <p:cxnSp>
+        <p:nvCxnSpPr>
+          <p:cNvPr id="47" name="Straight Arrow Connector 46">
+            <a:extLst>
+              <a:ext uri="{FF2B5EF4-FFF2-40B4-BE49-F238E27FC236}">
+                <a16:creationId xmlns:a16="http://schemas.microsoft.com/office/drawing/2014/main" id="{B1874B17-F6A3-2448-F90F-F13668EA0C07}"/>
+              </a:ext>
+            </a:extLst>
+          </p:cNvPr>
+          <p:cNvCxnSpPr/>
+          <p:nvPr/>
+        </p:nvCxnSpPr>
+        <p:spPr>
+          <a:xfrm>
+            <a:off x="7700391" y="2103119"/>
+            <a:ext cx="696500" cy="218062"/>
+          </a:xfrm>
+          <a:prstGeom prst="straightConnector1">
+            <a:avLst/>
+          </a:prstGeom>
+          <a:ln w="38100">
+            <a:solidFill>
+              <a:schemeClr val="bg1"/>
+            </a:solidFill>
+            <a:tailEnd type="triangle"/>
+          </a:ln>
+        </p:spPr>
+        <p:style>
+          <a:lnRef idx="1">
+            <a:schemeClr val="accent1"/>
+          </a:lnRef>
+          <a:fillRef idx="0">
+            <a:schemeClr val="accent1"/>
+          </a:fillRef>
+          <a:effectRef idx="0">
+            <a:schemeClr val="accent1"/>
+          </a:effectRef>
+          <a:fontRef idx="minor">
+            <a:schemeClr val="tx1"/>
+          </a:fontRef>
+        </p:style>
+      </p:cxnSp>
+      <p:cxnSp>
+        <p:nvCxnSpPr>
+          <p:cNvPr id="48" name="Straight Arrow Connector 47">
+            <a:extLst>
+              <a:ext uri="{FF2B5EF4-FFF2-40B4-BE49-F238E27FC236}">
+                <a16:creationId xmlns:a16="http://schemas.microsoft.com/office/drawing/2014/main" id="{2524BDAA-5D66-3968-D842-8CBB453EE911}"/>
+              </a:ext>
+            </a:extLst>
+          </p:cNvPr>
+          <p:cNvCxnSpPr>
+            <a:cxnSpLocks/>
+            <a:endCxn id="36" idx="0"/>
+          </p:cNvCxnSpPr>
+          <p:nvPr/>
+        </p:nvCxnSpPr>
+        <p:spPr>
+          <a:xfrm>
+            <a:off x="10148125" y="3195771"/>
+            <a:ext cx="0" cy="589854"/>
+          </a:xfrm>
+          <a:prstGeom prst="straightConnector1">
+            <a:avLst/>
+          </a:prstGeom>
+          <a:ln w="38100">
+            <a:solidFill>
+              <a:schemeClr val="bg1"/>
+            </a:solidFill>
+            <a:tailEnd type="triangle"/>
+          </a:ln>
+        </p:spPr>
+        <p:style>
+          <a:lnRef idx="1">
+            <a:schemeClr val="accent1"/>
+          </a:lnRef>
+          <a:fillRef idx="0">
+            <a:schemeClr val="accent1"/>
+          </a:fillRef>
+          <a:effectRef idx="0">
+            <a:schemeClr val="accent1"/>
+          </a:effectRef>
+          <a:fontRef idx="minor">
+            <a:schemeClr val="tx1"/>
+          </a:fontRef>
+        </p:style>
+      </p:cxnSp>
+      <p:cxnSp>
+        <p:nvCxnSpPr>
+          <p:cNvPr id="50" name="Straight Arrow Connector 49">
+            <a:extLst>
+              <a:ext uri="{FF2B5EF4-FFF2-40B4-BE49-F238E27FC236}">
+                <a16:creationId xmlns:a16="http://schemas.microsoft.com/office/drawing/2014/main" id="{7E8071C5-C3BF-6B32-C30F-849EC3BA60A7}"/>
+              </a:ext>
+            </a:extLst>
+          </p:cNvPr>
+          <p:cNvCxnSpPr>
+            <a:cxnSpLocks/>
+            <a:endCxn id="39" idx="3"/>
+          </p:cNvCxnSpPr>
+          <p:nvPr/>
+        </p:nvCxnSpPr>
+        <p:spPr>
+          <a:xfrm flipH="1">
+            <a:off x="7848791" y="4422074"/>
+            <a:ext cx="642159" cy="617448"/>
+          </a:xfrm>
+          <a:prstGeom prst="straightConnector1">
+            <a:avLst/>
+          </a:prstGeom>
+          <a:ln w="38100">
+            <a:solidFill>
+              <a:schemeClr val="bg1"/>
+            </a:solidFill>
+            <a:tailEnd type="triangle"/>
+          </a:ln>
+        </p:spPr>
+        <p:style>
+          <a:lnRef idx="1">
+            <a:schemeClr val="accent1"/>
+          </a:lnRef>
+          <a:fillRef idx="0">
+            <a:schemeClr val="accent1"/>
+          </a:fillRef>
+          <a:effectRef idx="0">
+            <a:schemeClr val="accent1"/>
+          </a:effectRef>
+          <a:fontRef idx="minor">
+            <a:schemeClr val="tx1"/>
+          </a:fontRef>
+        </p:style>
+      </p:cxnSp>
+      <p:cxnSp>
+        <p:nvCxnSpPr>
+          <p:cNvPr id="52" name="Straight Arrow Connector 51">
+            <a:extLst>
+              <a:ext uri="{FF2B5EF4-FFF2-40B4-BE49-F238E27FC236}">
+                <a16:creationId xmlns:a16="http://schemas.microsoft.com/office/drawing/2014/main" id="{1C7C3855-8513-0AF2-7376-ECFE497F269F}"/>
+              </a:ext>
+            </a:extLst>
+          </p:cNvPr>
+          <p:cNvCxnSpPr>
+            <a:cxnSpLocks/>
+            <a:endCxn id="42" idx="3"/>
+          </p:cNvCxnSpPr>
+          <p:nvPr/>
+        </p:nvCxnSpPr>
+        <p:spPr>
+          <a:xfrm flipH="1">
+            <a:off x="4230260" y="4940253"/>
+            <a:ext cx="632619" cy="575138"/>
+          </a:xfrm>
+          <a:prstGeom prst="straightConnector1">
+            <a:avLst/>
+          </a:prstGeom>
+          <a:ln w="38100">
+            <a:solidFill>
+              <a:schemeClr val="bg1"/>
+            </a:solidFill>
+            <a:tailEnd type="triangle"/>
+          </a:ln>
+        </p:spPr>
+        <p:style>
+          <a:lnRef idx="1">
+            <a:schemeClr val="accent1"/>
+          </a:lnRef>
+          <a:fillRef idx="0">
+            <a:schemeClr val="accent1"/>
+          </a:fillRef>
+          <a:effectRef idx="0">
+            <a:schemeClr val="accent1"/>
+          </a:effectRef>
+          <a:fontRef idx="minor">
+            <a:schemeClr val="tx1"/>
+          </a:fontRef>
+        </p:style>
+      </p:cxnSp>
     </p:spTree>
   </p:cSld>
   <p:clrMapOvr>
@@ -27913,7 +28775,9 @@
             <a:avLst/>
           </a:prstGeom>
           <a:solidFill>
-            <a:srgbClr val="2A3B4D"/>
+            <a:schemeClr val="accent6">
+              <a:lumMod val="50000"/>
+            </a:schemeClr>
           </a:solidFill>
           <a:ln>
             <a:noFill/>
@@ -27951,7 +28815,7 @@
         <p:spPr>
           <a:xfrm>
             <a:off x="731520" y="1417319"/>
-            <a:ext cx="3108960" cy="411480"/>
+            <a:ext cx="2088842" cy="400110"/>
           </a:xfrm>
           <a:prstGeom prst="rect">
             <a:avLst/>
@@ -27966,13 +28830,26 @@
           <a:p>
             <a:pPr algn="l"/>
             <a:r>
-              <a:rPr sz="1600" b="1" i="0">
-                <a:solidFill>
-                  <a:srgbClr val="D85218"/>
-                </a:solidFill>
-              </a:rPr>
-              <a:t>Patch w pamięci</a:t>
-            </a:r>
+              <a:rPr sz="2000" b="1" i="0" dirty="0">
+                <a:solidFill>
+                  <a:schemeClr val="accent2"/>
+                </a:solidFill>
+              </a:rPr>
+              <a:t>Patch w </a:t>
+            </a:r>
+            <a:r>
+              <a:rPr sz="2000" b="1" i="0" dirty="0" err="1">
+                <a:solidFill>
+                  <a:schemeClr val="accent2"/>
+                </a:solidFill>
+              </a:rPr>
+              <a:t>pamięci</a:t>
+            </a:r>
+            <a:endParaRPr sz="2000" b="1" i="0" dirty="0">
+              <a:solidFill>
+                <a:schemeClr val="accent2"/>
+              </a:solidFill>
+            </a:endParaRPr>
           </a:p>
         </p:txBody>
       </p:sp>
@@ -27984,8 +28861,8 @@
         </p:nvSpPr>
         <p:spPr>
           <a:xfrm>
-            <a:off x="731520" y="1874519"/>
-            <a:ext cx="3108960" cy="4480560"/>
+            <a:off x="494324" y="2183188"/>
+            <a:ext cx="3666196" cy="2718693"/>
           </a:xfrm>
           <a:prstGeom prst="rect">
             <a:avLst/>
@@ -28004,13 +28881,42 @@
               </a:spcAft>
             </a:pPr>
             <a:r>
-              <a:rPr sz="1200">
-                <a:solidFill>
-                  <a:srgbClr val="FFFFFF"/>
-                </a:solidFill>
-              </a:rPr>
-              <a:t>• VirtualProtect + WriteProcessMemory</a:t>
-            </a:r>
+              <a:rPr sz="1600" dirty="0">
+                <a:solidFill>
+                  <a:srgbClr val="FFFFFF"/>
+                </a:solidFill>
+              </a:rPr>
+              <a:t>• </a:t>
+            </a:r>
+            <a:r>
+              <a:rPr sz="1600" dirty="0" err="1">
+                <a:solidFill>
+                  <a:srgbClr val="FFFFFF"/>
+                </a:solidFill>
+              </a:rPr>
+              <a:t>VirtualProtect</a:t>
+            </a:r>
+            <a:r>
+              <a:rPr sz="1600" dirty="0">
+                <a:solidFill>
+                  <a:srgbClr val="FFFFFF"/>
+                </a:solidFill>
+              </a:rPr>
+              <a:t> + </a:t>
+            </a:r>
+            <a:r>
+              <a:rPr sz="1600" dirty="0" err="1">
+                <a:solidFill>
+                  <a:srgbClr val="FFFFFF"/>
+                </a:solidFill>
+              </a:rPr>
+              <a:t>WriteProcessMemory</a:t>
+            </a:r>
+            <a:endParaRPr lang="en-US" sz="1600" dirty="0">
+              <a:solidFill>
+                <a:srgbClr val="FFFFFF"/>
+              </a:solidFill>
+            </a:endParaRPr>
           </a:p>
           <a:p>
             <a:pPr algn="l">
@@ -28018,14 +28924,11 @@
                 <a:spcPts val="400"/>
               </a:spcAft>
             </a:pPr>
-            <a:r>
-              <a:rPr sz="1200">
-                <a:solidFill>
-                  <a:srgbClr val="FFFFFF"/>
-                </a:solidFill>
-              </a:rPr>
-              <a:t>• Patchuje AmsiScanBuffer entry</a:t>
-            </a:r>
+            <a:endParaRPr sz="1600" dirty="0">
+              <a:solidFill>
+                <a:srgbClr val="FFFFFF"/>
+              </a:solidFill>
+            </a:endParaRPr>
           </a:p>
           <a:p>
             <a:pPr algn="l">
@@ -28034,13 +28937,50 @@
               </a:spcAft>
             </a:pPr>
             <a:r>
-              <a:rPr sz="1200">
-                <a:solidFill>
-                  <a:srgbClr val="FFFFFF"/>
-                </a:solidFill>
-              </a:rPr>
-              <a:t>• Returns AMSI_RESULT_CLEAN</a:t>
-            </a:r>
+              <a:rPr sz="1600" dirty="0">
+                <a:solidFill>
+                  <a:srgbClr val="FFFFFF"/>
+                </a:solidFill>
+              </a:rPr>
+              <a:t>• </a:t>
+            </a:r>
+            <a:r>
+              <a:rPr sz="1600" dirty="0" err="1">
+                <a:solidFill>
+                  <a:srgbClr val="FFFFFF"/>
+                </a:solidFill>
+              </a:rPr>
+              <a:t>Patchuje</a:t>
+            </a:r>
+            <a:r>
+              <a:rPr sz="1600" dirty="0">
+                <a:solidFill>
+                  <a:srgbClr val="FFFFFF"/>
+                </a:solidFill>
+              </a:rPr>
+              <a:t> </a:t>
+            </a:r>
+            <a:r>
+              <a:rPr sz="1600" dirty="0" err="1">
+                <a:solidFill>
+                  <a:srgbClr val="FFFFFF"/>
+                </a:solidFill>
+              </a:rPr>
+              <a:t>AmsiScanBuffer</a:t>
+            </a:r>
+            <a:r>
+              <a:rPr sz="1600" dirty="0">
+                <a:solidFill>
+                  <a:srgbClr val="FFFFFF"/>
+                </a:solidFill>
+              </a:rPr>
+              <a:t> entry</a:t>
+            </a:r>
+            <a:endParaRPr lang="en-US" sz="1600" dirty="0">
+              <a:solidFill>
+                <a:srgbClr val="FFFFFF"/>
+              </a:solidFill>
+            </a:endParaRPr>
           </a:p>
           <a:p>
             <a:pPr algn="l">
@@ -28048,14 +28988,11 @@
                 <a:spcPts val="400"/>
               </a:spcAft>
             </a:pPr>
-            <a:r>
-              <a:rPr sz="1200">
-                <a:solidFill>
-                  <a:srgbClr val="FFFFFF"/>
-                </a:solidFill>
-              </a:rPr>
-              <a:t>• → Matt Graeber (2016)</a:t>
-            </a:r>
+            <a:endParaRPr sz="1600" dirty="0">
+              <a:solidFill>
+                <a:srgbClr val="FFFFFF"/>
+              </a:solidFill>
+            </a:endParaRPr>
           </a:p>
           <a:p>
             <a:pPr algn="l">
@@ -28064,13 +29001,18 @@
               </a:spcAft>
             </a:pPr>
             <a:r>
-              <a:rPr sz="1200">
-                <a:solidFill>
-                  <a:srgbClr val="FFFFFF"/>
-                </a:solidFill>
-              </a:rPr>
-              <a:t>• → Tal Liberman variants</a:t>
-            </a:r>
+              <a:rPr sz="1600" dirty="0">
+                <a:solidFill>
+                  <a:srgbClr val="FFFFFF"/>
+                </a:solidFill>
+              </a:rPr>
+              <a:t>• Returns AMSI_RESULT_CLEAN</a:t>
+            </a:r>
+            <a:endParaRPr lang="en-US" sz="1600" dirty="0">
+              <a:solidFill>
+                <a:srgbClr val="FFFFFF"/>
+              </a:solidFill>
+            </a:endParaRPr>
           </a:p>
           <a:p>
             <a:pPr algn="l">
@@ -28078,14 +29020,117 @@
                 <a:spcPts val="400"/>
               </a:spcAft>
             </a:pPr>
-            <a:r>
-              <a:rPr sz="1200">
-                <a:solidFill>
-                  <a:srgbClr val="FFFFFF"/>
-                </a:solidFill>
-              </a:rPr>
-              <a:t>• Pierwszy znany bypass; nadal działa</a:t>
-            </a:r>
+            <a:endParaRPr sz="1600" dirty="0">
+              <a:solidFill>
+                <a:srgbClr val="FFFFFF"/>
+              </a:solidFill>
+            </a:endParaRPr>
+          </a:p>
+          <a:p>
+            <a:pPr algn="l">
+              <a:spcAft>
+                <a:spcPts val="400"/>
+              </a:spcAft>
+            </a:pPr>
+            <a:r>
+              <a:rPr sz="1600" dirty="0">
+                <a:solidFill>
+                  <a:srgbClr val="FFFFFF"/>
+                </a:solidFill>
+              </a:rPr>
+              <a:t>• → Matt Graeber (2016)</a:t>
+            </a:r>
+          </a:p>
+          <a:p>
+            <a:pPr algn="l">
+              <a:spcAft>
+                <a:spcPts val="400"/>
+              </a:spcAft>
+            </a:pPr>
+            <a:r>
+              <a:rPr sz="1600" dirty="0">
+                <a:solidFill>
+                  <a:srgbClr val="FFFFFF"/>
+                </a:solidFill>
+              </a:rPr>
+              <a:t>• → Tal Liberman variants</a:t>
+            </a:r>
+          </a:p>
+          <a:p>
+            <a:pPr algn="l">
+              <a:spcAft>
+                <a:spcPts val="400"/>
+              </a:spcAft>
+            </a:pPr>
+            <a:r>
+              <a:rPr sz="1600" dirty="0">
+                <a:solidFill>
+                  <a:srgbClr val="FFFFFF"/>
+                </a:solidFill>
+              </a:rPr>
+              <a:t>• </a:t>
+            </a:r>
+            <a:r>
+              <a:rPr sz="1600" dirty="0" err="1">
+                <a:solidFill>
+                  <a:srgbClr val="FFFFFF"/>
+                </a:solidFill>
+              </a:rPr>
+              <a:t>Pierwszy</a:t>
+            </a:r>
+            <a:r>
+              <a:rPr sz="1600" dirty="0">
+                <a:solidFill>
+                  <a:srgbClr val="FFFFFF"/>
+                </a:solidFill>
+              </a:rPr>
+              <a:t> </a:t>
+            </a:r>
+            <a:r>
+              <a:rPr sz="1600" dirty="0" err="1">
+                <a:solidFill>
+                  <a:srgbClr val="FFFFFF"/>
+                </a:solidFill>
+              </a:rPr>
+              <a:t>znany</a:t>
+            </a:r>
+            <a:r>
+              <a:rPr sz="1600" dirty="0">
+                <a:solidFill>
+                  <a:srgbClr val="FFFFFF"/>
+                </a:solidFill>
+              </a:rPr>
+              <a:t> bypass; </a:t>
+            </a:r>
+            <a:r>
+              <a:rPr sz="1600" dirty="0" err="1">
+                <a:solidFill>
+                  <a:srgbClr val="FFFFFF"/>
+                </a:solidFill>
+              </a:rPr>
+              <a:t>nadal</a:t>
+            </a:r>
+            <a:r>
+              <a:rPr sz="1600" dirty="0">
+                <a:solidFill>
+                  <a:srgbClr val="FFFFFF"/>
+                </a:solidFill>
+              </a:rPr>
+              <a:t> </a:t>
+            </a:r>
+            <a:r>
+              <a:rPr sz="1600" dirty="0" err="1">
+                <a:solidFill>
+                  <a:srgbClr val="FFFFFF"/>
+                </a:solidFill>
+              </a:rPr>
+              <a:t>działa</a:t>
+            </a:r>
+            <a:endParaRPr sz="1600" dirty="0">
+              <a:solidFill>
+                <a:srgbClr val="FFFFFF"/>
+              </a:solidFill>
+            </a:endParaRPr>
           </a:p>
         </p:txBody>
       </p:sp>
@@ -28104,7 +29149,9 @@
             <a:avLst/>
           </a:prstGeom>
           <a:solidFill>
-            <a:srgbClr val="2A3B4D"/>
+            <a:schemeClr val="accent5">
+              <a:lumMod val="50000"/>
+            </a:schemeClr>
           </a:solidFill>
           <a:ln>
             <a:noFill/>
@@ -28142,7 +29189,7 @@
         <p:spPr>
           <a:xfrm>
             <a:off x="4572000" y="1417319"/>
-            <a:ext cx="3108960" cy="411480"/>
+            <a:ext cx="2657138" cy="461665"/>
           </a:xfrm>
           <a:prstGeom prst="rect">
             <a:avLst/>
@@ -28157,9 +29204,9 @@
           <a:p>
             <a:pPr algn="l"/>
             <a:r>
-              <a:rPr sz="1600" b="1" i="0">
-                <a:solidFill>
-                  <a:srgbClr val="D85218"/>
+              <a:rPr sz="2400" b="1" i="0" dirty="0">
+                <a:solidFill>
+                  <a:schemeClr val="accent2"/>
                 </a:solidFill>
               </a:rPr>
               <a:t>Reflection bypass</a:t>
@@ -28175,8 +29222,8 @@
         </p:nvSpPr>
         <p:spPr>
           <a:xfrm>
-            <a:off x="4572000" y="1874519"/>
-            <a:ext cx="3108960" cy="4480560"/>
+            <a:off x="4399687" y="1969628"/>
+            <a:ext cx="3464153" cy="1826141"/>
           </a:xfrm>
           <a:prstGeom prst="rect">
             <a:avLst/>
@@ -28195,13 +29242,50 @@
               </a:spcAft>
             </a:pPr>
             <a:r>
-              <a:rPr sz="1200">
-                <a:solidFill>
-                  <a:srgbClr val="FFFFFF"/>
-                </a:solidFill>
-              </a:rPr>
-              <a:t>• [Ref].Assembly.GetType('AmsiUtils')</a:t>
-            </a:r>
+              <a:rPr sz="1600" dirty="0">
+                <a:solidFill>
+                  <a:srgbClr val="FFFFFF"/>
+                </a:solidFill>
+              </a:rPr>
+              <a:t>• [Ref].</a:t>
+            </a:r>
+            <a:r>
+              <a:rPr sz="1600" dirty="0" err="1">
+                <a:solidFill>
+                  <a:srgbClr val="FFFFFF"/>
+                </a:solidFill>
+              </a:rPr>
+              <a:t>Assembly.GetType</a:t>
+            </a:r>
+            <a:r>
+              <a:rPr sz="1600" dirty="0">
+                <a:solidFill>
+                  <a:srgbClr val="FFFFFF"/>
+                </a:solidFill>
+              </a:rPr>
+              <a:t>('</a:t>
+            </a:r>
+            <a:r>
+              <a:rPr sz="1600" dirty="0" err="1">
+                <a:solidFill>
+                  <a:srgbClr val="FFFFFF"/>
+                </a:solidFill>
+              </a:rPr>
+              <a:t>AmsiUtils</a:t>
+            </a:r>
+            <a:r>
+              <a:rPr sz="1600" dirty="0">
+                <a:solidFill>
+                  <a:srgbClr val="FFFFFF"/>
+                </a:solidFill>
+              </a:rPr>
+              <a:t>')</a:t>
+            </a:r>
+            <a:endParaRPr lang="en-US" sz="1600" dirty="0">
+              <a:solidFill>
+                <a:srgbClr val="FFFFFF"/>
+              </a:solidFill>
+            </a:endParaRPr>
           </a:p>
           <a:p>
             <a:pPr algn="l">
@@ -28210,12 +29294,44 @@
               </a:spcAft>
             </a:pPr>
             <a:r>
-              <a:rPr sz="1200">
-                <a:solidFill>
-                  <a:srgbClr val="FFFFFF"/>
-                </a:solidFill>
-              </a:rPr>
-              <a:t>• .GetField('amsiInitFailed')</a:t>
+              <a:rPr sz="1600" dirty="0">
+                <a:solidFill>
+                  <a:srgbClr val="FFFFFF"/>
+                </a:solidFill>
+              </a:rPr>
+              <a:t>.</a:t>
+            </a:r>
+            <a:r>
+              <a:rPr sz="1600" dirty="0" err="1">
+                <a:solidFill>
+                  <a:srgbClr val="FFFFFF"/>
+                </a:solidFill>
+              </a:rPr>
+              <a:t>GetField</a:t>
+            </a:r>
+            <a:r>
+              <a:rPr sz="1600" dirty="0">
+                <a:solidFill>
+                  <a:srgbClr val="FFFFFF"/>
+                </a:solidFill>
+              </a:rPr>
+              <a:t>('</a:t>
+            </a:r>
+            <a:r>
+              <a:rPr sz="1600" dirty="0" err="1">
+                <a:solidFill>
+                  <a:srgbClr val="FFFFFF"/>
+                </a:solidFill>
+              </a:rPr>
+              <a:t>amsiInitFailed</a:t>
+            </a:r>
+            <a:r>
+              <a:rPr sz="1600" dirty="0">
+                <a:solidFill>
+                  <a:srgbClr val="FFFFFF"/>
+                </a:solidFill>
+              </a:rPr>
+              <a:t>')</a:t>
             </a:r>
           </a:p>
           <a:p>
@@ -28225,12 +29341,28 @@
               </a:spcAft>
             </a:pPr>
             <a:r>
-              <a:rPr sz="1200">
-                <a:solidFill>
-                  <a:srgbClr val="FFFFFF"/>
-                </a:solidFill>
-              </a:rPr>
-              <a:t>• .SetValue($null, $true)</a:t>
+              <a:rPr sz="1600" dirty="0">
+                <a:solidFill>
+                  <a:srgbClr val="FFFFFF"/>
+                </a:solidFill>
+              </a:rPr>
+              <a:t>• .</a:t>
+            </a:r>
+            <a:r>
+              <a:rPr sz="1600" dirty="0" err="1">
+                <a:solidFill>
+                  <a:srgbClr val="FFFFFF"/>
+                </a:solidFill>
+              </a:rPr>
+              <a:t>SetValue</a:t>
+            </a:r>
+            <a:r>
+              <a:rPr sz="1600" dirty="0">
+                <a:solidFill>
+                  <a:srgbClr val="FFFFFF"/>
+                </a:solidFill>
+              </a:rPr>
+              <a:t>($null, $true)</a:t>
             </a:r>
           </a:p>
           <a:p>
@@ -28240,12 +29372,28 @@
               </a:spcAft>
             </a:pPr>
             <a:r>
-              <a:rPr sz="1200">
-                <a:solidFill>
-                  <a:srgbClr val="FFFFFF"/>
-                </a:solidFill>
-              </a:rPr>
-              <a:t>• Wyłącza AMSI session flag</a:t>
+              <a:rPr sz="1600" dirty="0">
+                <a:solidFill>
+                  <a:srgbClr val="FFFFFF"/>
+                </a:solidFill>
+              </a:rPr>
+              <a:t>• </a:t>
+            </a:r>
+            <a:r>
+              <a:rPr sz="1600" dirty="0" err="1">
+                <a:solidFill>
+                  <a:srgbClr val="FFFFFF"/>
+                </a:solidFill>
+              </a:rPr>
+              <a:t>Wyłącza</a:t>
+            </a:r>
+            <a:r>
+              <a:rPr sz="1600" dirty="0">
+                <a:solidFill>
+                  <a:srgbClr val="FFFFFF"/>
+                </a:solidFill>
+              </a:rPr>
+              <a:t> AMSI session flag</a:t>
             </a:r>
           </a:p>
           <a:p>
@@ -28255,13 +29403,26 @@
               </a:spcAft>
             </a:pPr>
             <a:r>
-              <a:rPr sz="1200">
-                <a:solidFill>
-                  <a:srgbClr val="FFFFFF"/>
-                </a:solidFill>
-              </a:rPr>
-              <a:t>• → One-liner, najprostszy</a:t>
-            </a:r>
+              <a:rPr sz="1600" dirty="0">
+                <a:solidFill>
+                  <a:srgbClr val="FFFFFF"/>
+                </a:solidFill>
+              </a:rPr>
+              <a:t>• → One-liner, </a:t>
+            </a:r>
+            <a:r>
+              <a:rPr sz="1600" dirty="0" err="1">
+                <a:solidFill>
+                  <a:srgbClr val="FFFFFF"/>
+                </a:solidFill>
+              </a:rPr>
+              <a:t>najprostszy</a:t>
+            </a:r>
+            <a:endParaRPr sz="1600" dirty="0">
+              <a:solidFill>
+                <a:srgbClr val="FFFFFF"/>
+              </a:solidFill>
+            </a:endParaRPr>
           </a:p>
           <a:p>
             <a:pPr algn="l">
@@ -28270,13 +29431,42 @@
               </a:spcAft>
             </a:pPr>
             <a:r>
-              <a:rPr sz="1200">
-                <a:solidFill>
-                  <a:srgbClr val="FFFFFF"/>
-                </a:solidFill>
-              </a:rPr>
-              <a:t>• Patchowany MS 2019, wraca</a:t>
-            </a:r>
+              <a:rPr sz="1600" dirty="0">
+                <a:solidFill>
+                  <a:srgbClr val="FFFFFF"/>
+                </a:solidFill>
+              </a:rPr>
+              <a:t>• </a:t>
+            </a:r>
+            <a:r>
+              <a:rPr sz="1600" dirty="0" err="1">
+                <a:solidFill>
+                  <a:srgbClr val="FFFFFF"/>
+                </a:solidFill>
+              </a:rPr>
+              <a:t>Patchowany</a:t>
+            </a:r>
+            <a:r>
+              <a:rPr sz="1600" dirty="0">
+                <a:solidFill>
+                  <a:srgbClr val="FFFFFF"/>
+                </a:solidFill>
+              </a:rPr>
+              <a:t> MS 2019, </a:t>
+            </a:r>
+            <a:r>
+              <a:rPr sz="1600" dirty="0" err="1">
+                <a:solidFill>
+                  <a:srgbClr val="FFFFFF"/>
+                </a:solidFill>
+              </a:rPr>
+              <a:t>wraca</a:t>
+            </a:r>
+            <a:endParaRPr sz="1600" dirty="0">
+              <a:solidFill>
+                <a:srgbClr val="FFFFFF"/>
+              </a:solidFill>
+            </a:endParaRPr>
           </a:p>
         </p:txBody>
       </p:sp>
@@ -28333,7 +29523,7 @@
         <p:spPr>
           <a:xfrm>
             <a:off x="8412480" y="1417319"/>
-            <a:ext cx="3108960" cy="411480"/>
+            <a:ext cx="2801088" cy="461665"/>
           </a:xfrm>
           <a:prstGeom prst="rect">
             <a:avLst/>
@@ -28348,12 +29538,28 @@
           <a:p>
             <a:pPr algn="l"/>
             <a:r>
-              <a:rPr sz="1600" b="1" i="0">
-                <a:solidFill>
-                  <a:srgbClr val="D85218"/>
-                </a:solidFill>
-              </a:rPr>
-              <a:t>COM/vtable hijack</a:t>
+              <a:rPr sz="2400" b="1" i="0" dirty="0">
+                <a:solidFill>
+                  <a:schemeClr val="accent2"/>
+                </a:solidFill>
+              </a:rPr>
+              <a:t>COM/</a:t>
+            </a:r>
+            <a:r>
+              <a:rPr sz="2400" b="1" i="0" dirty="0" err="1">
+                <a:solidFill>
+                  <a:schemeClr val="accent2"/>
+                </a:solidFill>
+              </a:rPr>
+              <a:t>vtable</a:t>
+            </a:r>
+            <a:r>
+              <a:rPr sz="2400" b="1" i="0" dirty="0">
+                <a:solidFill>
+                  <a:schemeClr val="accent2"/>
+                </a:solidFill>
+              </a:rPr>
+              <a:t> hijack</a:t>
             </a:r>
           </a:p>
         </p:txBody>
@@ -28625,7 +29831,7 @@
         <p:spPr>
           <a:xfrm>
             <a:off x="731520" y="1051560"/>
-            <a:ext cx="10972800" cy="365760"/>
+            <a:ext cx="6847131" cy="307777"/>
           </a:xfrm>
           <a:prstGeom prst="rect">
             <a:avLst/>
@@ -28640,12 +29846,134 @@
           <a:p>
             <a:pPr algn="l"/>
             <a:r>
-              <a:rPr sz="1400" b="0" i="1">
-                <a:solidFill>
-                  <a:srgbClr val="94B6D2"/>
-                </a:solidFill>
-              </a:rPr>
-              <a:t>github.com/radkum/AmsiProviderScanDisruption  —  technika opublikowana 5 lat temu.</a:t>
+              <a:rPr sz="1400" b="0" i="1" dirty="0">
+                <a:solidFill>
+                  <a:schemeClr val="tx1">
+                    <a:lumMod val="95000"/>
+                  </a:schemeClr>
+                </a:solidFill>
+              </a:rPr>
+              <a:t>github.com/</a:t>
+            </a:r>
+            <a:r>
+              <a:rPr sz="1400" b="0" i="1" dirty="0" err="1">
+                <a:solidFill>
+                  <a:schemeClr val="tx1">
+                    <a:lumMod val="95000"/>
+                  </a:schemeClr>
+                </a:solidFill>
+              </a:rPr>
+              <a:t>radkum</a:t>
+            </a:r>
+            <a:r>
+              <a:rPr sz="1400" b="0" i="1" dirty="0">
+                <a:solidFill>
+                  <a:schemeClr val="tx1">
+                    <a:lumMod val="95000"/>
+                  </a:schemeClr>
+                </a:solidFill>
+              </a:rPr>
+              <a:t>/</a:t>
+            </a:r>
+            <a:r>
+              <a:rPr sz="1400" b="0" i="1" dirty="0" err="1">
+                <a:solidFill>
+                  <a:schemeClr val="tx1">
+                    <a:lumMod val="95000"/>
+                  </a:schemeClr>
+                </a:solidFill>
+              </a:rPr>
+              <a:t>AmsiProviderScanDisruption</a:t>
+            </a:r>
+            <a:r>
+              <a:rPr sz="1400" b="0" i="1" dirty="0">
+                <a:solidFill>
+                  <a:schemeClr val="tx1">
+                    <a:lumMod val="95000"/>
+                  </a:schemeClr>
+                </a:solidFill>
+              </a:rPr>
+              <a:t>  —  </a:t>
+            </a:r>
+            <a:r>
+              <a:rPr sz="1400" b="0" i="1" dirty="0" err="1">
+                <a:solidFill>
+                  <a:schemeClr val="tx1">
+                    <a:lumMod val="95000"/>
+                  </a:schemeClr>
+                </a:solidFill>
+              </a:rPr>
+              <a:t>technika</a:t>
+            </a:r>
+            <a:r>
+              <a:rPr sz="1400" b="0" i="1" dirty="0">
+                <a:solidFill>
+                  <a:schemeClr val="tx1">
+                    <a:lumMod val="95000"/>
+                  </a:schemeClr>
+                </a:solidFill>
+              </a:rPr>
+              <a:t> </a:t>
+            </a:r>
+            <a:r>
+              <a:rPr sz="1400" b="0" i="1" dirty="0" err="1">
+                <a:solidFill>
+                  <a:schemeClr val="tx1">
+                    <a:lumMod val="95000"/>
+                  </a:schemeClr>
+                </a:solidFill>
+              </a:rPr>
+              <a:t>opublikowana</a:t>
+            </a:r>
+            <a:r>
+              <a:rPr sz="1400" b="0" i="1" dirty="0">
+                <a:solidFill>
+                  <a:schemeClr val="tx1">
+                    <a:lumMod val="95000"/>
+                  </a:schemeClr>
+                </a:solidFill>
+              </a:rPr>
+              <a:t> 5 </a:t>
+            </a:r>
+            <a:r>
+              <a:rPr sz="1400" b="0" i="1" dirty="0" err="1">
+                <a:solidFill>
+                  <a:schemeClr val="tx1">
+                    <a:lumMod val="95000"/>
+                  </a:schemeClr>
+                </a:solidFill>
+              </a:rPr>
+              <a:t>lat</a:t>
+            </a:r>
+            <a:r>
+              <a:rPr sz="1400" b="0" i="1" dirty="0">
+                <a:solidFill>
+                  <a:schemeClr val="tx1">
+                    <a:lumMod val="95000"/>
+                  </a:schemeClr>
+                </a:solidFill>
+              </a:rPr>
+              <a:t> </a:t>
+            </a:r>
+            <a:r>
+              <a:rPr sz="1400" b="0" i="1" dirty="0" err="1">
+                <a:solidFill>
+                  <a:schemeClr val="tx1">
+                    <a:lumMod val="95000"/>
+                  </a:schemeClr>
+                </a:solidFill>
+              </a:rPr>
+              <a:t>temu</a:t>
+            </a:r>
+            <a:r>
+              <a:rPr sz="1400" b="0" i="1" dirty="0">
+                <a:solidFill>
+                  <a:schemeClr val="tx1">
+                    <a:lumMod val="95000"/>
+                  </a:schemeClr>
+                </a:solidFill>
+              </a:rPr>
+              <a:t>.</a:t>
             </a:r>
           </a:p>
         </p:txBody>
@@ -28658,8 +29986,8 @@
         </p:nvSpPr>
         <p:spPr>
           <a:xfrm>
-            <a:off x="731520" y="1554480"/>
-            <a:ext cx="10972800" cy="365760"/>
+            <a:off x="1097280" y="1442740"/>
+            <a:ext cx="1008609" cy="523220"/>
           </a:xfrm>
           <a:prstGeom prst="rect">
             <a:avLst/>
@@ -28674,9 +30002,9 @@
           <a:p>
             <a:pPr algn="l"/>
             <a:r>
-              <a:rPr sz="1800" b="1" i="0">
-                <a:solidFill>
-                  <a:srgbClr val="D85218"/>
+              <a:rPr sz="2800" b="1" i="0" dirty="0">
+                <a:solidFill>
+                  <a:schemeClr val="accent2"/>
                 </a:solidFill>
               </a:rPr>
               <a:t>Idea:</a:t>
@@ -28692,8 +30020,8 @@
         </p:nvSpPr>
         <p:spPr>
           <a:xfrm>
-            <a:off x="1097280" y="2011680"/>
-            <a:ext cx="10058400" cy="2286000"/>
+            <a:off x="1097280" y="1965960"/>
+            <a:ext cx="7047763" cy="2585323"/>
           </a:xfrm>
           <a:prstGeom prst="rect">
             <a:avLst/>
@@ -28706,98 +30034,180 @@
           </a:bodyPr>
           <a:lstStyle/>
           <a:p>
-            <a:pPr algn="l"/>
-            <a:r>
-              <a:rPr sz="1400" b="1">
-                <a:solidFill>
-                  <a:srgbClr val="D85218"/>
-                </a:solidFill>
-              </a:rPr>
-              <a:t>▸ </a:t>
-            </a:r>
-            <a:r>
-              <a:rPr sz="1400">
-                <a:solidFill>
-                  <a:srgbClr val="FFFFFF"/>
-                </a:solidFill>
-              </a:rPr>
-              <a:t>Wylistuj registered providerów z HKLM\…\AMSI\Providers</a:t>
-            </a:r>
-          </a:p>
-          <a:p>
-            <a:pPr algn="l"/>
-            <a:r>
-              <a:rPr sz="1400" b="1">
-                <a:solidFill>
-                  <a:srgbClr val="D85218"/>
-                </a:solidFill>
-              </a:rPr>
-              <a:t>▸ </a:t>
-            </a:r>
-            <a:r>
-              <a:rPr sz="1400">
-                <a:solidFill>
-                  <a:srgbClr val="FFFFFF"/>
-                </a:solidFill>
-              </a:rPr>
-              <a:t>Załaduj ich COM DLL przez `DllGetClassObject`</a:t>
-            </a:r>
-          </a:p>
-          <a:p>
-            <a:pPr algn="l"/>
-            <a:r>
-              <a:rPr sz="1400" b="1">
-                <a:solidFill>
-                  <a:srgbClr val="D85218"/>
-                </a:solidFill>
-              </a:rPr>
-              <a:t>▸ </a:t>
-            </a:r>
-            <a:r>
-              <a:rPr sz="1400">
-                <a:solidFill>
-                  <a:srgbClr val="FFFFFF"/>
-                </a:solidFill>
-              </a:rPr>
-              <a:t>Wyciągnij IAntimalwareProvider COM object</a:t>
-            </a:r>
-          </a:p>
-          <a:p>
-            <a:pPr algn="l"/>
-            <a:r>
-              <a:rPr sz="1400" b="1">
-                <a:solidFill>
-                  <a:srgbClr val="D85218"/>
-                </a:solidFill>
-              </a:rPr>
-              <a:t>▸ </a:t>
-            </a:r>
-            <a:r>
-              <a:rPr sz="1400">
-                <a:solidFill>
-                  <a:srgbClr val="FFFFFF"/>
-                </a:solidFill>
-              </a:rPr>
-              <a:t>Patchuj vtable: `IAntimalwareProvider::Scan` → return CLEAN</a:t>
-            </a:r>
-          </a:p>
-          <a:p>
-            <a:pPr algn="l"/>
-            <a:r>
-              <a:rPr sz="1400" b="1">
-                <a:solidFill>
-                  <a:srgbClr val="D85218"/>
-                </a:solidFill>
-              </a:rPr>
-              <a:t>▸ </a:t>
-            </a:r>
-            <a:r>
-              <a:rPr sz="1400">
-                <a:solidFill>
-                  <a:srgbClr val="FFFFFF"/>
-                </a:solidFill>
-              </a:rPr>
-              <a:t>Każdy kolejny AMSI scan wraca CLEAN — bez modyfikacji amsi.dll</a:t>
+            <a:pPr marL="342900" indent="-342900" algn="l">
+              <a:buFont typeface="+mj-lt"/>
+              <a:buAutoNum type="arabicPeriod"/>
+            </a:pPr>
+            <a:r>
+              <a:rPr dirty="0" err="1"/>
+              <a:t>Wylistuj</a:t>
+            </a:r>
+            <a:r>
+              <a:rPr dirty="0"/>
+              <a:t> registered </a:t>
+            </a:r>
+            <a:r>
+              <a:rPr dirty="0" err="1"/>
+              <a:t>providerów</a:t>
+            </a:r>
+            <a:r>
+              <a:rPr dirty="0"/>
+              <a:t> z HKLM\…\AMSI\Providers</a:t>
+            </a:r>
+            <a:r>
+              <a:rPr lang="en-US" dirty="0"/>
+              <a:t>\</a:t>
+            </a:r>
+          </a:p>
+          <a:p>
+            <a:pPr marL="342900" indent="-342900" algn="l">
+              <a:buFont typeface="+mj-lt"/>
+              <a:buAutoNum type="arabicPeriod"/>
+            </a:pPr>
+            <a:endParaRPr dirty="0"/>
+          </a:p>
+          <a:p>
+            <a:pPr marL="342900" indent="-342900" algn="l">
+              <a:buFont typeface="+mj-lt"/>
+              <a:buAutoNum type="arabicPeriod"/>
+            </a:pPr>
+            <a:r>
+              <a:rPr dirty="0" err="1"/>
+              <a:t>Załaduj</a:t>
+            </a:r>
+            <a:r>
+              <a:rPr dirty="0"/>
+              <a:t> ich COM DLL </a:t>
+            </a:r>
+            <a:r>
+              <a:rPr dirty="0" err="1"/>
+              <a:t>przez</a:t>
+            </a:r>
+            <a:r>
+              <a:rPr dirty="0"/>
+              <a:t> `</a:t>
+            </a:r>
+            <a:r>
+              <a:rPr dirty="0" err="1"/>
+              <a:t>DllGetClassObject</a:t>
+            </a:r>
+            <a:r>
+              <a:rPr dirty="0"/>
+              <a:t>`</a:t>
+            </a:r>
+            <a:endParaRPr lang="en-US" dirty="0"/>
+          </a:p>
+          <a:p>
+            <a:pPr marL="342900" indent="-342900" algn="l">
+              <a:buFont typeface="+mj-lt"/>
+              <a:buAutoNum type="arabicPeriod"/>
+            </a:pPr>
+            <a:endParaRPr dirty="0"/>
+          </a:p>
+          <a:p>
+            <a:pPr marL="342900" indent="-342900" algn="l">
+              <a:buFont typeface="+mj-lt"/>
+              <a:buAutoNum type="arabicPeriod"/>
+            </a:pPr>
+            <a:r>
+              <a:rPr dirty="0" err="1"/>
+              <a:t>Wyciągnij</a:t>
+            </a:r>
+            <a:r>
+              <a:rPr dirty="0"/>
+              <a:t> </a:t>
+            </a:r>
+            <a:r>
+              <a:rPr dirty="0" err="1"/>
+              <a:t>IAntimalwareProvider</a:t>
+            </a:r>
+            <a:r>
+              <a:rPr dirty="0"/>
+              <a:t> COM object</a:t>
+            </a:r>
+            <a:endParaRPr lang="en-US" dirty="0"/>
+          </a:p>
+          <a:p>
+            <a:pPr marL="342900" indent="-342900" algn="l">
+              <a:buFont typeface="+mj-lt"/>
+              <a:buAutoNum type="arabicPeriod"/>
+            </a:pPr>
+            <a:endParaRPr dirty="0"/>
+          </a:p>
+          <a:p>
+            <a:pPr marL="342900" indent="-342900" algn="l">
+              <a:buFont typeface="+mj-lt"/>
+              <a:buAutoNum type="arabicPeriod"/>
+            </a:pPr>
+            <a:r>
+              <a:rPr dirty="0" err="1"/>
+              <a:t>Patchuj</a:t>
+            </a:r>
+            <a:r>
+              <a:rPr dirty="0"/>
+              <a:t> </a:t>
+            </a:r>
+            <a:r>
+              <a:rPr dirty="0" err="1"/>
+              <a:t>vtable</a:t>
+            </a:r>
+            <a:r>
+              <a:rPr dirty="0"/>
+              <a:t>: `</a:t>
+            </a:r>
+            <a:r>
+              <a:rPr dirty="0" err="1"/>
+              <a:t>IAntimalwareProvider</a:t>
+            </a:r>
+            <a:r>
+              <a:rPr dirty="0"/>
+              <a:t>::Scan` → return CLEAN</a:t>
+            </a:r>
+            <a:endParaRPr lang="en-US" dirty="0"/>
+          </a:p>
+          <a:p>
+            <a:pPr marL="342900" indent="-342900" algn="l">
+              <a:buFont typeface="+mj-lt"/>
+              <a:buAutoNum type="arabicPeriod"/>
+            </a:pPr>
+            <a:endParaRPr dirty="0"/>
+          </a:p>
+          <a:p>
+            <a:pPr marL="342900" indent="-342900" algn="l">
+              <a:buFont typeface="+mj-lt"/>
+              <a:buAutoNum type="arabicPeriod"/>
+            </a:pPr>
+            <a:r>
+              <a:rPr dirty="0" err="1"/>
+              <a:t>Każdy</a:t>
+            </a:r>
+            <a:r>
+              <a:rPr dirty="0"/>
+              <a:t> </a:t>
+            </a:r>
+            <a:r>
+              <a:rPr dirty="0" err="1"/>
+              <a:t>kolejny</a:t>
+            </a:r>
+            <a:r>
+              <a:rPr dirty="0"/>
+              <a:t> AMSI scan </a:t>
+            </a:r>
+            <a:r>
+              <a:rPr dirty="0" err="1"/>
+              <a:t>wraca</a:t>
+            </a:r>
+            <a:r>
+              <a:rPr dirty="0"/>
+              <a:t> CLEAN — bez </a:t>
+            </a:r>
+            <a:r>
+              <a:rPr dirty="0" err="1"/>
+              <a:t>modyfikacji</a:t>
+            </a:r>
+            <a:r>
+              <a:rPr dirty="0"/>
+              <a:t> amsi.dll</a:t>
             </a:r>
           </a:p>
         </p:txBody>
@@ -28821,7 +30231,9 @@
           </a:solidFill>
           <a:ln w="25400">
             <a:solidFill>
-              <a:srgbClr val="C05040"/>
+              <a:schemeClr val="tx1">
+                <a:lumMod val="85000"/>
+              </a:schemeClr>
             </a:solidFill>
           </a:ln>
         </p:spPr>
@@ -28856,8 +30268,8 @@
         </p:nvSpPr>
         <p:spPr>
           <a:xfrm>
-            <a:off x="914400" y="5029200"/>
-            <a:ext cx="10058400" cy="365760"/>
+            <a:off x="917042" y="4937760"/>
+            <a:ext cx="3066545" cy="400110"/>
           </a:xfrm>
           <a:prstGeom prst="rect">
             <a:avLst/>
@@ -28872,12 +30284,32 @@
           <a:p>
             <a:pPr algn="l"/>
             <a:r>
-              <a:rPr sz="1300" b="1" i="1">
-                <a:solidFill>
-                  <a:srgbClr val="C05040"/>
-                </a:solidFill>
-              </a:rPr>
-              <a:t>Co to znaczy dla obrońcy:</a:t>
+              <a:rPr sz="2000" b="1" i="1" dirty="0"/>
+              <a:t>Co to </a:t>
+            </a:r>
+            <a:r>
+              <a:rPr sz="2000" b="1" i="1" dirty="0" err="1"/>
+              <a:t>znaczy</a:t>
+            </a:r>
+            <a:r>
+              <a:rPr sz="2000" b="1" i="1" dirty="0"/>
+              <a:t> </a:t>
+            </a:r>
+            <a:r>
+              <a:rPr sz="2000" b="1" i="1" dirty="0" err="1"/>
+              <a:t>dla</a:t>
+            </a:r>
+            <a:r>
+              <a:rPr sz="2000" b="1" i="1" dirty="0"/>
+              <a:t> </a:t>
+            </a:r>
+            <a:r>
+              <a:rPr sz="2000" b="1" i="1" dirty="0" err="1"/>
+              <a:t>obrońcy</a:t>
+            </a:r>
+            <a:r>
+              <a:rPr sz="2000" b="1" i="1" dirty="0"/>
+              <a:t>:</a:t>
             </a:r>
           </a:p>
         </p:txBody>
@@ -28891,7 +30323,7 @@
         <p:spPr>
           <a:xfrm>
             <a:off x="914400" y="5349240"/>
-            <a:ext cx="10515600" cy="1005840"/>
+            <a:ext cx="10332720" cy="830997"/>
           </a:xfrm>
           <a:prstGeom prst="rect">
             <a:avLst/>
@@ -28899,41 +30331,370 @@
           <a:noFill/>
         </p:spPr>
         <p:txBody>
-          <a:bodyPr wrap="none">
+          <a:bodyPr wrap="square">
             <a:spAutoFit/>
           </a:bodyPr>
           <a:lstStyle/>
           <a:p>
-            <a:pPr algn="l"/>
-            <a:r>
-              <a:rPr sz="1200" b="0" i="0">
-                <a:solidFill>
-                  <a:srgbClr val="FFFFFF"/>
-                </a:solidFill>
-              </a:rPr>
-              <a:t>Atakujący nie tknął amsi.dll. Wszystkie EDR-y patrzące na patch amsi.dll widzą czysto.</a:t>
-            </a:r>
-          </a:p>
-          <a:p>
-            <a:pPr algn="l"/>
-            <a:r>
-              <a:rPr sz="1200" b="0" i="0">
-                <a:solidFill>
-                  <a:srgbClr val="FFFFFF"/>
-                </a:solidFill>
-              </a:rPr>
-              <a:t>Provider DLL też nietknięty — patch jest w vtable, w pamięci procesu.</a:t>
-            </a:r>
-          </a:p>
-          <a:p>
-            <a:pPr algn="l"/>
-            <a:r>
-              <a:rPr sz="1200" b="0" i="0">
-                <a:solidFill>
-                  <a:srgbClr val="FFFFFF"/>
-                </a:solidFill>
-              </a:rPr>
-              <a:t>Statyczna sygnatura złapie literalny kod. Ewasywna wersja (sample 27) — nie.</a:t>
+            <a:pPr marL="171450" indent="-171450" algn="l">
+              <a:buFont typeface="Arial" panose="020B0604020202020204" pitchFamily="34" charset="0"/>
+              <a:buChar char="•"/>
+            </a:pPr>
+            <a:r>
+              <a:rPr sz="1600" b="0" i="0" dirty="0" err="1">
+                <a:solidFill>
+                  <a:srgbClr val="FFFFFF"/>
+                </a:solidFill>
+              </a:rPr>
+              <a:t>Atakujący</a:t>
+            </a:r>
+            <a:r>
+              <a:rPr sz="1600" b="0" i="0" dirty="0">
+                <a:solidFill>
+                  <a:srgbClr val="FFFFFF"/>
+                </a:solidFill>
+              </a:rPr>
+              <a:t> </a:t>
+            </a:r>
+            <a:r>
+              <a:rPr sz="1600" b="0" i="0" dirty="0" err="1">
+                <a:solidFill>
+                  <a:srgbClr val="FFFFFF"/>
+                </a:solidFill>
+              </a:rPr>
+              <a:t>nie</a:t>
+            </a:r>
+            <a:r>
+              <a:rPr sz="1600" b="0" i="0" dirty="0">
+                <a:solidFill>
+                  <a:srgbClr val="FFFFFF"/>
+                </a:solidFill>
+              </a:rPr>
+              <a:t> </a:t>
+            </a:r>
+            <a:r>
+              <a:rPr sz="1600" b="0" i="0" dirty="0" err="1">
+                <a:solidFill>
+                  <a:srgbClr val="FFFFFF"/>
+                </a:solidFill>
+              </a:rPr>
+              <a:t>tknął</a:t>
+            </a:r>
+            <a:r>
+              <a:rPr sz="1600" b="0" i="0" dirty="0">
+                <a:solidFill>
+                  <a:srgbClr val="FFFFFF"/>
+                </a:solidFill>
+              </a:rPr>
+              <a:t> amsi.dll. </a:t>
+            </a:r>
+            <a:r>
+              <a:rPr sz="1600" b="0" i="0" dirty="0" err="1">
+                <a:solidFill>
+                  <a:srgbClr val="FFFFFF"/>
+                </a:solidFill>
+              </a:rPr>
+              <a:t>Wszystkie</a:t>
+            </a:r>
+            <a:r>
+              <a:rPr sz="1600" b="0" i="0" dirty="0">
+                <a:solidFill>
+                  <a:srgbClr val="FFFFFF"/>
+                </a:solidFill>
+              </a:rPr>
+              <a:t> EDR-y </a:t>
+            </a:r>
+            <a:r>
+              <a:rPr sz="1600" b="0" i="0" dirty="0" err="1">
+                <a:solidFill>
+                  <a:srgbClr val="FFFFFF"/>
+                </a:solidFill>
+              </a:rPr>
+              <a:t>patrzące</a:t>
+            </a:r>
+            <a:r>
+              <a:rPr sz="1600" b="0" i="0" dirty="0">
+                <a:solidFill>
+                  <a:srgbClr val="FFFFFF"/>
+                </a:solidFill>
+              </a:rPr>
+              <a:t> </a:t>
+            </a:r>
+            <a:r>
+              <a:rPr sz="1600" b="0" i="0" dirty="0" err="1">
+                <a:solidFill>
+                  <a:srgbClr val="FFFFFF"/>
+                </a:solidFill>
+              </a:rPr>
+              <a:t>na</a:t>
+            </a:r>
+            <a:r>
+              <a:rPr sz="1600" b="0" i="0" dirty="0">
+                <a:solidFill>
+                  <a:srgbClr val="FFFFFF"/>
+                </a:solidFill>
+              </a:rPr>
+              <a:t> patch amsi.dll </a:t>
+            </a:r>
+            <a:r>
+              <a:rPr sz="1600" b="0" i="0" dirty="0" err="1">
+                <a:solidFill>
+                  <a:srgbClr val="FFFFFF"/>
+                </a:solidFill>
+              </a:rPr>
+              <a:t>widzą</a:t>
+            </a:r>
+            <a:r>
+              <a:rPr sz="1600" b="0" i="0" dirty="0">
+                <a:solidFill>
+                  <a:srgbClr val="FFFFFF"/>
+                </a:solidFill>
+              </a:rPr>
+              <a:t> </a:t>
+            </a:r>
+            <a:r>
+              <a:rPr sz="1600" b="0" i="0" dirty="0" err="1">
+                <a:solidFill>
+                  <a:srgbClr val="FFFFFF"/>
+                </a:solidFill>
+              </a:rPr>
+              <a:t>czysto</a:t>
+            </a:r>
+            <a:r>
+              <a:rPr sz="1600" b="0" i="0" dirty="0">
+                <a:solidFill>
+                  <a:srgbClr val="FFFFFF"/>
+                </a:solidFill>
+              </a:rPr>
+              <a:t>.</a:t>
+            </a:r>
+          </a:p>
+          <a:p>
+            <a:pPr marL="171450" indent="-171450" algn="l">
+              <a:buFont typeface="Arial" panose="020B0604020202020204" pitchFamily="34" charset="0"/>
+              <a:buChar char="•"/>
+            </a:pPr>
+            <a:r>
+              <a:rPr sz="1600" b="0" i="0" dirty="0">
+                <a:solidFill>
+                  <a:srgbClr val="FFFFFF"/>
+                </a:solidFill>
+              </a:rPr>
+              <a:t>Provider DLL </a:t>
+            </a:r>
+            <a:r>
+              <a:rPr sz="1600" b="0" i="0" dirty="0" err="1">
+                <a:solidFill>
+                  <a:srgbClr val="FFFFFF"/>
+                </a:solidFill>
+              </a:rPr>
+              <a:t>też</a:t>
+            </a:r>
+            <a:r>
+              <a:rPr sz="1600" b="0" i="0" dirty="0">
+                <a:solidFill>
+                  <a:srgbClr val="FFFFFF"/>
+                </a:solidFill>
+              </a:rPr>
+              <a:t> </a:t>
+            </a:r>
+            <a:r>
+              <a:rPr sz="1600" b="0" i="0" dirty="0" err="1">
+                <a:solidFill>
+                  <a:srgbClr val="FFFFFF"/>
+                </a:solidFill>
+              </a:rPr>
+              <a:t>nietknięty</a:t>
+            </a:r>
+            <a:r>
+              <a:rPr sz="1600" b="0" i="0" dirty="0">
+                <a:solidFill>
+                  <a:srgbClr val="FFFFFF"/>
+                </a:solidFill>
+              </a:rPr>
+              <a:t> — patch jest w </a:t>
+            </a:r>
+            <a:r>
+              <a:rPr sz="1600" b="0" i="0" dirty="0" err="1">
+                <a:solidFill>
+                  <a:srgbClr val="FFFFFF"/>
+                </a:solidFill>
+              </a:rPr>
+              <a:t>vtable</a:t>
+            </a:r>
+            <a:r>
+              <a:rPr sz="1600" b="0" i="0" dirty="0">
+                <a:solidFill>
+                  <a:srgbClr val="FFFFFF"/>
+                </a:solidFill>
+              </a:rPr>
+              <a:t>, w </a:t>
+            </a:r>
+            <a:r>
+              <a:rPr sz="1600" b="0" i="0" dirty="0" err="1">
+                <a:solidFill>
+                  <a:srgbClr val="FFFFFF"/>
+                </a:solidFill>
+              </a:rPr>
+              <a:t>pamięci</a:t>
+            </a:r>
+            <a:r>
+              <a:rPr sz="1600" b="0" i="0" dirty="0">
+                <a:solidFill>
+                  <a:srgbClr val="FFFFFF"/>
+                </a:solidFill>
+              </a:rPr>
+              <a:t> </a:t>
+            </a:r>
+            <a:r>
+              <a:rPr sz="1600" b="0" i="0" dirty="0" err="1">
+                <a:solidFill>
+                  <a:srgbClr val="FFFFFF"/>
+                </a:solidFill>
+              </a:rPr>
+              <a:t>procesu</a:t>
+            </a:r>
+            <a:r>
+              <a:rPr sz="1600" b="0" i="0" dirty="0">
+                <a:solidFill>
+                  <a:srgbClr val="FFFFFF"/>
+                </a:solidFill>
+              </a:rPr>
+              <a:t>.</a:t>
+            </a:r>
+          </a:p>
+          <a:p>
+            <a:pPr marL="171450" indent="-171450" algn="l">
+              <a:buFont typeface="Arial" panose="020B0604020202020204" pitchFamily="34" charset="0"/>
+              <a:buChar char="•"/>
+            </a:pPr>
+            <a:r>
+              <a:rPr sz="1600" b="0" i="0" dirty="0" err="1">
+                <a:solidFill>
+                  <a:srgbClr val="FFFFFF"/>
+                </a:solidFill>
+              </a:rPr>
+              <a:t>Statyczna</a:t>
+            </a:r>
+            <a:r>
+              <a:rPr sz="1600" b="0" i="0" dirty="0">
+                <a:solidFill>
+                  <a:srgbClr val="FFFFFF"/>
+                </a:solidFill>
+              </a:rPr>
+              <a:t> </a:t>
+            </a:r>
+            <a:r>
+              <a:rPr sz="1600" b="0" i="0" dirty="0" err="1">
+                <a:solidFill>
+                  <a:srgbClr val="FFFFFF"/>
+                </a:solidFill>
+              </a:rPr>
+              <a:t>sygnatura</a:t>
+            </a:r>
+            <a:r>
+              <a:rPr sz="1600" b="0" i="0" dirty="0">
+                <a:solidFill>
+                  <a:srgbClr val="FFFFFF"/>
+                </a:solidFill>
+              </a:rPr>
+              <a:t> </a:t>
+            </a:r>
+            <a:r>
+              <a:rPr sz="1600" b="0" i="0" dirty="0" err="1">
+                <a:solidFill>
+                  <a:srgbClr val="FFFFFF"/>
+                </a:solidFill>
+              </a:rPr>
+              <a:t>złapie</a:t>
+            </a:r>
+            <a:r>
+              <a:rPr sz="1600" b="0" i="0" dirty="0">
+                <a:solidFill>
+                  <a:srgbClr val="FFFFFF"/>
+                </a:solidFill>
+              </a:rPr>
+              <a:t> </a:t>
+            </a:r>
+            <a:r>
+              <a:rPr sz="1600" b="0" i="0" dirty="0" err="1">
+                <a:solidFill>
+                  <a:srgbClr val="FFFFFF"/>
+                </a:solidFill>
+              </a:rPr>
+              <a:t>literalny</a:t>
+            </a:r>
+            <a:r>
+              <a:rPr sz="1600" b="0" i="0" dirty="0">
+                <a:solidFill>
+                  <a:srgbClr val="FFFFFF"/>
+                </a:solidFill>
+              </a:rPr>
+              <a:t> </a:t>
+            </a:r>
+            <a:r>
+              <a:rPr sz="1600" b="0" i="0" dirty="0" err="1">
+                <a:solidFill>
+                  <a:srgbClr val="FFFFFF"/>
+                </a:solidFill>
+              </a:rPr>
+              <a:t>kod</a:t>
+            </a:r>
+            <a:r>
+              <a:rPr sz="1600" b="0" i="0" dirty="0">
+                <a:solidFill>
+                  <a:srgbClr val="FFFFFF"/>
+                </a:solidFill>
+              </a:rPr>
+              <a:t>. </a:t>
+            </a:r>
+            <a:r>
+              <a:rPr sz="1600" b="0" i="0" dirty="0" err="1">
+                <a:solidFill>
+                  <a:srgbClr val="FFFFFF"/>
+                </a:solidFill>
+              </a:rPr>
+              <a:t>Ewasywna</a:t>
+            </a:r>
+            <a:r>
+              <a:rPr sz="1600" b="0" i="0" dirty="0">
+                <a:solidFill>
+                  <a:srgbClr val="FFFFFF"/>
+                </a:solidFill>
+              </a:rPr>
+              <a:t> </a:t>
+            </a:r>
+            <a:r>
+              <a:rPr sz="1600" b="0" i="0" dirty="0" err="1">
+                <a:solidFill>
+                  <a:srgbClr val="FFFFFF"/>
+                </a:solidFill>
+              </a:rPr>
+              <a:t>wersja</a:t>
+            </a:r>
+            <a:r>
+              <a:rPr sz="1600" b="0" i="0" dirty="0">
+                <a:solidFill>
+                  <a:srgbClr val="FFFFFF"/>
+                </a:solidFill>
+              </a:rPr>
+              <a:t> (sample 27) — </a:t>
+            </a:r>
+            <a:r>
+              <a:rPr sz="1600" b="0" i="0" dirty="0" err="1">
+                <a:solidFill>
+                  <a:srgbClr val="FFFFFF"/>
+                </a:solidFill>
+              </a:rPr>
+              <a:t>nie</a:t>
+            </a:r>
+            <a:r>
+              <a:rPr sz="1600" b="0" i="0" dirty="0">
+                <a:solidFill>
+                  <a:srgbClr val="FFFFFF"/>
+                </a:solidFill>
+              </a:rPr>
+              <a:t>.</a:t>
             </a:r>
           </a:p>
         </p:txBody>
@@ -29136,7 +30897,7 @@
         <p:spPr>
           <a:xfrm>
             <a:off x="640080" y="1234440"/>
-            <a:ext cx="3657600" cy="320040"/>
+            <a:ext cx="1581330" cy="307777"/>
           </a:xfrm>
           <a:prstGeom prst="rect">
             <a:avLst/>
@@ -29151,9 +30912,9 @@
           <a:p>
             <a:pPr algn="l"/>
             <a:r>
-              <a:rPr sz="1400" b="1" i="0">
-                <a:solidFill>
-                  <a:srgbClr val="D85218"/>
+              <a:rPr sz="1400" b="1" i="0" dirty="0">
+                <a:solidFill>
+                  <a:schemeClr val="accent2"/>
                 </a:solidFill>
               </a:rPr>
               <a:t>Base64 encoding</a:t>
@@ -29248,7 +31009,7 @@
         <p:spPr>
           <a:xfrm>
             <a:off x="640080" y="1737360"/>
-            <a:ext cx="3657600" cy="320040"/>
+            <a:ext cx="1896288" cy="307777"/>
           </a:xfrm>
           <a:prstGeom prst="rect">
             <a:avLst/>
@@ -29263,9 +31024,9 @@
           <a:p>
             <a:pPr algn="l"/>
             <a:r>
-              <a:rPr sz="1400" b="1" i="0">
-                <a:solidFill>
-                  <a:srgbClr val="D85218"/>
+              <a:rPr sz="1400" b="1" i="0" dirty="0">
+                <a:solidFill>
+                  <a:schemeClr val="accent2"/>
                 </a:solidFill>
               </a:rPr>
               <a:t>String concatenation</a:t>
@@ -29360,7 +31121,7 @@
         <p:spPr>
           <a:xfrm>
             <a:off x="640080" y="2240280"/>
-            <a:ext cx="3657600" cy="320040"/>
+            <a:ext cx="1682768" cy="307777"/>
           </a:xfrm>
           <a:prstGeom prst="rect">
             <a:avLst/>
@@ -29375,9 +31136,9 @@
           <a:p>
             <a:pPr algn="l"/>
             <a:r>
-              <a:rPr sz="1400" b="1" i="0">
-                <a:solidFill>
-                  <a:srgbClr val="D85218"/>
+              <a:rPr sz="1400" b="1" i="0" dirty="0">
+                <a:solidFill>
+                  <a:schemeClr val="accent2"/>
                 </a:solidFill>
               </a:rPr>
               <a:t>-f format operator</a:t>
@@ -29472,7 +31233,7 @@
         <p:spPr>
           <a:xfrm>
             <a:off x="640080" y="2743200"/>
-            <a:ext cx="3657600" cy="320040"/>
+            <a:ext cx="1833772" cy="307777"/>
           </a:xfrm>
           <a:prstGeom prst="rect">
             <a:avLst/>
@@ -29487,9 +31248,9 @@
           <a:p>
             <a:pPr algn="l"/>
             <a:r>
-              <a:rPr sz="1400" b="1" i="0">
-                <a:solidFill>
-                  <a:srgbClr val="D85218"/>
+              <a:rPr sz="1400" b="1" i="0" dirty="0">
+                <a:solidFill>
+                  <a:schemeClr val="accent2"/>
                 </a:solidFill>
               </a:rPr>
               <a:t>[char] casts / arrays</a:t>
@@ -29584,7 +31345,7 @@
         <p:spPr>
           <a:xfrm>
             <a:off x="640080" y="3246120"/>
-            <a:ext cx="3657600" cy="320040"/>
+            <a:ext cx="1920141" cy="307777"/>
           </a:xfrm>
           <a:prstGeom prst="rect">
             <a:avLst/>
@@ -29599,9 +31360,9 @@
           <a:p>
             <a:pPr algn="l"/>
             <a:r>
-              <a:rPr sz="1400" b="1" i="0">
-                <a:solidFill>
-                  <a:srgbClr val="D85218"/>
+              <a:rPr sz="1400" b="1" i="0" dirty="0">
+                <a:solidFill>
+                  <a:schemeClr val="accent2"/>
                 </a:solidFill>
               </a:rPr>
               <a:t>Custom class method</a:t>
@@ -29696,7 +31457,7 @@
         <p:spPr>
           <a:xfrm>
             <a:off x="640080" y="3749039"/>
-            <a:ext cx="3657600" cy="320040"/>
+            <a:ext cx="1557991" cy="307777"/>
           </a:xfrm>
           <a:prstGeom prst="rect">
             <a:avLst/>
@@ -29711,9 +31472,9 @@
           <a:p>
             <a:pPr algn="l"/>
             <a:r>
-              <a:rPr sz="1400" b="1" i="0">
-                <a:solidFill>
-                  <a:srgbClr val="D85218"/>
+              <a:rPr sz="1400" b="1" i="0" dirty="0">
+                <a:solidFill>
+                  <a:schemeClr val="accent2"/>
                 </a:solidFill>
               </a:rPr>
               <a:t>XOR + byte array</a:t>
@@ -29808,7 +31569,7 @@
         <p:spPr>
           <a:xfrm>
             <a:off x="640080" y="4251960"/>
-            <a:ext cx="3657600" cy="320040"/>
+            <a:ext cx="1912703" cy="307777"/>
           </a:xfrm>
           <a:prstGeom prst="rect">
             <a:avLst/>
@@ -29823,9 +31584,9 @@
           <a:p>
             <a:pPr algn="l"/>
             <a:r>
-              <a:rPr sz="1400" b="1" i="0">
-                <a:solidFill>
-                  <a:srgbClr val="D85218"/>
+              <a:rPr sz="1400" b="1" i="0" dirty="0">
+                <a:solidFill>
+                  <a:schemeClr val="accent2"/>
                 </a:solidFill>
               </a:rPr>
               <a:t>Backtick obfuscation</a:t>
@@ -29920,7 +31681,7 @@
         <p:spPr>
           <a:xfrm>
             <a:off x="640080" y="4754880"/>
-            <a:ext cx="3657600" cy="320040"/>
+            <a:ext cx="1776705" cy="307777"/>
           </a:xfrm>
           <a:prstGeom prst="rect">
             <a:avLst/>
@@ -29935,9 +31696,9 @@
           <a:p>
             <a:pPr algn="l"/>
             <a:r>
-              <a:rPr sz="1400" b="1" i="0">
-                <a:solidFill>
-                  <a:srgbClr val="D85218"/>
+              <a:rPr sz="1400" b="1" i="0" dirty="0">
+                <a:solidFill>
+                  <a:schemeClr val="accent2"/>
                 </a:solidFill>
               </a:rPr>
               <a:t>Reverse string slice</a:t>
@@ -30032,7 +31793,7 @@
         <p:spPr>
           <a:xfrm>
             <a:off x="640080" y="5257800"/>
-            <a:ext cx="3657600" cy="320040"/>
+            <a:ext cx="1574214" cy="307777"/>
           </a:xfrm>
           <a:prstGeom prst="rect">
             <a:avLst/>
@@ -30047,9 +31808,9 @@
           <a:p>
             <a:pPr algn="l"/>
             <a:r>
-              <a:rPr sz="1400" b="1" i="0">
-                <a:solidFill>
-                  <a:srgbClr val="D85218"/>
+              <a:rPr sz="1400" b="1" i="0" dirty="0">
+                <a:solidFill>
+                  <a:schemeClr val="accent2"/>
                 </a:solidFill>
               </a:rPr>
               <a:t>Env-var indexing</a:t>
@@ -30144,7 +31905,7 @@
         <p:spPr>
           <a:xfrm>
             <a:off x="640080" y="5760720"/>
-            <a:ext cx="3657600" cy="320040"/>
+            <a:ext cx="1854995" cy="307777"/>
           </a:xfrm>
           <a:prstGeom prst="rect">
             <a:avLst/>
@@ -30159,9 +31920,9 @@
           <a:p>
             <a:pPr algn="l"/>
             <a:r>
-              <a:rPr sz="1400" b="1" i="0">
-                <a:solidFill>
-                  <a:srgbClr val="D85218"/>
+              <a:rPr sz="1400" b="1" i="0" dirty="0">
+                <a:solidFill>
+                  <a:schemeClr val="accent2"/>
                 </a:solidFill>
               </a:rPr>
               <a:t>Embedded .NET DLL</a:t>
@@ -30256,7 +32017,7 @@
         <p:spPr>
           <a:xfrm>
             <a:off x="640080" y="6263640"/>
-            <a:ext cx="3657600" cy="320040"/>
+            <a:ext cx="1926810" cy="307777"/>
           </a:xfrm>
           <a:prstGeom prst="rect">
             <a:avLst/>
@@ -30271,9 +32032,9 @@
           <a:p>
             <a:pPr algn="l"/>
             <a:r>
-              <a:rPr sz="1400" b="1" i="0">
-                <a:solidFill>
-                  <a:srgbClr val="D85218"/>
+              <a:rPr sz="1400" b="1" i="0" dirty="0">
+                <a:solidFill>
+                  <a:schemeClr val="accent2"/>
                 </a:solidFill>
               </a:rPr>
               <a:t>Runtime-built names</a:t>
